--- a/設計工程表_使い方説明書.pptx
+++ b/設計工程表_使い方説明書.pptx
@@ -13,6 +13,7 @@
     <p:sldId id="261" r:id="rId12"/>
     <p:sldId id="262" r:id="rId13"/>
     <p:sldId id="263" r:id="rId14"/>
+    <p:sldId id="264" r:id="rId15"/>
   </p:sldIdLst>
   <p:sldSz cx="9144000" cy="5143500" type="screen4x3"/>
   <p:notesSz cx="6858000" cy="9144000"/>
@@ -3596,7 +3597,7 @@
                 </a:solidFill>
                 <a:latin typeface="Meiryo"/>
               </a:rPr>
-              <a:t>2 / 8</a:t>
+              <a:t>2 / 9</a:t>
             </a:r>
           </a:p>
         </p:txBody>
@@ -4430,7 +4431,7 @@
                 </a:solidFill>
                 <a:latin typeface="Meiryo"/>
               </a:rPr>
-              <a:t>3 / 8</a:t>
+              <a:t>3 / 9</a:t>
             </a:r>
           </a:p>
         </p:txBody>
@@ -6262,7 +6263,7 @@
                 </a:solidFill>
                 <a:latin typeface="Meiryo"/>
               </a:rPr>
-              <a:t>4 / 8</a:t>
+              <a:t>4 / 9</a:t>
             </a:r>
           </a:p>
         </p:txBody>
@@ -7560,7 +7561,7 @@
                 </a:solidFill>
                 <a:latin typeface="Meiryo"/>
               </a:rPr>
-              <a:t>5 / 8</a:t>
+              <a:t>5 / 9</a:t>
             </a:r>
           </a:p>
         </p:txBody>
@@ -8635,7 +8636,7 @@
                 </a:solidFill>
                 <a:latin typeface="Meiryo"/>
               </a:rPr>
-              <a:t>6 / 8</a:t>
+              <a:t>6 / 9</a:t>
             </a:r>
           </a:p>
         </p:txBody>
@@ -9403,7 +9404,7 @@
                 </a:solidFill>
                 <a:latin typeface="Meiryo"/>
               </a:rPr>
-              <a:t>7 / 8</a:t>
+              <a:t>7 / 9</a:t>
             </a:r>
           </a:p>
         </p:txBody>
@@ -10121,7 +10122,7 @@
         <p:spPr>
           <a:xfrm>
             <a:off x="4754880" y="2258568"/>
-            <a:ext cx="4160520" cy="914400"/>
+            <a:ext cx="4160520" cy="1572768"/>
           </a:xfrm>
           <a:prstGeom prst="rect">
             <a:avLst/>
@@ -10244,7 +10245,7 @@
         <p:spPr>
           <a:xfrm>
             <a:off x="4864608" y="2606040"/>
-            <a:ext cx="3941063" cy="548640"/>
+            <a:ext cx="3941063" cy="1207007"/>
           </a:xfrm>
           <a:prstGeom prst="rect">
             <a:avLst/>
@@ -10252,58 +10253,124 @@
           <a:noFill/>
         </p:spPr>
         <p:txBody insetl="0" insertr="0" insett="0" insetb="0">
-          <a:bodyPr wrap="square" anchor="ctr">
+          <a:bodyPr wrap="square" anchor="t">
             <a:spAutoFit/>
           </a:bodyPr>
           <a:lstStyle/>
           <a:p>
             <a:pPr algn="l">
               <a:spcAft>
-                <a:spcPts val="300"/>
+                <a:spcPts val="100"/>
               </a:spcAft>
             </a:pPr>
             <a:r>
-              <a:rPr sz="1100" b="1" i="0">
-                <a:solidFill>
-                  <a:srgbClr val="FFFFFF"/>
-                </a:solidFill>
-                <a:latin typeface="Meiryo"/>
-              </a:rPr>
-              <a:t>「×」ボタン</a:t>
-            </a:r>
-            <a:r>
-              <a:rPr sz="1100" b="0" i="0">
-                <a:solidFill>
-                  <a:srgbClr val="263238"/>
-                </a:solidFill>
-                <a:latin typeface="Meiryo"/>
-              </a:rPr>
-              <a:t>　：リソースパネルを閉じる</a:t>
+              <a:rPr sz="1050" b="1" i="0">
+                <a:solidFill>
+                  <a:srgbClr val="80CBC4"/>
+                </a:solidFill>
+                <a:latin typeface="Meiryo"/>
+              </a:rPr>
+              <a:t>【並列パネルを閉じる場合】</a:t>
             </a:r>
           </a:p>
           <a:p>
             <a:pPr algn="l">
               <a:spcAft>
-                <a:spcPts val="300"/>
+                <a:spcPts val="100"/>
               </a:spcAft>
             </a:pPr>
             <a:r>
-              <a:rPr sz="1100" b="1" i="0">
-                <a:solidFill>
-                  <a:srgbClr val="FFFFFF"/>
-                </a:solidFill>
-                <a:latin typeface="Meiryo"/>
-              </a:rPr>
-              <a:t>「担当別」ボタン再クリック</a:t>
-            </a:r>
-            <a:r>
-              <a:rPr sz="1100" b="0" i="0">
+              <a:rPr sz="1050" b="1" i="0">
+                <a:solidFill>
+                  <a:srgbClr val="546E7A"/>
+                </a:solidFill>
+                <a:latin typeface="Meiryo"/>
+              </a:rPr>
+              <a:t>「×」ボタン</a:t>
+            </a:r>
+            <a:r>
+              <a:rPr sz="1050" b="0" i="0">
                 <a:solidFill>
                   <a:srgbClr val="263238"/>
                 </a:solidFill>
                 <a:latin typeface="Meiryo"/>
               </a:rPr>
-              <a:t>　：全画面モードを終了してガントに戻る</a:t>
+              <a:t>　：リソースパネルを閉じる</a:t>
+            </a:r>
+          </a:p>
+          <a:p>
+            <a:pPr algn="l">
+              <a:spcAft>
+                <a:spcPts val="100"/>
+              </a:spcAft>
+            </a:pPr>
+            <a:r>
+              <a:rPr sz="1050" b="1" i="0">
+                <a:solidFill>
+                  <a:srgbClr val="546E7A"/>
+                </a:solidFill>
+                <a:latin typeface="Meiryo"/>
+              </a:rPr>
+              <a:t>「メイン表示に戻す」ボタン</a:t>
+            </a:r>
+            <a:r>
+              <a:rPr sz="1050" b="0" i="0">
+                <a:solidFill>
+                  <a:srgbClr val="263238"/>
+                </a:solidFill>
+                <a:latin typeface="Meiryo"/>
+              </a:rPr>
+              <a:t>　：同ボタンを再クリックして閉じる</a:t>
+            </a:r>
+          </a:p>
+          <a:p>
+            <a:pPr algn="l">
+              <a:spcAft>
+                <a:spcPts val="100"/>
+              </a:spcAft>
+            </a:pPr>
+            <a:r>
+              <a:rPr sz="1050" b="1" i="0">
+                <a:solidFill>
+                  <a:srgbClr val="80CBC4"/>
+                </a:solidFill>
+                <a:latin typeface="Meiryo"/>
+              </a:rPr>
+              <a:t>【全画面リソースモードを終了する場合】</a:t>
+            </a:r>
+          </a:p>
+          <a:p>
+            <a:pPr algn="l">
+              <a:spcAft>
+                <a:spcPts val="100"/>
+              </a:spcAft>
+            </a:pPr>
+            <a:r>
+              <a:rPr sz="1050" b="1" i="0">
+                <a:solidFill>
+                  <a:srgbClr val="546E7A"/>
+                </a:solidFill>
+                <a:latin typeface="Meiryo"/>
+              </a:rPr>
+              <a:t>フィルタ（図面/計画/長納期品/出張）</a:t>
+            </a:r>
+            <a:r>
+              <a:rPr sz="1050" b="0" i="0">
+                <a:solidFill>
+                  <a:srgbClr val="263238"/>
+                </a:solidFill>
+                <a:latin typeface="Meiryo"/>
+              </a:rPr>
+              <a:t>　：クリックでガントビューに切替</a:t>
+            </a:r>
+            <a:r>
+              <a:rPr sz="950" b="0" i="1">
+                <a:solidFill>
+                  <a:srgbClr val="90A4AE"/>
+                </a:solidFill>
+                <a:latin typeface="Meiryo"/>
+              </a:rPr>
+              <a:t>　※「担当別」再クリックでは閉じられません</a:t>
             </a:r>
           </a:p>
         </p:txBody>
@@ -10316,8 +10383,8 @@
         </p:nvSpPr>
         <p:spPr>
           <a:xfrm>
-            <a:off x="4754880" y="3273552"/>
-            <a:ext cx="4160520" cy="1472184"/>
+            <a:off x="4754880" y="3913632"/>
+            <a:ext cx="4160520" cy="850392"/>
           </a:xfrm>
           <a:prstGeom prst="rect">
             <a:avLst/>
@@ -10361,8 +10428,8 @@
         </p:nvSpPr>
         <p:spPr>
           <a:xfrm>
-            <a:off x="4882896" y="3337560"/>
-            <a:ext cx="3959352" cy="1344168"/>
+            <a:off x="4882896" y="3959352"/>
+            <a:ext cx="3959352" cy="768096"/>
           </a:xfrm>
           <a:prstGeom prst="rect">
             <a:avLst/>
@@ -10395,31 +10462,7 @@
                 </a:solidFill>
                 <a:latin typeface="Meiryo"/>
               </a:rPr>
-              <a:t>「リソース表示」ボタンで開いた場合、</a:t>
-            </a:r>
-            <a:br>
-              <a:rPr lang="ja-JP" sz="1050"/>
-            </a:br>
-            <a:r>
-              <a:rPr sz="1050" b="0" i="0">
-                <a:solidFill>
-                  <a:srgbClr val="5D4037"/>
-                </a:solidFill>
-                <a:latin typeface="Meiryo"/>
-              </a:rPr>
-              <a:t>ガントチャートと並列表示されます。</a:t>
-            </a:r>
-            <a:br>
-              <a:rPr lang="ja-JP" sz="1050"/>
-            </a:br>
-            <a:r>
-              <a:rPr sz="1050" b="0" i="0">
-                <a:solidFill>
-                  <a:srgbClr val="5D4037"/>
-                </a:solidFill>
-                <a:latin typeface="Meiryo"/>
-              </a:rPr>
-              <a:t>両者のスクロール位置は同期しています。</a:t>
+              <a:t>「リソース表示」ボタンで開いた場合、ガントチャートと並列表示されます。両者のスクロール位置は連動します。</a:t>
             </a:r>
           </a:p>
         </p:txBody>
@@ -10601,7 +10644,7 @@
                 </a:solidFill>
                 <a:latin typeface="Meiryo"/>
               </a:rPr>
-              <a:t>8 / 8</a:t>
+              <a:t>8 / 9</a:t>
             </a:r>
           </a:p>
         </p:txBody>
@@ -10615,7 +10658,7 @@
         <p:spPr>
           <a:xfrm>
             <a:off x="228600" y="749808"/>
-            <a:ext cx="4160520" cy="1234440"/>
+            <a:ext cx="4160520" cy="960120"/>
           </a:xfrm>
           <a:prstGeom prst="rect">
             <a:avLst/>
@@ -10738,7 +10781,7 @@
         <p:spPr>
           <a:xfrm>
             <a:off x="338328" y="1097280"/>
-            <a:ext cx="3941063" cy="868680"/>
+            <a:ext cx="3941063" cy="594360"/>
           </a:xfrm>
           <a:prstGeom prst="rect">
             <a:avLst/>
@@ -10808,8 +10851,8 @@
         </p:nvSpPr>
         <p:spPr>
           <a:xfrm>
-            <a:off x="228600" y="2075688"/>
-            <a:ext cx="4160520" cy="914400"/>
+            <a:off x="228600" y="1801368"/>
+            <a:ext cx="4160520" cy="1371600"/>
           </a:xfrm>
           <a:prstGeom prst="rect">
             <a:avLst/>
@@ -10853,7 +10896,7 @@
         </p:nvSpPr>
         <p:spPr>
           <a:xfrm>
-            <a:off x="228600" y="2075688"/>
+            <a:off x="228600" y="1801368"/>
             <a:ext cx="4160520" cy="292608"/>
           </a:xfrm>
           <a:prstGeom prst="rect">
@@ -10896,7 +10939,7 @@
         </p:nvSpPr>
         <p:spPr>
           <a:xfrm>
-            <a:off x="338328" y="2075688"/>
+            <a:off x="338328" y="1801368"/>
             <a:ext cx="3941063" cy="292608"/>
           </a:xfrm>
           <a:prstGeom prst="rect">
@@ -10931,8 +10974,8 @@
         </p:nvSpPr>
         <p:spPr>
           <a:xfrm>
-            <a:off x="338328" y="2423160"/>
-            <a:ext cx="3941063" cy="548640"/>
+            <a:off x="338328" y="2148840"/>
+            <a:ext cx="3941063" cy="1005839"/>
           </a:xfrm>
           <a:prstGeom prst="rect">
             <a:avLst/>
@@ -10973,7 +11016,7 @@
                 </a:solidFill>
                 <a:latin typeface="Meiryo"/>
               </a:rPr>
-              <a:t>アーカイブしたいタスクを選択して実行します</a:t>
+              <a:t>アーカイブしたいタスクにチェックを入れて「アーカイブ実行」を押します</a:t>
             </a:r>
           </a:p>
         </p:txBody>
@@ -10986,8 +11029,198 @@
         </p:nvSpPr>
         <p:spPr>
           <a:xfrm>
-            <a:off x="228600" y="3081528"/>
-            <a:ext cx="4160520" cy="1664208"/>
+            <a:off x="228600" y="3264408"/>
+            <a:ext cx="4160520" cy="1463040"/>
+          </a:xfrm>
+          <a:prstGeom prst="rect">
+            <a:avLst/>
+          </a:prstGeom>
+          <a:solidFill>
+            <a:srgbClr val="FFF8E1"/>
+          </a:solidFill>
+          <a:ln w="19050">
+            <a:solidFill>
+              <a:srgbClr val="FFCA28"/>
+            </a:solidFill>
+          </a:ln>
+        </p:spPr>
+        <p:style>
+          <a:lnRef idx="1">
+            <a:schemeClr val="accent1"/>
+          </a:lnRef>
+          <a:fillRef idx="3">
+            <a:schemeClr val="accent1"/>
+          </a:fillRef>
+          <a:effectRef idx="2">
+            <a:schemeClr val="accent1"/>
+          </a:effectRef>
+          <a:fontRef idx="minor">
+            <a:schemeClr val="lt1"/>
+          </a:fontRef>
+        </p:style>
+        <p:txBody>
+          <a:bodyPr rtlCol="0" anchor="ctr"/>
+          <a:lstStyle/>
+          <a:p>
+            <a:pPr algn="ctr"/>
+          </a:p>
+        </p:txBody>
+      </p:sp>
+      <p:sp>
+        <p:nvSpPr>
+          <p:cNvPr id="15" name="Rectangle 14"/>
+          <p:cNvSpPr/>
+          <p:nvPr/>
+        </p:nvSpPr>
+        <p:spPr>
+          <a:xfrm>
+            <a:off x="228600" y="3264408"/>
+            <a:ext cx="4160520" cy="256032"/>
+          </a:xfrm>
+          <a:prstGeom prst="rect">
+            <a:avLst/>
+          </a:prstGeom>
+          <a:solidFill>
+            <a:srgbClr val="FFCA28"/>
+          </a:solidFill>
+          <a:ln>
+            <a:noFill/>
+          </a:ln>
+        </p:spPr>
+        <p:style>
+          <a:lnRef idx="1">
+            <a:schemeClr val="accent1"/>
+          </a:lnRef>
+          <a:fillRef idx="3">
+            <a:schemeClr val="accent1"/>
+          </a:fillRef>
+          <a:effectRef idx="2">
+            <a:schemeClr val="accent1"/>
+          </a:effectRef>
+          <a:fontRef idx="minor">
+            <a:schemeClr val="lt1"/>
+          </a:fontRef>
+        </p:style>
+        <p:txBody>
+          <a:bodyPr rtlCol="0" anchor="ctr"/>
+          <a:lstStyle/>
+          <a:p>
+            <a:pPr algn="ctr"/>
+          </a:p>
+        </p:txBody>
+      </p:sp>
+      <p:sp>
+        <p:nvSpPr>
+          <p:cNvPr id="16" name="TextBox 15"/>
+          <p:cNvSpPr txBox="1"/>
+          <p:nvPr/>
+        </p:nvSpPr>
+        <p:spPr>
+          <a:xfrm>
+            <a:off x="338328" y="3264408"/>
+            <a:ext cx="3941063" cy="256032"/>
+          </a:xfrm>
+          <a:prstGeom prst="rect">
+            <a:avLst/>
+          </a:prstGeom>
+          <a:noFill/>
+        </p:spPr>
+        <p:txBody insetl="0" insertr="0" insett="0" insetb="0">
+          <a:bodyPr wrap="square" anchor="ctr">
+            <a:spAutoFit/>
+          </a:bodyPr>
+          <a:lstStyle/>
+          <a:p>
+            <a:pPr algn="l"/>
+            <a:r>
+              <a:rPr sz="1050" b="1" i="0">
+                <a:solidFill>
+                  <a:srgbClr val="263238"/>
+                </a:solidFill>
+                <a:latin typeface="Meiryo"/>
+              </a:rPr>
+              <a:t>ℹ アーカイブ操作について</a:t>
+            </a:r>
+          </a:p>
+        </p:txBody>
+      </p:sp>
+      <p:sp>
+        <p:nvSpPr>
+          <p:cNvPr id="17" name="TextBox 16"/>
+          <p:cNvSpPr txBox="1"/>
+          <p:nvPr/>
+        </p:nvSpPr>
+        <p:spPr>
+          <a:xfrm>
+            <a:off x="356616" y="3566160"/>
+            <a:ext cx="3959352" cy="1115568"/>
+          </a:xfrm>
+          <a:prstGeom prst="rect">
+            <a:avLst/>
+          </a:prstGeom>
+          <a:noFill/>
+        </p:spPr>
+        <p:txBody insetl="0" insertr="0" insett="0" insetb="0">
+          <a:bodyPr wrap="square" anchor="t">
+            <a:spAutoFit/>
+          </a:bodyPr>
+          <a:lstStyle/>
+          <a:p>
+            <a:pPr algn="l">
+              <a:spcAft>
+                <a:spcPts val="200"/>
+              </a:spcAft>
+            </a:pPr>
+            <a:r>
+              <a:rPr sz="1050" b="1" i="0">
+                <a:solidFill>
+                  <a:srgbClr val="1B5E20"/>
+                </a:solidFill>
+                <a:latin typeface="Meiryo"/>
+              </a:rPr>
+              <a:t>「戻す」ボタンで現役に戻せます</a:t>
+            </a:r>
+          </a:p>
+          <a:p>
+            <a:pPr algn="l">
+              <a:spcAft>
+                <a:spcPts val="200"/>
+              </a:spcAft>
+            </a:pPr>
+            <a:r>
+              <a:rPr sz="1050" b="0" i="0">
+                <a:solidFill>
+                  <a:srgbClr val="263238"/>
+                </a:solidFill>
+                <a:latin typeface="Meiryo"/>
+              </a:rPr>
+              <a:t>アーカイブ一覧の「戻す」ボタンを押すと、</a:t>
+            </a:r>
+            <a:br>
+              <a:rPr lang="ja-JP" sz="1050"/>
+            </a:br>
+            <a:r>
+              <a:rPr sz="1050" b="0" i="0">
+                <a:solidFill>
+                  <a:srgbClr val="263238"/>
+                </a:solidFill>
+                <a:latin typeface="Meiryo"/>
+              </a:rPr>
+              <a:t>その工事のすべてのタスクがメイン画面に復元されます。</a:t>
+            </a:r>
+          </a:p>
+        </p:txBody>
+      </p:sp>
+      <p:sp>
+        <p:nvSpPr>
+          <p:cNvPr id="18" name="Rectangle 17"/>
+          <p:cNvSpPr/>
+          <p:nvPr/>
+        </p:nvSpPr>
+        <p:spPr>
+          <a:xfrm>
+            <a:off x="4754880" y="749808"/>
+            <a:ext cx="4160520" cy="3977639"/>
           </a:xfrm>
           <a:prstGeom prst="rect">
             <a:avLst/>
@@ -11025,13 +11258,13 @@
       </p:sp>
       <p:sp>
         <p:nvSpPr>
-          <p:cNvPr id="15" name="Rectangle 14"/>
+          <p:cNvPr id="19" name="Rectangle 18"/>
           <p:cNvSpPr/>
           <p:nvPr/>
         </p:nvSpPr>
         <p:spPr>
           <a:xfrm>
-            <a:off x="228600" y="3081528"/>
+            <a:off x="4754880" y="749808"/>
             <a:ext cx="4160520" cy="292608"/>
           </a:xfrm>
           <a:prstGeom prst="rect">
@@ -11068,13 +11301,13 @@
       </p:sp>
       <p:sp>
         <p:nvSpPr>
-          <p:cNvPr id="16" name="TextBox 15"/>
+          <p:cNvPr id="20" name="TextBox 19"/>
           <p:cNvSpPr txBox="1"/>
           <p:nvPr/>
         </p:nvSpPr>
         <p:spPr>
           <a:xfrm>
-            <a:off x="338328" y="3081528"/>
+            <a:off x="4864608" y="749808"/>
             <a:ext cx="3941063" cy="292608"/>
           </a:xfrm>
           <a:prstGeom prst="rect">
@@ -11096,21 +11329,21 @@
                 </a:solidFill>
                 <a:latin typeface="Meiryo"/>
               </a:rPr>
-              <a:t>アーカイブ一覧（参照・コピー）</a:t>
-            </a:r>
-          </a:p>
-        </p:txBody>
-      </p:sp>
-      <p:sp>
-        <p:nvSpPr>
-          <p:cNvPr id="17" name="TextBox 16"/>
+              <a:t>アーカイブ一覧（復元・コピー）</a:t>
+            </a:r>
+          </a:p>
+        </p:txBody>
+      </p:sp>
+      <p:sp>
+        <p:nvSpPr>
+          <p:cNvPr id="21" name="TextBox 20"/>
           <p:cNvSpPr txBox="1"/>
           <p:nvPr/>
         </p:nvSpPr>
         <p:spPr>
           <a:xfrm>
-            <a:off x="338328" y="3429000"/>
-            <a:ext cx="3941063" cy="1298448"/>
+            <a:off x="4864608" y="1097280"/>
+            <a:ext cx="3941063" cy="3611879"/>
           </a:xfrm>
           <a:prstGeom prst="rect">
             <a:avLst/>
@@ -11125,11 +11358,11 @@
           <a:p>
             <a:pPr algn="l">
               <a:spcAft>
-                <a:spcPts val="200"/>
+                <a:spcPts val="100"/>
               </a:spcAft>
             </a:pPr>
             <a:r>
-              <a:rPr sz="1100" b="1" i="0">
+              <a:rPr sz="1050" b="1" i="0">
                 <a:solidFill>
                   <a:srgbClr val="263238"/>
                 </a:solidFill>
@@ -11141,95 +11374,240 @@
           <a:p>
             <a:pPr algn="l">
               <a:spcAft>
-                <a:spcPts val="200"/>
+                <a:spcPts val="100"/>
               </a:spcAft>
             </a:pPr>
             <a:r>
-              <a:rPr sz="1100" b="0" i="0">
+              <a:rPr sz="1050" b="0" i="0">
                 <a:solidFill>
                   <a:srgbClr val="263238"/>
                 </a:solidFill>
                 <a:latin typeface="Meiryo"/>
               </a:rPr>
-              <a:t>過去のアーカイブ済みタスクを一覧表示</a:t>
+              <a:t>アーカイブ済み工事が一覧表示されます</a:t>
             </a:r>
           </a:p>
           <a:p>
             <a:pPr algn="l">
               <a:spcAft>
-                <a:spcPts val="200"/>
+                <a:spcPts val="100"/>
               </a:spcAft>
             </a:pPr>
-            <a:r>
-              <a:rPr sz="1100" b="1" i="0">
-                <a:solidFill>
-                  <a:srgbClr val="263238"/>
-                </a:solidFill>
-                <a:latin typeface="Meiryo"/>
-              </a:rPr>
-              <a:t>タスクをクリック</a:t>
-            </a:r>
-            <a:r>
-              <a:rPr sz="1100" b="0" i="0">
-                <a:solidFill>
-                  <a:srgbClr val="263238"/>
-                </a:solidFill>
-                <a:latin typeface="Meiryo"/>
-              </a:rPr>
-              <a:t> → 詳細情報を確認できます</a:t>
-            </a:r>
           </a:p>
           <a:p>
             <a:pPr algn="l">
               <a:spcAft>
-                <a:spcPts val="200"/>
+                <a:spcPts val="100"/>
               </a:spcAft>
             </a:pPr>
             <a:r>
-              <a:rPr sz="1100" b="0" i="0">
+              <a:rPr sz="1050" b="1" i="0">
+                <a:solidFill>
+                  <a:srgbClr val="1565C0"/>
+                </a:solidFill>
+                <a:latin typeface="Meiryo"/>
+              </a:rPr>
+              <a:t>【復元する】</a:t>
+            </a:r>
+          </a:p>
+          <a:p>
+            <a:pPr algn="l">
+              <a:spcAft>
+                <a:spcPts val="100"/>
+              </a:spcAft>
+            </a:pPr>
+            <a:r>
+              <a:rPr sz="1050" b="0" i="0">
                 <a:solidFill>
                   <a:srgbClr val="263238"/>
                 </a:solidFill>
                 <a:latin typeface="Meiryo"/>
               </a:rPr>
-              <a:t>アーカイブ済みタスクを新しいタスクとして</a:t>
-            </a:r>
-            <a:br>
-              <a:rPr lang="ja-JP" sz="1100"/>
-            </a:br>
-            <a:r>
-              <a:rPr sz="1100" b="0" i="0">
+              <a:t>一覧の「戻す」ボタンをクリック</a:t>
+            </a:r>
+          </a:p>
+          <a:p>
+            <a:pPr algn="l">
+              <a:spcAft>
+                <a:spcPts val="100"/>
+              </a:spcAft>
+            </a:pPr>
+            <a:r>
+              <a:rPr sz="1050" b="0" i="0">
                 <a:solidFill>
                   <a:srgbClr val="263238"/>
                 </a:solidFill>
                 <a:latin typeface="Meiryo"/>
               </a:rPr>
-              <a:t>コピーすることも可能です</a:t>
-            </a:r>
-          </a:p>
-        </p:txBody>
-      </p:sp>
-      <p:sp>
-        <p:nvSpPr>
-          <p:cNvPr id="18" name="Rectangle 17"/>
+              <a:t>→ その工事の全タスクがメイン画面に戻ります</a:t>
+            </a:r>
+          </a:p>
+          <a:p>
+            <a:pPr algn="l">
+              <a:spcAft>
+                <a:spcPts val="100"/>
+              </a:spcAft>
+            </a:pPr>
+          </a:p>
+          <a:p>
+            <a:pPr algn="l">
+              <a:spcAft>
+                <a:spcPts val="100"/>
+              </a:spcAft>
+            </a:pPr>
+            <a:r>
+              <a:rPr sz="1050" b="1" i="0">
+                <a:solidFill>
+                  <a:srgbClr val="1565C0"/>
+                </a:solidFill>
+                <a:latin typeface="Meiryo"/>
+              </a:rPr>
+              <a:t>【新工事にコピーする（表示モード単位）】</a:t>
+            </a:r>
+          </a:p>
+          <a:p>
+            <a:pPr algn="l">
+              <a:spcAft>
+                <a:spcPts val="100"/>
+              </a:spcAft>
+            </a:pPr>
+            <a:r>
+              <a:rPr sz="1050" b="0" i="1">
+                <a:solidFill>
+                  <a:srgbClr val="90A4AE"/>
+                </a:solidFill>
+                <a:latin typeface="Meiryo"/>
+              </a:rPr>
+              <a:t>※ コピーはタスク単位ではなく表示モード単位です</a:t>
+            </a:r>
+          </a:p>
+          <a:p>
+            <a:pPr algn="l">
+              <a:spcAft>
+                <a:spcPts val="100"/>
+              </a:spcAft>
+            </a:pPr>
+            <a:r>
+              <a:rPr sz="1050" b="0" i="0">
+                <a:solidFill>
+                  <a:srgbClr val="263238"/>
+                </a:solidFill>
+                <a:latin typeface="Meiryo"/>
+              </a:rPr>
+              <a:t>① 一覧の「詳細」ボタンをクリック</a:t>
+            </a:r>
+          </a:p>
+          <a:p>
+            <a:pPr algn="l">
+              <a:spcAft>
+                <a:spcPts val="100"/>
+              </a:spcAft>
+            </a:pPr>
+            <a:r>
+              <a:rPr sz="1050" b="0" i="0">
+                <a:solidFill>
+                  <a:srgbClr val="263238"/>
+                </a:solidFill>
+                <a:latin typeface="Meiryo"/>
+              </a:rPr>
+              <a:t>② タブ（図面/計画/長納期品/出張）でモードを選択して内容を確認</a:t>
+            </a:r>
+          </a:p>
+          <a:p>
+            <a:pPr algn="l">
+              <a:spcAft>
+                <a:spcPts val="100"/>
+              </a:spcAft>
+            </a:pPr>
+            <a:r>
+              <a:rPr sz="1050" b="0" i="0">
+                <a:solidFill>
+                  <a:srgbClr val="263238"/>
+                </a:solidFill>
+                <a:latin typeface="Meiryo"/>
+              </a:rPr>
+              <a:t>③「このモードをコピー」ボタンをクリック</a:t>
+            </a:r>
+          </a:p>
+          <a:p>
+            <a:pPr algn="l">
+              <a:spcAft>
+                <a:spcPts val="100"/>
+              </a:spcAft>
+            </a:pPr>
+            <a:r>
+              <a:rPr sz="1050" b="0" i="0">
+                <a:solidFill>
+                  <a:srgbClr val="263238"/>
+                </a:solidFill>
+                <a:latin typeface="Meiryo"/>
+              </a:rPr>
+              <a:t>④ 新しい工事番号を入力して「コピーして追加」</a:t>
+            </a:r>
+          </a:p>
+          <a:p>
+            <a:pPr algn="l">
+              <a:spcAft>
+                <a:spcPts val="100"/>
+              </a:spcAft>
+            </a:pPr>
+            <a:r>
+              <a:rPr sz="1050" b="0" i="0">
+                <a:solidFill>
+                  <a:srgbClr val="263238"/>
+                </a:solidFill>
+                <a:latin typeface="Meiryo"/>
+              </a:rPr>
+              <a:t>   → 選択モードの全タスクが新工事番号で一括コピーされます</a:t>
+            </a:r>
+          </a:p>
+        </p:txBody>
+      </p:sp>
+    </p:spTree>
+  </p:cSld>
+  <p:clrMapOvr>
+    <a:masterClrMapping/>
+  </p:clrMapOvr>
+</p:sld>
+</file>
+
+<file path=ppt/slides/slide9.xml><?xml version="1.0" encoding="utf-8"?>
+<p:sld xmlns:a="http://schemas.openxmlformats.org/drawingml/2006/main" xmlns:p="http://schemas.openxmlformats.org/presentationml/2006/main" xmlns:r="http://schemas.openxmlformats.org/officeDocument/2006/relationships">
+  <p:cSld>
+    <p:bg>
+      <p:bgPr>
+        <a:solidFill>
+          <a:srgbClr val="F4F6F7"/>
+        </a:solidFill>
+        <a:effectLst/>
+      </p:bgPr>
+    </p:bg>
+    <p:spTree>
+      <p:nvGrpSpPr>
+        <p:cNvPr id="1" name=""/>
+        <p:cNvGrpSpPr/>
+        <p:nvPr/>
+      </p:nvGrpSpPr>
+      <p:grpSpPr/>
+      <p:sp>
+        <p:nvSpPr>
+          <p:cNvPr id="2" name="Rectangle 1"/>
           <p:cNvSpPr/>
           <p:nvPr/>
         </p:nvSpPr>
         <p:spPr>
           <a:xfrm>
-            <a:off x="4754880" y="749808"/>
-            <a:ext cx="4160520" cy="3995928"/>
+            <a:off x="0" y="0"/>
+            <a:ext cx="9144000" cy="640080"/>
           </a:xfrm>
           <a:prstGeom prst="rect">
             <a:avLst/>
           </a:prstGeom>
           <a:solidFill>
-            <a:srgbClr val="FFFFFF"/>
+            <a:srgbClr val="546E7A"/>
           </a:solidFill>
-          <a:ln w="9525">
-            <a:solidFill>
-              <a:srgbClr val="CFD8DC"/>
-            </a:solidFill>
+          <a:ln>
+            <a:noFill/>
           </a:ln>
         </p:spPr>
         <p:style>
@@ -11256,14 +11634,127 @@
       </p:sp>
       <p:sp>
         <p:nvSpPr>
-          <p:cNvPr id="19" name="Rectangle 18"/>
+          <p:cNvPr id="3" name="TextBox 2"/>
+          <p:cNvSpPr txBox="1"/>
+          <p:nvPr/>
+        </p:nvSpPr>
+        <p:spPr>
+          <a:xfrm>
+            <a:off x="320040" y="0"/>
+            <a:ext cx="8503920" cy="640080"/>
+          </a:xfrm>
+          <a:prstGeom prst="rect">
+            <a:avLst/>
+          </a:prstGeom>
+          <a:noFill/>
+        </p:spPr>
+        <p:txBody insetl="0" insertr="0" insett="0" insetb="0">
+          <a:bodyPr wrap="square" anchor="ctr">
+            <a:spAutoFit/>
+          </a:bodyPr>
+          <a:lstStyle/>
+          <a:p>
+            <a:pPr algn="l"/>
+            <a:r>
+              <a:rPr sz="1800" b="1" i="0">
+                <a:solidFill>
+                  <a:srgbClr val="FFFFFF"/>
+                </a:solidFill>
+                <a:latin typeface="Meiryo"/>
+              </a:rPr>
+              <a:t>システム情報・注意事項</a:t>
+            </a:r>
+          </a:p>
+        </p:txBody>
+      </p:sp>
+      <p:sp>
+        <p:nvSpPr>
+          <p:cNvPr id="4" name="Rectangle 3"/>
           <p:cNvSpPr/>
           <p:nvPr/>
         </p:nvSpPr>
         <p:spPr>
           <a:xfrm>
-            <a:off x="4754880" y="749808"/>
-            <a:ext cx="4160520" cy="292608"/>
+            <a:off x="0" y="5029200"/>
+            <a:ext cx="9144000" cy="114300"/>
+          </a:xfrm>
+          <a:prstGeom prst="rect">
+            <a:avLst/>
+          </a:prstGeom>
+          <a:solidFill>
+            <a:srgbClr val="546E7A"/>
+          </a:solidFill>
+          <a:ln>
+            <a:noFill/>
+          </a:ln>
+        </p:spPr>
+        <p:style>
+          <a:lnRef idx="1">
+            <a:schemeClr val="accent1"/>
+          </a:lnRef>
+          <a:fillRef idx="3">
+            <a:schemeClr val="accent1"/>
+          </a:fillRef>
+          <a:effectRef idx="2">
+            <a:schemeClr val="accent1"/>
+          </a:effectRef>
+          <a:fontRef idx="minor">
+            <a:schemeClr val="lt1"/>
+          </a:fontRef>
+        </p:style>
+        <p:txBody>
+          <a:bodyPr rtlCol="0" anchor="ctr"/>
+          <a:lstStyle/>
+          <a:p>
+            <a:pPr algn="ctr"/>
+          </a:p>
+        </p:txBody>
+      </p:sp>
+      <p:sp>
+        <p:nvSpPr>
+          <p:cNvPr id="5" name="TextBox 4"/>
+          <p:cNvSpPr txBox="1"/>
+          <p:nvPr/>
+        </p:nvSpPr>
+        <p:spPr>
+          <a:xfrm>
+            <a:off x="7315200" y="4773168"/>
+            <a:ext cx="1600200" cy="228600"/>
+          </a:xfrm>
+          <a:prstGeom prst="rect">
+            <a:avLst/>
+          </a:prstGeom>
+          <a:noFill/>
+        </p:spPr>
+        <p:txBody insetl="0" insertr="0" insett="0" insetb="0">
+          <a:bodyPr wrap="square" anchor="t">
+            <a:spAutoFit/>
+          </a:bodyPr>
+          <a:lstStyle/>
+          <a:p>
+            <a:pPr algn="r"/>
+            <a:r>
+              <a:rPr sz="900" b="0" i="0">
+                <a:solidFill>
+                  <a:srgbClr val="90A4AE"/>
+                </a:solidFill>
+                <a:latin typeface="Meiryo"/>
+              </a:rPr>
+              <a:t>9 / 9</a:t>
+            </a:r>
+          </a:p>
+        </p:txBody>
+      </p:sp>
+      <p:sp>
+        <p:nvSpPr>
+          <p:cNvPr id="6" name="Rectangle 5"/>
+          <p:cNvSpPr/>
+          <p:nvPr/>
+        </p:nvSpPr>
+        <p:spPr>
+          <a:xfrm>
+            <a:off x="228600" y="749808"/>
+            <a:ext cx="8686800" cy="3977639"/>
           </a:xfrm>
           <a:prstGeom prst="rect">
             <a:avLst/>
@@ -11299,49 +11790,14 @@
       </p:sp>
       <p:sp>
         <p:nvSpPr>
-          <p:cNvPr id="20" name="TextBox 19"/>
+          <p:cNvPr id="7" name="TextBox 6"/>
           <p:cNvSpPr txBox="1"/>
           <p:nvPr/>
         </p:nvSpPr>
         <p:spPr>
           <a:xfrm>
-            <a:off x="4864608" y="749808"/>
-            <a:ext cx="3941063" cy="292608"/>
-          </a:xfrm>
-          <a:prstGeom prst="rect">
-            <a:avLst/>
-          </a:prstGeom>
-          <a:noFill/>
-        </p:spPr>
-        <p:txBody insetl="0" insertr="0" insett="0" insetb="0">
-          <a:bodyPr wrap="square" anchor="ctr">
-            <a:spAutoFit/>
-          </a:bodyPr>
-          <a:lstStyle/>
-          <a:p>
-            <a:pPr algn="l"/>
-            <a:r>
-              <a:rPr sz="1100" b="1" i="0">
-                <a:solidFill>
-                  <a:srgbClr val="FFFFFF"/>
-                </a:solidFill>
-                <a:latin typeface="Meiryo"/>
-              </a:rPr>
-              <a:t>システム情報・注意事項</a:t>
-            </a:r>
-          </a:p>
-        </p:txBody>
-      </p:sp>
-      <p:sp>
-        <p:nvSpPr>
-          <p:cNvPr id="21" name="TextBox 20"/>
-          <p:cNvSpPr txBox="1"/>
-          <p:nvPr/>
-        </p:nvSpPr>
-        <p:spPr>
-          <a:xfrm>
-            <a:off x="4864608" y="1097280"/>
-            <a:ext cx="3941063" cy="3630168"/>
+            <a:off x="320040" y="914400"/>
+            <a:ext cx="1554480" cy="512064"/>
           </a:xfrm>
           <a:prstGeom prst="rect">
             <a:avLst/>
@@ -11354,13 +11810,9 @@
           </a:bodyPr>
           <a:lstStyle/>
           <a:p>
-            <a:pPr algn="l">
-              <a:spcAft>
-                <a:spcPts val="400"/>
-              </a:spcAft>
-            </a:pPr>
-            <a:r>
-              <a:rPr sz="1100" b="1" i="0">
+            <a:pPr algn="l"/>
+            <a:r>
+              <a:rPr sz="1050" b="1" i="0">
                 <a:solidFill>
                   <a:srgbClr val="80CBC4"/>
                 </a:solidFill>
@@ -11368,181 +11820,605 @@
               </a:rPr>
               <a:t>データの保存先</a:t>
             </a:r>
-            <a:br>
-              <a:rPr lang="ja-JP" sz="1100"/>
-            </a:br>
-            <a:r>
-              <a:rPr sz="1100" b="0" i="0">
+          </a:p>
+        </p:txBody>
+      </p:sp>
+      <p:sp>
+        <p:nvSpPr>
+          <p:cNvPr id="8" name="TextBox 7"/>
+          <p:cNvSpPr txBox="1"/>
+          <p:nvPr/>
+        </p:nvSpPr>
+        <p:spPr>
+          <a:xfrm>
+            <a:off x="1874519" y="914400"/>
+            <a:ext cx="6766560" cy="512064"/>
+          </a:xfrm>
+          <a:prstGeom prst="rect">
+            <a:avLst/>
+          </a:prstGeom>
+          <a:noFill/>
+        </p:spPr>
+        <p:txBody insetl="0" insertr="0" insett="0" insetb="0">
+          <a:bodyPr wrap="square" anchor="t">
+            <a:spAutoFit/>
+          </a:bodyPr>
+          <a:lstStyle/>
+          <a:p>
+            <a:pPr algn="l"/>
+            <a:r>
+              <a:rPr sz="1050" b="0" i="0">
                 <a:solidFill>
                   <a:srgbClr val="FFFFFF"/>
                 </a:solidFill>
                 <a:latin typeface="Meiryo"/>
               </a:rPr>
-              <a:t>クラウド（Supabase）に自動保存</a:t>
-            </a:r>
-            <a:br>
-              <a:rPr lang="ja-JP" sz="1100"/>
-            </a:br>
-            <a:r>
-              <a:rPr sz="1100" b="0" i="0">
+              <a:t>クラウド（Supabase）に自動保存。編集内容はリアルタイムでDBに反映されます。</a:t>
+            </a:r>
+          </a:p>
+        </p:txBody>
+      </p:sp>
+      <p:sp>
+        <p:nvSpPr>
+          <p:cNvPr id="9" name="Rectangle 8"/>
+          <p:cNvSpPr/>
+          <p:nvPr/>
+        </p:nvSpPr>
+        <p:spPr>
+          <a:xfrm>
+            <a:off x="320040" y="1444752"/>
+            <a:ext cx="8503920" cy="9144"/>
+          </a:xfrm>
+          <a:prstGeom prst="rect">
+            <a:avLst/>
+          </a:prstGeom>
+          <a:solidFill>
+            <a:srgbClr val="546E7A"/>
+          </a:solidFill>
+          <a:ln>
+            <a:noFill/>
+          </a:ln>
+        </p:spPr>
+        <p:style>
+          <a:lnRef idx="1">
+            <a:schemeClr val="accent1"/>
+          </a:lnRef>
+          <a:fillRef idx="3">
+            <a:schemeClr val="accent1"/>
+          </a:fillRef>
+          <a:effectRef idx="2">
+            <a:schemeClr val="accent1"/>
+          </a:effectRef>
+          <a:fontRef idx="minor">
+            <a:schemeClr val="lt1"/>
+          </a:fontRef>
+        </p:style>
+        <p:txBody>
+          <a:bodyPr rtlCol="0" anchor="ctr"/>
+          <a:lstStyle/>
+          <a:p>
+            <a:pPr algn="ctr"/>
+          </a:p>
+        </p:txBody>
+      </p:sp>
+      <p:sp>
+        <p:nvSpPr>
+          <p:cNvPr id="10" name="TextBox 9"/>
+          <p:cNvSpPr txBox="1"/>
+          <p:nvPr/>
+        </p:nvSpPr>
+        <p:spPr>
+          <a:xfrm>
+            <a:off x="320040" y="1517904"/>
+            <a:ext cx="1554480" cy="512064"/>
+          </a:xfrm>
+          <a:prstGeom prst="rect">
+            <a:avLst/>
+          </a:prstGeom>
+          <a:noFill/>
+        </p:spPr>
+        <p:txBody insetl="0" insertr="0" insett="0" insetb="0">
+          <a:bodyPr wrap="square" anchor="t">
+            <a:spAutoFit/>
+          </a:bodyPr>
+          <a:lstStyle/>
+          <a:p>
+            <a:pPr algn="l"/>
+            <a:r>
+              <a:rPr sz="1050" b="1" i="0">
+                <a:solidFill>
+                  <a:srgbClr val="80CBC4"/>
+                </a:solidFill>
+                <a:latin typeface="Meiryo"/>
+              </a:rPr>
+              <a:t>インターネット接続</a:t>
+            </a:r>
+          </a:p>
+        </p:txBody>
+      </p:sp>
+      <p:sp>
+        <p:nvSpPr>
+          <p:cNvPr id="11" name="TextBox 10"/>
+          <p:cNvSpPr txBox="1"/>
+          <p:nvPr/>
+        </p:nvSpPr>
+        <p:spPr>
+          <a:xfrm>
+            <a:off x="1874519" y="1517904"/>
+            <a:ext cx="6766560" cy="512064"/>
+          </a:xfrm>
+          <a:prstGeom prst="rect">
+            <a:avLst/>
+          </a:prstGeom>
+          <a:noFill/>
+        </p:spPr>
+        <p:txBody insetl="0" insertr="0" insett="0" insetb="0">
+          <a:bodyPr wrap="square" anchor="t">
+            <a:spAutoFit/>
+          </a:bodyPr>
+          <a:lstStyle/>
+          <a:p>
+            <a:pPr algn="l"/>
+            <a:r>
+              <a:rPr sz="1050" b="0" i="0">
                 <a:solidFill>
                   <a:srgbClr val="FFFFFF"/>
                 </a:solidFill>
                 <a:latin typeface="Meiryo"/>
               </a:rPr>
-              <a:t>編集内容はリアルタイムでDBに反映</a:t>
-            </a:r>
-          </a:p>
-          <a:p>
-            <a:pPr algn="l">
-              <a:spcAft>
-                <a:spcPts val="400"/>
-              </a:spcAft>
-            </a:pPr>
-            <a:r>
-              <a:rPr sz="1100" b="1" i="0">
+              <a:t>使用にはインターネット接続が必要です。</a:t>
+            </a:r>
+          </a:p>
+        </p:txBody>
+      </p:sp>
+      <p:sp>
+        <p:nvSpPr>
+          <p:cNvPr id="12" name="Rectangle 11"/>
+          <p:cNvSpPr/>
+          <p:nvPr/>
+        </p:nvSpPr>
+        <p:spPr>
+          <a:xfrm>
+            <a:off x="320040" y="2048256"/>
+            <a:ext cx="8503920" cy="9144"/>
+          </a:xfrm>
+          <a:prstGeom prst="rect">
+            <a:avLst/>
+          </a:prstGeom>
+          <a:solidFill>
+            <a:srgbClr val="546E7A"/>
+          </a:solidFill>
+          <a:ln>
+            <a:noFill/>
+          </a:ln>
+        </p:spPr>
+        <p:style>
+          <a:lnRef idx="1">
+            <a:schemeClr val="accent1"/>
+          </a:lnRef>
+          <a:fillRef idx="3">
+            <a:schemeClr val="accent1"/>
+          </a:fillRef>
+          <a:effectRef idx="2">
+            <a:schemeClr val="accent1"/>
+          </a:effectRef>
+          <a:fontRef idx="minor">
+            <a:schemeClr val="lt1"/>
+          </a:fontRef>
+        </p:style>
+        <p:txBody>
+          <a:bodyPr rtlCol="0" anchor="ctr"/>
+          <a:lstStyle/>
+          <a:p>
+            <a:pPr algn="ctr"/>
+          </a:p>
+        </p:txBody>
+      </p:sp>
+      <p:sp>
+        <p:nvSpPr>
+          <p:cNvPr id="13" name="TextBox 12"/>
+          <p:cNvSpPr txBox="1"/>
+          <p:nvPr/>
+        </p:nvSpPr>
+        <p:spPr>
+          <a:xfrm>
+            <a:off x="320040" y="2121408"/>
+            <a:ext cx="1554480" cy="512064"/>
+          </a:xfrm>
+          <a:prstGeom prst="rect">
+            <a:avLst/>
+          </a:prstGeom>
+          <a:noFill/>
+        </p:spPr>
+        <p:txBody insetl="0" insertr="0" insett="0" insetb="0">
+          <a:bodyPr wrap="square" anchor="t">
+            <a:spAutoFit/>
+          </a:bodyPr>
+          <a:lstStyle/>
+          <a:p>
+            <a:pPr algn="l"/>
+            <a:r>
+              <a:rPr sz="1050" b="1" i="0">
                 <a:solidFill>
                   <a:srgbClr val="80CBC4"/>
                 </a:solidFill>
                 <a:latin typeface="Meiryo"/>
               </a:rPr>
-              <a:t>インターネット接続</a:t>
-            </a:r>
-            <a:br>
-              <a:rPr lang="ja-JP" sz="1100"/>
-            </a:br>
-            <a:r>
-              <a:rPr sz="1100" b="0" i="0">
+              <a:t>同時使用</a:t>
+            </a:r>
+          </a:p>
+        </p:txBody>
+      </p:sp>
+      <p:sp>
+        <p:nvSpPr>
+          <p:cNvPr id="14" name="TextBox 13"/>
+          <p:cNvSpPr txBox="1"/>
+          <p:nvPr/>
+        </p:nvSpPr>
+        <p:spPr>
+          <a:xfrm>
+            <a:off x="1874519" y="2121408"/>
+            <a:ext cx="6766560" cy="512064"/>
+          </a:xfrm>
+          <a:prstGeom prst="rect">
+            <a:avLst/>
+          </a:prstGeom>
+          <a:noFill/>
+        </p:spPr>
+        <p:txBody insetl="0" insertr="0" insett="0" insetb="0">
+          <a:bodyPr wrap="square" anchor="t">
+            <a:spAutoFit/>
+          </a:bodyPr>
+          <a:lstStyle/>
+          <a:p>
+            <a:pPr algn="l"/>
+            <a:r>
+              <a:rPr sz="1050" b="0" i="0">
                 <a:solidFill>
                   <a:srgbClr val="FFFFFF"/>
                 </a:solidFill>
                 <a:latin typeface="Meiryo"/>
               </a:rPr>
-              <a:t>使用にはインターネット接続が必要です</a:t>
-            </a:r>
-          </a:p>
-          <a:p>
-            <a:pPr algn="l">
-              <a:spcAft>
-                <a:spcPts val="400"/>
-              </a:spcAft>
-            </a:pPr>
-            <a:r>
-              <a:rPr sz="1100" b="1" i="0">
+              <a:t>複数人が同時に使用可能です。他の人の変更はF5（再読み込み）で画面に反映されます。</a:t>
+            </a:r>
+          </a:p>
+        </p:txBody>
+      </p:sp>
+      <p:sp>
+        <p:nvSpPr>
+          <p:cNvPr id="15" name="Rectangle 14"/>
+          <p:cNvSpPr/>
+          <p:nvPr/>
+        </p:nvSpPr>
+        <p:spPr>
+          <a:xfrm>
+            <a:off x="320040" y="2651760"/>
+            <a:ext cx="8503920" cy="9144"/>
+          </a:xfrm>
+          <a:prstGeom prst="rect">
+            <a:avLst/>
+          </a:prstGeom>
+          <a:solidFill>
+            <a:srgbClr val="546E7A"/>
+          </a:solidFill>
+          <a:ln>
+            <a:noFill/>
+          </a:ln>
+        </p:spPr>
+        <p:style>
+          <a:lnRef idx="1">
+            <a:schemeClr val="accent1"/>
+          </a:lnRef>
+          <a:fillRef idx="3">
+            <a:schemeClr val="accent1"/>
+          </a:fillRef>
+          <a:effectRef idx="2">
+            <a:schemeClr val="accent1"/>
+          </a:effectRef>
+          <a:fontRef idx="minor">
+            <a:schemeClr val="lt1"/>
+          </a:fontRef>
+        </p:style>
+        <p:txBody>
+          <a:bodyPr rtlCol="0" anchor="ctr"/>
+          <a:lstStyle/>
+          <a:p>
+            <a:pPr algn="ctr"/>
+          </a:p>
+        </p:txBody>
+      </p:sp>
+      <p:sp>
+        <p:nvSpPr>
+          <p:cNvPr id="16" name="TextBox 15"/>
+          <p:cNvSpPr txBox="1"/>
+          <p:nvPr/>
+        </p:nvSpPr>
+        <p:spPr>
+          <a:xfrm>
+            <a:off x="320040" y="2724912"/>
+            <a:ext cx="1554480" cy="512064"/>
+          </a:xfrm>
+          <a:prstGeom prst="rect">
+            <a:avLst/>
+          </a:prstGeom>
+          <a:noFill/>
+        </p:spPr>
+        <p:txBody insetl="0" insertr="0" insett="0" insetb="0">
+          <a:bodyPr wrap="square" anchor="t">
+            <a:spAutoFit/>
+          </a:bodyPr>
+          <a:lstStyle/>
+          <a:p>
+            <a:pPr algn="l"/>
+            <a:r>
+              <a:rPr sz="1050" b="1" i="0">
                 <a:solidFill>
                   <a:srgbClr val="80CBC4"/>
                 </a:solidFill>
                 <a:latin typeface="Meiryo"/>
               </a:rPr>
-              <a:t>同時使用</a:t>
-            </a:r>
-            <a:br>
-              <a:rPr lang="ja-JP" sz="1100"/>
-            </a:br>
-            <a:r>
-              <a:rPr sz="1100" b="0" i="0">
+              <a:t>対応ブラウザ</a:t>
+            </a:r>
+          </a:p>
+        </p:txBody>
+      </p:sp>
+      <p:sp>
+        <p:nvSpPr>
+          <p:cNvPr id="17" name="TextBox 16"/>
+          <p:cNvSpPr txBox="1"/>
+          <p:nvPr/>
+        </p:nvSpPr>
+        <p:spPr>
+          <a:xfrm>
+            <a:off x="1874519" y="2724912"/>
+            <a:ext cx="6766560" cy="512064"/>
+          </a:xfrm>
+          <a:prstGeom prst="rect">
+            <a:avLst/>
+          </a:prstGeom>
+          <a:noFill/>
+        </p:spPr>
+        <p:txBody insetl="0" insertr="0" insett="0" insetb="0">
+          <a:bodyPr wrap="square" anchor="t">
+            <a:spAutoFit/>
+          </a:bodyPr>
+          <a:lstStyle/>
+          <a:p>
+            <a:pPr algn="l"/>
+            <a:r>
+              <a:rPr sz="1050" b="0" i="0">
                 <a:solidFill>
                   <a:srgbClr val="FFFFFF"/>
                 </a:solidFill>
                 <a:latin typeface="Meiryo"/>
               </a:rPr>
-              <a:t>複数人が同時に使用可能（画面更新時に</a:t>
-            </a:r>
-            <a:br>
-              <a:rPr lang="ja-JP" sz="1100"/>
-            </a:br>
-            <a:r>
-              <a:rPr sz="1100" b="0" i="0">
+              <a:t>Chrome / Microsoft Edge 推奨。</a:t>
+            </a:r>
+          </a:p>
+        </p:txBody>
+      </p:sp>
+      <p:sp>
+        <p:nvSpPr>
+          <p:cNvPr id="18" name="Rectangle 17"/>
+          <p:cNvSpPr/>
+          <p:nvPr/>
+        </p:nvSpPr>
+        <p:spPr>
+          <a:xfrm>
+            <a:off x="320040" y="3255264"/>
+            <a:ext cx="8503920" cy="9144"/>
+          </a:xfrm>
+          <a:prstGeom prst="rect">
+            <a:avLst/>
+          </a:prstGeom>
+          <a:solidFill>
+            <a:srgbClr val="546E7A"/>
+          </a:solidFill>
+          <a:ln>
+            <a:noFill/>
+          </a:ln>
+        </p:spPr>
+        <p:style>
+          <a:lnRef idx="1">
+            <a:schemeClr val="accent1"/>
+          </a:lnRef>
+          <a:fillRef idx="3">
+            <a:schemeClr val="accent1"/>
+          </a:fillRef>
+          <a:effectRef idx="2">
+            <a:schemeClr val="accent1"/>
+          </a:effectRef>
+          <a:fontRef idx="minor">
+            <a:schemeClr val="lt1"/>
+          </a:fontRef>
+        </p:style>
+        <p:txBody>
+          <a:bodyPr rtlCol="0" anchor="ctr"/>
+          <a:lstStyle/>
+          <a:p>
+            <a:pPr algn="ctr"/>
+          </a:p>
+        </p:txBody>
+      </p:sp>
+      <p:sp>
+        <p:nvSpPr>
+          <p:cNvPr id="19" name="TextBox 18"/>
+          <p:cNvSpPr txBox="1"/>
+          <p:nvPr/>
+        </p:nvSpPr>
+        <p:spPr>
+          <a:xfrm>
+            <a:off x="320040" y="3328416"/>
+            <a:ext cx="1554480" cy="512064"/>
+          </a:xfrm>
+          <a:prstGeom prst="rect">
+            <a:avLst/>
+          </a:prstGeom>
+          <a:noFill/>
+        </p:spPr>
+        <p:txBody insetl="0" insertr="0" insett="0" insetb="0">
+          <a:bodyPr wrap="square" anchor="t">
+            <a:spAutoFit/>
+          </a:bodyPr>
+          <a:lstStyle/>
+          <a:p>
+            <a:pPr algn="l"/>
+            <a:r>
+              <a:rPr sz="1050" b="1" i="0">
+                <a:solidFill>
+                  <a:srgbClr val="80CBC4"/>
+                </a:solidFill>
+                <a:latin typeface="Meiryo"/>
+              </a:rPr>
+              <a:t>ファイルの場所</a:t>
+            </a:r>
+          </a:p>
+        </p:txBody>
+      </p:sp>
+      <p:sp>
+        <p:nvSpPr>
+          <p:cNvPr id="20" name="TextBox 19"/>
+          <p:cNvSpPr txBox="1"/>
+          <p:nvPr/>
+        </p:nvSpPr>
+        <p:spPr>
+          <a:xfrm>
+            <a:off x="1874519" y="3328416"/>
+            <a:ext cx="6766560" cy="512064"/>
+          </a:xfrm>
+          <a:prstGeom prst="rect">
+            <a:avLst/>
+          </a:prstGeom>
+          <a:noFill/>
+        </p:spPr>
+        <p:txBody insetl="0" insertr="0" insett="0" insetb="0">
+          <a:bodyPr wrap="square" anchor="t">
+            <a:spAutoFit/>
+          </a:bodyPr>
+          <a:lstStyle/>
+          <a:p>
+            <a:pPr algn="l"/>
+            <a:r>
+              <a:rPr sz="1050" b="0" i="0">
                 <a:solidFill>
                   <a:srgbClr val="FFFFFF"/>
                 </a:solidFill>
                 <a:latin typeface="Meiryo"/>
               </a:rPr>
-              <a:t>最新データを取得）</a:t>
-            </a:r>
-          </a:p>
-          <a:p>
-            <a:pPr algn="l">
-              <a:spcAft>
-                <a:spcPts val="400"/>
-              </a:spcAft>
-            </a:pPr>
-            <a:r>
-              <a:rPr sz="1100" b="1" i="0">
-                <a:solidFill>
-                  <a:srgbClr val="80CBC4"/>
-                </a:solidFill>
-                <a:latin typeface="Meiryo"/>
-              </a:rPr>
-              <a:t>対応ブラウザ</a:t>
-            </a:r>
-            <a:br>
-              <a:rPr lang="ja-JP" sz="1100"/>
-            </a:br>
-            <a:r>
-              <a:rPr sz="1100" b="0" i="0">
+              <a:t>index.html をブラウザで直接開いて使用します。</a:t>
+            </a:r>
+          </a:p>
+        </p:txBody>
+      </p:sp>
+      <p:sp>
+        <p:nvSpPr>
+          <p:cNvPr id="21" name="Rectangle 20"/>
+          <p:cNvSpPr/>
+          <p:nvPr/>
+        </p:nvSpPr>
+        <p:spPr>
+          <a:xfrm>
+            <a:off x="320040" y="3858768"/>
+            <a:ext cx="8503920" cy="9144"/>
+          </a:xfrm>
+          <a:prstGeom prst="rect">
+            <a:avLst/>
+          </a:prstGeom>
+          <a:solidFill>
+            <a:srgbClr val="546E7A"/>
+          </a:solidFill>
+          <a:ln>
+            <a:noFill/>
+          </a:ln>
+        </p:spPr>
+        <p:style>
+          <a:lnRef idx="1">
+            <a:schemeClr val="accent1"/>
+          </a:lnRef>
+          <a:fillRef idx="3">
+            <a:schemeClr val="accent1"/>
+          </a:fillRef>
+          <a:effectRef idx="2">
+            <a:schemeClr val="accent1"/>
+          </a:effectRef>
+          <a:fontRef idx="minor">
+            <a:schemeClr val="lt1"/>
+          </a:fontRef>
+        </p:style>
+        <p:txBody>
+          <a:bodyPr rtlCol="0" anchor="ctr"/>
+          <a:lstStyle/>
+          <a:p>
+            <a:pPr algn="ctr"/>
+          </a:p>
+        </p:txBody>
+      </p:sp>
+      <p:sp>
+        <p:nvSpPr>
+          <p:cNvPr id="22" name="TextBox 21"/>
+          <p:cNvSpPr txBox="1"/>
+          <p:nvPr/>
+        </p:nvSpPr>
+        <p:spPr>
+          <a:xfrm>
+            <a:off x="320040" y="3931920"/>
+            <a:ext cx="1554480" cy="512064"/>
+          </a:xfrm>
+          <a:prstGeom prst="rect">
+            <a:avLst/>
+          </a:prstGeom>
+          <a:noFill/>
+        </p:spPr>
+        <p:txBody insetl="0" insertr="0" insett="0" insetb="0">
+          <a:bodyPr wrap="square" anchor="t">
+            <a:spAutoFit/>
+          </a:bodyPr>
+          <a:lstStyle/>
+          <a:p>
+            <a:pPr algn="l"/>
+            <a:r>
+              <a:rPr sz="1050" b="1" i="0">
+                <a:solidFill>
+                  <a:srgbClr val="FF8080"/>
+                </a:solidFill>
+                <a:latin typeface="Meiryo"/>
+              </a:rPr>
+              <a:t>操作の取り消し</a:t>
+            </a:r>
+          </a:p>
+        </p:txBody>
+      </p:sp>
+      <p:sp>
+        <p:nvSpPr>
+          <p:cNvPr id="23" name="TextBox 22"/>
+          <p:cNvSpPr txBox="1"/>
+          <p:nvPr/>
+        </p:nvSpPr>
+        <p:spPr>
+          <a:xfrm>
+            <a:off x="1874519" y="3931920"/>
+            <a:ext cx="6766560" cy="512064"/>
+          </a:xfrm>
+          <a:prstGeom prst="rect">
+            <a:avLst/>
+          </a:prstGeom>
+          <a:noFill/>
+        </p:spPr>
+        <p:txBody insetl="0" insertr="0" insett="0" insetb="0">
+          <a:bodyPr wrap="square" anchor="t">
+            <a:spAutoFit/>
+          </a:bodyPr>
+          <a:lstStyle/>
+          <a:p>
+            <a:pPr algn="l"/>
+            <a:r>
+              <a:rPr sz="1050" b="0" i="0">
                 <a:solidFill>
                   <a:srgbClr val="FFFFFF"/>
                 </a:solidFill>
                 <a:latin typeface="Meiryo"/>
               </a:rPr>
-              <a:t>Chrome / Microsoft Edge 推奨</a:t>
-            </a:r>
-          </a:p>
-          <a:p>
-            <a:pPr algn="l">
-              <a:spcAft>
-                <a:spcPts val="400"/>
-              </a:spcAft>
-            </a:pPr>
-            <a:r>
-              <a:rPr sz="1100" b="1" i="0">
-                <a:solidFill>
-                  <a:srgbClr val="80CBC4"/>
-                </a:solidFill>
-                <a:latin typeface="Meiryo"/>
-              </a:rPr>
-              <a:t>ファイルの場所</a:t>
-            </a:r>
-            <a:br>
-              <a:rPr lang="ja-JP" sz="1100"/>
-            </a:br>
-            <a:r>
-              <a:rPr sz="1100" b="0" i="0">
-                <a:solidFill>
-                  <a:srgbClr val="FFFFFF"/>
-                </a:solidFill>
-                <a:latin typeface="Meiryo"/>
-              </a:rPr>
-              <a:t>index.html をブラウザで開いて使用します</a:t>
-            </a:r>
-          </a:p>
-          <a:p>
-            <a:pPr algn="l">
-              <a:spcAft>
-                <a:spcPts val="400"/>
-              </a:spcAft>
-            </a:pPr>
-            <a:r>
-              <a:rPr sz="1100" b="1" i="0">
-                <a:solidFill>
-                  <a:srgbClr val="80CBC4"/>
-                </a:solidFill>
-                <a:latin typeface="Meiryo"/>
-              </a:rPr>
-              <a:t>表示期間の範囲</a:t>
-            </a:r>
-            <a:br>
-              <a:rPr lang="ja-JP" sz="1100"/>
-            </a:br>
-            <a:r>
-              <a:rPr sz="1100" b="0" i="0">
-                <a:solidFill>
-                  <a:srgbClr val="FFFFFF"/>
-                </a:solidFill>
-                <a:latin typeface="Meiryo"/>
-              </a:rPr>
-              <a:t>2025年1月 ～ 2026年12月まで表示可能</a:t>
+              <a:t>削除・アーカイブした操作は取り消しできません。Ctrl+Z も無効のため操作は慎重に行ってください。</a:t>
             </a:r>
           </a:p>
         </p:txBody>

--- a/設計工程表_使い方説明書.pptx
+++ b/設計工程表_使い方説明書.pptx
@@ -5,17 +5,17 @@
     <p:sldMasterId id="2147483648" r:id="rId1"/>
   </p:sldMasterIdLst>
   <p:sldIdLst>
-    <p:sldId id="256" r:id="rId7"/>
-    <p:sldId id="257" r:id="rId8"/>
-    <p:sldId id="258" r:id="rId9"/>
-    <p:sldId id="259" r:id="rId10"/>
-    <p:sldId id="260" r:id="rId11"/>
-    <p:sldId id="261" r:id="rId12"/>
-    <p:sldId id="262" r:id="rId13"/>
-    <p:sldId id="263" r:id="rId14"/>
-    <p:sldId id="264" r:id="rId15"/>
+    <p:sldId id="256" r:id="rId2"/>
+    <p:sldId id="257" r:id="rId3"/>
+    <p:sldId id="258" r:id="rId4"/>
+    <p:sldId id="259" r:id="rId5"/>
+    <p:sldId id="260" r:id="rId6"/>
+    <p:sldId id="261" r:id="rId7"/>
+    <p:sldId id="262" r:id="rId8"/>
+    <p:sldId id="263" r:id="rId9"/>
+    <p:sldId id="264" r:id="rId10"/>
   </p:sldIdLst>
-  <p:sldSz cx="9144000" cy="5143500" type="screen4x3"/>
+  <p:sldSz cx="9144000" cy="5143500" type="screen16x9"/>
   <p:notesSz cx="6858000" cy="9144000"/>
   <p:defaultTextStyle>
     <a:defPPr>
@@ -112,6 +112,22 @@
       </a:defRPr>
     </a:lvl9pPr>
   </p:defaultTextStyle>
+  <p:extLst>
+    <p:ext uri="{EFAFB233-063F-42B5-8137-9DF3F51BA10A}">
+      <p15:sldGuideLst xmlns:p15="http://schemas.microsoft.com/office/powerpoint/2012/main">
+        <p15:guide id="1" orient="horz" pos="2160">
+          <p15:clr>
+            <a:srgbClr val="A4A3A4"/>
+          </p15:clr>
+        </p15:guide>
+        <p15:guide id="2" pos="2880">
+          <p15:clr>
+            <a:srgbClr val="A4A3A4"/>
+          </p15:clr>
+        </p15:guide>
+      </p15:sldGuideLst>
+    </p:ext>
+  </p:extLst>
 </p:presentation>
 </file>
 
@@ -153,10 +169,9 @@
           <a:lstStyle/>
           <a:p>
             <a:r>
-              <a:rPr lang="en-US" smtClean="0"/>
+              <a:rPr lang="en-US"/>
               <a:t>Click to edit Master title style</a:t>
             </a:r>
-            <a:endParaRPr lang="en-US"/>
           </a:p>
         </p:txBody>
       </p:sp>
@@ -272,10 +287,9 @@
           </a:lstStyle>
           <a:p>
             <a:r>
-              <a:rPr lang="en-US" smtClean="0"/>
+              <a:rPr lang="en-US"/>
               <a:t>Click to edit Master subtitle style</a:t>
             </a:r>
-            <a:endParaRPr lang="en-US"/>
           </a:p>
         </p:txBody>
       </p:sp>
@@ -296,7 +310,7 @@
           <a:p>
             <a:fld id="{5BCAD085-E8A6-8845-BD4E-CB4CCA059FC4}" type="datetimeFigureOut">
               <a:rPr lang="en-US" smtClean="0"/>
-              <a:t>1/27/13</a:t>
+              <a:t>4/8/2026</a:t>
             </a:fld>
             <a:endParaRPr lang="en-US"/>
           </a:p>
@@ -390,10 +404,9 @@
           <a:lstStyle/>
           <a:p>
             <a:r>
-              <a:rPr lang="en-US" smtClean="0"/>
+              <a:rPr lang="en-US"/>
               <a:t>Click to edit Master title style</a:t>
             </a:r>
-            <a:endParaRPr lang="en-US"/>
           </a:p>
         </p:txBody>
       </p:sp>
@@ -414,38 +427,37 @@
           <a:p>
             <a:pPr lvl="0"/>
             <a:r>
-              <a:rPr lang="en-US" smtClean="0"/>
+              <a:rPr lang="en-US"/>
               <a:t>Click to edit Master text styles</a:t>
             </a:r>
           </a:p>
           <a:p>
             <a:pPr lvl="1"/>
             <a:r>
-              <a:rPr lang="en-US" smtClean="0"/>
+              <a:rPr lang="en-US"/>
               <a:t>Second level</a:t>
             </a:r>
           </a:p>
           <a:p>
             <a:pPr lvl="2"/>
             <a:r>
-              <a:rPr lang="en-US" smtClean="0"/>
+              <a:rPr lang="en-US"/>
               <a:t>Third level</a:t>
             </a:r>
           </a:p>
           <a:p>
             <a:pPr lvl="3"/>
             <a:r>
-              <a:rPr lang="en-US" smtClean="0"/>
+              <a:rPr lang="en-US"/>
               <a:t>Fourth level</a:t>
             </a:r>
           </a:p>
           <a:p>
             <a:pPr lvl="4"/>
             <a:r>
-              <a:rPr lang="en-US" smtClean="0"/>
+              <a:rPr lang="en-US"/>
               <a:t>Fifth level</a:t>
             </a:r>
-            <a:endParaRPr lang="en-US"/>
           </a:p>
         </p:txBody>
       </p:sp>
@@ -466,7 +478,7 @@
           <a:p>
             <a:fld id="{5BCAD085-E8A6-8845-BD4E-CB4CCA059FC4}" type="datetimeFigureOut">
               <a:rPr lang="en-US" smtClean="0"/>
-              <a:t>1/27/13</a:t>
+              <a:t>4/8/2026</a:t>
             </a:fld>
             <a:endParaRPr lang="en-US"/>
           </a:p>
@@ -565,10 +577,9 @@
           <a:lstStyle/>
           <a:p>
             <a:r>
-              <a:rPr lang="en-US" smtClean="0"/>
+              <a:rPr lang="en-US"/>
               <a:t>Click to edit Master title style</a:t>
             </a:r>
-            <a:endParaRPr lang="en-US"/>
           </a:p>
         </p:txBody>
       </p:sp>
@@ -594,38 +605,37 @@
           <a:p>
             <a:pPr lvl="0"/>
             <a:r>
-              <a:rPr lang="en-US" smtClean="0"/>
+              <a:rPr lang="en-US"/>
               <a:t>Click to edit Master text styles</a:t>
             </a:r>
           </a:p>
           <a:p>
             <a:pPr lvl="1"/>
             <a:r>
-              <a:rPr lang="en-US" smtClean="0"/>
+              <a:rPr lang="en-US"/>
               <a:t>Second level</a:t>
             </a:r>
           </a:p>
           <a:p>
             <a:pPr lvl="2"/>
             <a:r>
-              <a:rPr lang="en-US" smtClean="0"/>
+              <a:rPr lang="en-US"/>
               <a:t>Third level</a:t>
             </a:r>
           </a:p>
           <a:p>
             <a:pPr lvl="3"/>
             <a:r>
-              <a:rPr lang="en-US" smtClean="0"/>
+              <a:rPr lang="en-US"/>
               <a:t>Fourth level</a:t>
             </a:r>
           </a:p>
           <a:p>
             <a:pPr lvl="4"/>
             <a:r>
-              <a:rPr lang="en-US" smtClean="0"/>
+              <a:rPr lang="en-US"/>
               <a:t>Fifth level</a:t>
             </a:r>
-            <a:endParaRPr lang="en-US"/>
           </a:p>
         </p:txBody>
       </p:sp>
@@ -646,7 +656,7 @@
           <a:p>
             <a:fld id="{5BCAD085-E8A6-8845-BD4E-CB4CCA059FC4}" type="datetimeFigureOut">
               <a:rPr lang="en-US" smtClean="0"/>
-              <a:t>1/27/13</a:t>
+              <a:t>4/8/2026</a:t>
             </a:fld>
             <a:endParaRPr lang="en-US"/>
           </a:p>
@@ -740,10 +750,9 @@
           <a:lstStyle/>
           <a:p>
             <a:r>
-              <a:rPr lang="en-US" smtClean="0"/>
+              <a:rPr lang="en-US"/>
               <a:t>Click to edit Master title style</a:t>
             </a:r>
-            <a:endParaRPr lang="en-US"/>
           </a:p>
         </p:txBody>
       </p:sp>
@@ -764,38 +773,37 @@
           <a:p>
             <a:pPr lvl="0"/>
             <a:r>
-              <a:rPr lang="en-US" smtClean="0"/>
+              <a:rPr lang="en-US"/>
               <a:t>Click to edit Master text styles</a:t>
             </a:r>
           </a:p>
           <a:p>
             <a:pPr lvl="1"/>
             <a:r>
-              <a:rPr lang="en-US" smtClean="0"/>
+              <a:rPr lang="en-US"/>
               <a:t>Second level</a:t>
             </a:r>
           </a:p>
           <a:p>
             <a:pPr lvl="2"/>
             <a:r>
-              <a:rPr lang="en-US" smtClean="0"/>
+              <a:rPr lang="en-US"/>
               <a:t>Third level</a:t>
             </a:r>
           </a:p>
           <a:p>
             <a:pPr lvl="3"/>
             <a:r>
-              <a:rPr lang="en-US" smtClean="0"/>
+              <a:rPr lang="en-US"/>
               <a:t>Fourth level</a:t>
             </a:r>
           </a:p>
           <a:p>
             <a:pPr lvl="4"/>
             <a:r>
-              <a:rPr lang="en-US" smtClean="0"/>
+              <a:rPr lang="en-US"/>
               <a:t>Fifth level</a:t>
             </a:r>
-            <a:endParaRPr lang="en-US"/>
           </a:p>
         </p:txBody>
       </p:sp>
@@ -816,7 +824,7 @@
           <a:p>
             <a:fld id="{5BCAD085-E8A6-8845-BD4E-CB4CCA059FC4}" type="datetimeFigureOut">
               <a:rPr lang="en-US" smtClean="0"/>
-              <a:t>1/27/13</a:t>
+              <a:t>4/8/2026</a:t>
             </a:fld>
             <a:endParaRPr lang="en-US"/>
           </a:p>
@@ -919,10 +927,9 @@
           </a:lstStyle>
           <a:p>
             <a:r>
-              <a:rPr lang="en-US" smtClean="0"/>
+              <a:rPr lang="en-US"/>
               <a:t>Click to edit Master title style</a:t>
             </a:r>
-            <a:endParaRPr lang="en-US"/>
           </a:p>
         </p:txBody>
       </p:sp>
@@ -1039,7 +1046,7 @@
           <a:p>
             <a:pPr lvl="0"/>
             <a:r>
-              <a:rPr lang="en-US" smtClean="0"/>
+              <a:rPr lang="en-US"/>
               <a:t>Click to edit Master text styles</a:t>
             </a:r>
           </a:p>
@@ -1062,7 +1069,7 @@
           <a:p>
             <a:fld id="{5BCAD085-E8A6-8845-BD4E-CB4CCA059FC4}" type="datetimeFigureOut">
               <a:rPr lang="en-US" smtClean="0"/>
-              <a:t>1/27/13</a:t>
+              <a:t>4/8/2026</a:t>
             </a:fld>
             <a:endParaRPr lang="en-US"/>
           </a:p>
@@ -1156,10 +1163,9 @@
           <a:lstStyle/>
           <a:p>
             <a:r>
-              <a:rPr lang="en-US" smtClean="0"/>
+              <a:rPr lang="en-US"/>
               <a:t>Click to edit Master title style</a:t>
             </a:r>
-            <a:endParaRPr lang="en-US"/>
           </a:p>
         </p:txBody>
       </p:sp>
@@ -1213,38 +1219,37 @@
           <a:p>
             <a:pPr lvl="0"/>
             <a:r>
-              <a:rPr lang="en-US" smtClean="0"/>
+              <a:rPr lang="en-US"/>
               <a:t>Click to edit Master text styles</a:t>
             </a:r>
           </a:p>
           <a:p>
             <a:pPr lvl="1"/>
             <a:r>
-              <a:rPr lang="en-US" smtClean="0"/>
+              <a:rPr lang="en-US"/>
               <a:t>Second level</a:t>
             </a:r>
           </a:p>
           <a:p>
             <a:pPr lvl="2"/>
             <a:r>
-              <a:rPr lang="en-US" smtClean="0"/>
+              <a:rPr lang="en-US"/>
               <a:t>Third level</a:t>
             </a:r>
           </a:p>
           <a:p>
             <a:pPr lvl="3"/>
             <a:r>
-              <a:rPr lang="en-US" smtClean="0"/>
+              <a:rPr lang="en-US"/>
               <a:t>Fourth level</a:t>
             </a:r>
           </a:p>
           <a:p>
             <a:pPr lvl="4"/>
             <a:r>
-              <a:rPr lang="en-US" smtClean="0"/>
+              <a:rPr lang="en-US"/>
               <a:t>Fifth level</a:t>
             </a:r>
-            <a:endParaRPr lang="en-US"/>
           </a:p>
         </p:txBody>
       </p:sp>
@@ -1298,38 +1303,37 @@
           <a:p>
             <a:pPr lvl="0"/>
             <a:r>
-              <a:rPr lang="en-US" smtClean="0"/>
+              <a:rPr lang="en-US"/>
               <a:t>Click to edit Master text styles</a:t>
             </a:r>
           </a:p>
           <a:p>
             <a:pPr lvl="1"/>
             <a:r>
-              <a:rPr lang="en-US" smtClean="0"/>
+              <a:rPr lang="en-US"/>
               <a:t>Second level</a:t>
             </a:r>
           </a:p>
           <a:p>
             <a:pPr lvl="2"/>
             <a:r>
-              <a:rPr lang="en-US" smtClean="0"/>
+              <a:rPr lang="en-US"/>
               <a:t>Third level</a:t>
             </a:r>
           </a:p>
           <a:p>
             <a:pPr lvl="3"/>
             <a:r>
-              <a:rPr lang="en-US" smtClean="0"/>
+              <a:rPr lang="en-US"/>
               <a:t>Fourth level</a:t>
             </a:r>
           </a:p>
           <a:p>
             <a:pPr lvl="4"/>
             <a:r>
-              <a:rPr lang="en-US" smtClean="0"/>
+              <a:rPr lang="en-US"/>
               <a:t>Fifth level</a:t>
             </a:r>
-            <a:endParaRPr lang="en-US"/>
           </a:p>
         </p:txBody>
       </p:sp>
@@ -1350,7 +1354,7 @@
           <a:p>
             <a:fld id="{5BCAD085-E8A6-8845-BD4E-CB4CCA059FC4}" type="datetimeFigureOut">
               <a:rPr lang="en-US" smtClean="0"/>
-              <a:t>1/27/13</a:t>
+              <a:t>4/8/2026</a:t>
             </a:fld>
             <a:endParaRPr lang="en-US"/>
           </a:p>
@@ -1448,10 +1452,9 @@
           </a:lstStyle>
           <a:p>
             <a:r>
-              <a:rPr lang="en-US" smtClean="0"/>
+              <a:rPr lang="en-US"/>
               <a:t>Click to edit Master title style</a:t>
             </a:r>
-            <a:endParaRPr lang="en-US"/>
           </a:p>
         </p:txBody>
       </p:sp>
@@ -1514,7 +1517,7 @@
           <a:p>
             <a:pPr lvl="0"/>
             <a:r>
-              <a:rPr lang="en-US" smtClean="0"/>
+              <a:rPr lang="en-US"/>
               <a:t>Click to edit Master text styles</a:t>
             </a:r>
           </a:p>
@@ -1570,38 +1573,37 @@
           <a:p>
             <a:pPr lvl="0"/>
             <a:r>
-              <a:rPr lang="en-US" smtClean="0"/>
+              <a:rPr lang="en-US"/>
               <a:t>Click to edit Master text styles</a:t>
             </a:r>
           </a:p>
           <a:p>
             <a:pPr lvl="1"/>
             <a:r>
-              <a:rPr lang="en-US" smtClean="0"/>
+              <a:rPr lang="en-US"/>
               <a:t>Second level</a:t>
             </a:r>
           </a:p>
           <a:p>
             <a:pPr lvl="2"/>
             <a:r>
-              <a:rPr lang="en-US" smtClean="0"/>
+              <a:rPr lang="en-US"/>
               <a:t>Third level</a:t>
             </a:r>
           </a:p>
           <a:p>
             <a:pPr lvl="3"/>
             <a:r>
-              <a:rPr lang="en-US" smtClean="0"/>
+              <a:rPr lang="en-US"/>
               <a:t>Fourth level</a:t>
             </a:r>
           </a:p>
           <a:p>
             <a:pPr lvl="4"/>
             <a:r>
-              <a:rPr lang="en-US" smtClean="0"/>
+              <a:rPr lang="en-US"/>
               <a:t>Fifth level</a:t>
             </a:r>
-            <a:endParaRPr lang="en-US"/>
           </a:p>
         </p:txBody>
       </p:sp>
@@ -1664,7 +1666,7 @@
           <a:p>
             <a:pPr lvl="0"/>
             <a:r>
-              <a:rPr lang="en-US" smtClean="0"/>
+              <a:rPr lang="en-US"/>
               <a:t>Click to edit Master text styles</a:t>
             </a:r>
           </a:p>
@@ -1720,38 +1722,37 @@
           <a:p>
             <a:pPr lvl="0"/>
             <a:r>
-              <a:rPr lang="en-US" smtClean="0"/>
+              <a:rPr lang="en-US"/>
               <a:t>Click to edit Master text styles</a:t>
             </a:r>
           </a:p>
           <a:p>
             <a:pPr lvl="1"/>
             <a:r>
-              <a:rPr lang="en-US" smtClean="0"/>
+              <a:rPr lang="en-US"/>
               <a:t>Second level</a:t>
             </a:r>
           </a:p>
           <a:p>
             <a:pPr lvl="2"/>
             <a:r>
-              <a:rPr lang="en-US" smtClean="0"/>
+              <a:rPr lang="en-US"/>
               <a:t>Third level</a:t>
             </a:r>
           </a:p>
           <a:p>
             <a:pPr lvl="3"/>
             <a:r>
-              <a:rPr lang="en-US" smtClean="0"/>
+              <a:rPr lang="en-US"/>
               <a:t>Fourth level</a:t>
             </a:r>
           </a:p>
           <a:p>
             <a:pPr lvl="4"/>
             <a:r>
-              <a:rPr lang="en-US" smtClean="0"/>
+              <a:rPr lang="en-US"/>
               <a:t>Fifth level</a:t>
             </a:r>
-            <a:endParaRPr lang="en-US"/>
           </a:p>
         </p:txBody>
       </p:sp>
@@ -1772,7 +1773,7 @@
           <a:p>
             <a:fld id="{5BCAD085-E8A6-8845-BD4E-CB4CCA059FC4}" type="datetimeFigureOut">
               <a:rPr lang="en-US" smtClean="0"/>
-              <a:t>1/27/13</a:t>
+              <a:t>4/8/2026</a:t>
             </a:fld>
             <a:endParaRPr lang="en-US"/>
           </a:p>
@@ -1866,10 +1867,9 @@
           <a:lstStyle/>
           <a:p>
             <a:r>
-              <a:rPr lang="en-US" smtClean="0"/>
+              <a:rPr lang="en-US"/>
               <a:t>Click to edit Master title style</a:t>
             </a:r>
-            <a:endParaRPr lang="en-US"/>
           </a:p>
         </p:txBody>
       </p:sp>
@@ -1890,7 +1890,7 @@
           <a:p>
             <a:fld id="{5BCAD085-E8A6-8845-BD4E-CB4CCA059FC4}" type="datetimeFigureOut">
               <a:rPr lang="en-US" smtClean="0"/>
-              <a:t>1/27/13</a:t>
+              <a:t>4/8/2026</a:t>
             </a:fld>
             <a:endParaRPr lang="en-US"/>
           </a:p>
@@ -1985,7 +1985,7 @@
           <a:p>
             <a:fld id="{5BCAD085-E8A6-8845-BD4E-CB4CCA059FC4}" type="datetimeFigureOut">
               <a:rPr lang="en-US" smtClean="0"/>
-              <a:t>1/27/13</a:t>
+              <a:t>4/8/2026</a:t>
             </a:fld>
             <a:endParaRPr lang="en-US"/>
           </a:p>
@@ -2088,10 +2088,9 @@
           </a:lstStyle>
           <a:p>
             <a:r>
-              <a:rPr lang="en-US" smtClean="0"/>
+              <a:rPr lang="en-US"/>
               <a:t>Click to edit Master title style</a:t>
             </a:r>
-            <a:endParaRPr lang="en-US"/>
           </a:p>
         </p:txBody>
       </p:sp>
@@ -2145,38 +2144,37 @@
           <a:p>
             <a:pPr lvl="0"/>
             <a:r>
-              <a:rPr lang="en-US" smtClean="0"/>
+              <a:rPr lang="en-US"/>
               <a:t>Click to edit Master text styles</a:t>
             </a:r>
           </a:p>
           <a:p>
             <a:pPr lvl="1"/>
             <a:r>
-              <a:rPr lang="en-US" smtClean="0"/>
+              <a:rPr lang="en-US"/>
               <a:t>Second level</a:t>
             </a:r>
           </a:p>
           <a:p>
             <a:pPr lvl="2"/>
             <a:r>
-              <a:rPr lang="en-US" smtClean="0"/>
+              <a:rPr lang="en-US"/>
               <a:t>Third level</a:t>
             </a:r>
           </a:p>
           <a:p>
             <a:pPr lvl="3"/>
             <a:r>
-              <a:rPr lang="en-US" smtClean="0"/>
+              <a:rPr lang="en-US"/>
               <a:t>Fourth level</a:t>
             </a:r>
           </a:p>
           <a:p>
             <a:pPr lvl="4"/>
             <a:r>
-              <a:rPr lang="en-US" smtClean="0"/>
+              <a:rPr lang="en-US"/>
               <a:t>Fifth level</a:t>
             </a:r>
-            <a:endParaRPr lang="en-US"/>
           </a:p>
         </p:txBody>
       </p:sp>
@@ -2239,7 +2237,7 @@
           <a:p>
             <a:pPr lvl="0"/>
             <a:r>
-              <a:rPr lang="en-US" smtClean="0"/>
+              <a:rPr lang="en-US"/>
               <a:t>Click to edit Master text styles</a:t>
             </a:r>
           </a:p>
@@ -2262,7 +2260,7 @@
           <a:p>
             <a:fld id="{5BCAD085-E8A6-8845-BD4E-CB4CCA059FC4}" type="datetimeFigureOut">
               <a:rPr lang="en-US" smtClean="0"/>
-              <a:t>1/27/13</a:t>
+              <a:t>4/8/2026</a:t>
             </a:fld>
             <a:endParaRPr lang="en-US"/>
           </a:p>
@@ -2365,10 +2363,9 @@
           </a:lstStyle>
           <a:p>
             <a:r>
-              <a:rPr lang="en-US" smtClean="0"/>
+              <a:rPr lang="en-US"/>
               <a:t>Click to edit Master title style</a:t>
             </a:r>
-            <a:endParaRPr lang="en-US"/>
           </a:p>
         </p:txBody>
       </p:sp>
@@ -2492,7 +2489,7 @@
           <a:p>
             <a:pPr lvl="0"/>
             <a:r>
-              <a:rPr lang="en-US" smtClean="0"/>
+              <a:rPr lang="en-US"/>
               <a:t>Click to edit Master text styles</a:t>
             </a:r>
           </a:p>
@@ -2515,7 +2512,7 @@
           <a:p>
             <a:fld id="{5BCAD085-E8A6-8845-BD4E-CB4CCA059FC4}" type="datetimeFigureOut">
               <a:rPr lang="en-US" smtClean="0"/>
-              <a:t>1/27/13</a:t>
+              <a:t>4/8/2026</a:t>
             </a:fld>
             <a:endParaRPr lang="en-US"/>
           </a:p>
@@ -2624,10 +2621,9 @@
           <a:lstStyle/>
           <a:p>
             <a:r>
-              <a:rPr lang="en-US" smtClean="0"/>
+              <a:rPr lang="en-US"/>
               <a:t>Click to edit Master title style</a:t>
             </a:r>
-            <a:endParaRPr lang="en-US"/>
           </a:p>
         </p:txBody>
       </p:sp>
@@ -2658,38 +2654,37 @@
           <a:p>
             <a:pPr lvl="0"/>
             <a:r>
-              <a:rPr lang="en-US" smtClean="0"/>
+              <a:rPr lang="en-US"/>
               <a:t>Click to edit Master text styles</a:t>
             </a:r>
           </a:p>
           <a:p>
             <a:pPr lvl="1"/>
             <a:r>
-              <a:rPr lang="en-US" smtClean="0"/>
+              <a:rPr lang="en-US"/>
               <a:t>Second level</a:t>
             </a:r>
           </a:p>
           <a:p>
             <a:pPr lvl="2"/>
             <a:r>
-              <a:rPr lang="en-US" smtClean="0"/>
+              <a:rPr lang="en-US"/>
               <a:t>Third level</a:t>
             </a:r>
           </a:p>
           <a:p>
             <a:pPr lvl="3"/>
             <a:r>
-              <a:rPr lang="en-US" smtClean="0"/>
+              <a:rPr lang="en-US"/>
               <a:t>Fourth level</a:t>
             </a:r>
           </a:p>
           <a:p>
             <a:pPr lvl="4"/>
             <a:r>
-              <a:rPr lang="en-US" smtClean="0"/>
+              <a:rPr lang="en-US"/>
               <a:t>Fifth level</a:t>
             </a:r>
-            <a:endParaRPr lang="en-US"/>
           </a:p>
         </p:txBody>
       </p:sp>
@@ -2728,7 +2723,7 @@
           <a:p>
             <a:fld id="{5BCAD085-E8A6-8845-BD4E-CB4CCA059FC4}" type="datetimeFigureOut">
               <a:rPr lang="en-US" smtClean="0"/>
-              <a:t>1/27/13</a:t>
+              <a:t>4/8/2026</a:t>
             </a:fld>
             <a:endParaRPr lang="en-US"/>
           </a:p>
@@ -3087,7 +3082,7 @@
 </file>
 
 <file path=ppt/slides/slide1.xml><?xml version="1.0" encoding="utf-8"?>
-<p:sld xmlns:a="http://schemas.openxmlformats.org/drawingml/2006/main" xmlns:p="http://schemas.openxmlformats.org/presentationml/2006/main" xmlns:r="http://schemas.openxmlformats.org/officeDocument/2006/relationships">
+<p:sld xmlns:a="http://schemas.openxmlformats.org/drawingml/2006/main" xmlns:r="http://schemas.openxmlformats.org/officeDocument/2006/relationships" xmlns:p="http://schemas.openxmlformats.org/presentationml/2006/main">
   <p:cSld>
     <p:bg>
       <p:bgPr>
@@ -3103,7 +3098,14 @@
         <p:cNvGrpSpPr/>
         <p:nvPr/>
       </p:nvGrpSpPr>
-      <p:grpSpPr/>
+      <p:grpSpPr>
+        <a:xfrm>
+          <a:off x="0" y="0"/>
+          <a:ext cx="0" cy="0"/>
+          <a:chOff x="0" y="0"/>
+          <a:chExt cx="0" cy="0"/>
+        </a:xfrm>
+      </p:grpSpPr>
       <p:sp>
         <p:nvSpPr>
           <p:cNvPr id="2" name="Rectangle 1"/>
@@ -3144,6 +3146,7 @@
           <a:lstStyle/>
           <a:p>
             <a:pPr algn="ctr"/>
+            <a:endParaRPr/>
           </a:p>
         </p:txBody>
       </p:sp>
@@ -3187,6 +3190,7 @@
           <a:lstStyle/>
           <a:p>
             <a:pPr algn="ctr"/>
+            <a:endParaRPr/>
           </a:p>
         </p:txBody>
       </p:sp>
@@ -3206,7 +3210,7 @@
           </a:prstGeom>
           <a:noFill/>
         </p:spPr>
-        <p:txBody insetl="0" insertr="0" insett="0" insetb="0">
+        <p:txBody>
           <a:bodyPr wrap="square" anchor="ctr">
             <a:spAutoFit/>
           </a:bodyPr>
@@ -3241,7 +3245,7 @@
           </a:prstGeom>
           <a:noFill/>
         </p:spPr>
-        <p:txBody insetl="0" insertr="0" insett="0" insetb="0">
+        <p:txBody>
           <a:bodyPr wrap="square" anchor="ctr">
             <a:spAutoFit/>
           </a:bodyPr>
@@ -3300,6 +3304,7 @@
           <a:lstStyle/>
           <a:p>
             <a:pPr algn="ctr"/>
+            <a:endParaRPr/>
           </a:p>
         </p:txBody>
       </p:sp>
@@ -3319,7 +3324,7 @@
           </a:prstGeom>
           <a:noFill/>
         </p:spPr>
-        <p:txBody insetl="0" insertr="0" insett="0" insetb="0">
+        <p:txBody>
           <a:bodyPr wrap="square" anchor="ctr">
             <a:spAutoFit/>
           </a:bodyPr>
@@ -3354,7 +3359,7 @@
           </a:prstGeom>
           <a:noFill/>
         </p:spPr>
-        <p:txBody insetl="0" insertr="0" insett="0" insetb="0">
+        <p:txBody>
           <a:bodyPr wrap="square" anchor="ctr">
             <a:spAutoFit/>
           </a:bodyPr>
@@ -3401,7 +3406,7 @@
           </a:prstGeom>
           <a:noFill/>
         </p:spPr>
-        <p:txBody insetl="0" insertr="0" insett="0" insetb="0">
+        <p:txBody>
           <a:bodyPr wrap="square" anchor="t">
             <a:spAutoFit/>
           </a:bodyPr>
@@ -3429,7 +3434,7 @@
 </file>
 
 <file path=ppt/slides/slide2.xml><?xml version="1.0" encoding="utf-8"?>
-<p:sld xmlns:a="http://schemas.openxmlformats.org/drawingml/2006/main" xmlns:p="http://schemas.openxmlformats.org/presentationml/2006/main" xmlns:r="http://schemas.openxmlformats.org/officeDocument/2006/relationships">
+<p:sld xmlns:a="http://schemas.openxmlformats.org/drawingml/2006/main" xmlns:r="http://schemas.openxmlformats.org/officeDocument/2006/relationships" xmlns:p="http://schemas.openxmlformats.org/presentationml/2006/main">
   <p:cSld>
     <p:bg>
       <p:bgPr>
@@ -3445,7 +3450,14 @@
         <p:cNvGrpSpPr/>
         <p:nvPr/>
       </p:nvGrpSpPr>
-      <p:grpSpPr/>
+      <p:grpSpPr>
+        <a:xfrm>
+          <a:off x="0" y="0"/>
+          <a:ext cx="0" cy="0"/>
+          <a:chOff x="0" y="0"/>
+          <a:chExt cx="0" cy="0"/>
+        </a:xfrm>
+      </p:grpSpPr>
       <p:sp>
         <p:nvSpPr>
           <p:cNvPr id="2" name="Rectangle 1"/>
@@ -3486,6 +3498,7 @@
           <a:lstStyle/>
           <a:p>
             <a:pPr algn="ctr"/>
+            <a:endParaRPr/>
           </a:p>
         </p:txBody>
       </p:sp>
@@ -3505,7 +3518,7 @@
           </a:prstGeom>
           <a:noFill/>
         </p:spPr>
-        <p:txBody insetl="0" insertr="0" insett="0" insetb="0">
+        <p:txBody>
           <a:bodyPr wrap="square" anchor="ctr">
             <a:spAutoFit/>
           </a:bodyPr>
@@ -3564,6 +3577,7 @@
           <a:lstStyle/>
           <a:p>
             <a:pPr algn="ctr"/>
+            <a:endParaRPr/>
           </a:p>
         </p:txBody>
       </p:sp>
@@ -3583,7 +3597,7 @@
           </a:prstGeom>
           <a:noFill/>
         </p:spPr>
-        <p:txBody insetl="0" insertr="0" insett="0" insetb="0">
+        <p:txBody>
           <a:bodyPr wrap="square" anchor="t">
             <a:spAutoFit/>
           </a:bodyPr>
@@ -3644,6 +3658,7 @@
           <a:lstStyle/>
           <a:p>
             <a:pPr algn="ctr"/>
+            <a:endParaRPr/>
           </a:p>
         </p:txBody>
       </p:sp>
@@ -3687,6 +3702,7 @@
           <a:lstStyle/>
           <a:p>
             <a:pPr algn="ctr"/>
+            <a:endParaRPr/>
           </a:p>
         </p:txBody>
       </p:sp>
@@ -3706,7 +3722,7 @@
           </a:prstGeom>
           <a:noFill/>
         </p:spPr>
-        <p:txBody insetl="0" insertr="0" insett="0" insetb="0">
+        <p:txBody>
           <a:bodyPr wrap="square" anchor="ctr">
             <a:spAutoFit/>
           </a:bodyPr>
@@ -3741,7 +3757,7 @@
           </a:prstGeom>
           <a:noFill/>
         </p:spPr>
-        <p:txBody insetl="0" insertr="0" insett="0" insetb="0">
+        <p:txBody>
           <a:bodyPr wrap="square" anchor="t">
             <a:spAutoFit/>
           </a:bodyPr>
@@ -3986,6 +4002,7 @@
           <a:lstStyle/>
           <a:p>
             <a:pPr algn="ctr"/>
+            <a:endParaRPr/>
           </a:p>
         </p:txBody>
       </p:sp>
@@ -4029,6 +4046,7 @@
           <a:lstStyle/>
           <a:p>
             <a:pPr algn="ctr"/>
+            <a:endParaRPr/>
           </a:p>
         </p:txBody>
       </p:sp>
@@ -4048,7 +4066,7 @@
           </a:prstGeom>
           <a:noFill/>
         </p:spPr>
-        <p:txBody insetl="0" insertr="0" insett="0" insetb="0">
+        <p:txBody>
           <a:bodyPr wrap="square" anchor="ctr">
             <a:spAutoFit/>
           </a:bodyPr>
@@ -4076,14 +4094,14 @@
         <p:spPr>
           <a:xfrm>
             <a:off x="4864608" y="1097280"/>
-            <a:ext cx="3941063" cy="3657600"/>
+            <a:ext cx="3941063" cy="2321148"/>
           </a:xfrm>
           <a:prstGeom prst="rect">
             <a:avLst/>
           </a:prstGeom>
           <a:noFill/>
         </p:spPr>
-        <p:txBody insetl="0" insertr="0" insett="0" insetb="0">
+        <p:txBody>
           <a:bodyPr wrap="square" anchor="t">
             <a:spAutoFit/>
           </a:bodyPr>
@@ -4095,7 +4113,7 @@
               </a:spcAft>
             </a:pPr>
             <a:r>
-              <a:rPr sz="1050" b="1" i="0">
+              <a:rPr sz="1050" b="1" i="0" dirty="0" err="1">
                 <a:solidFill>
                   <a:srgbClr val="263238"/>
                 </a:solidFill>
@@ -4104,29 +4122,71 @@
               <a:t>左側：タスク一覧グリッド</a:t>
             </a:r>
             <a:br>
-              <a:rPr lang="ja-JP" sz="1050"/>
+              <a:rPr lang="ja-JP" sz="1050" dirty="0"/>
             </a:br>
             <a:r>
-              <a:rPr sz="1050" b="0" i="0">
+              <a:rPr sz="1050" b="0" i="0" dirty="0">
                 <a:solidFill>
                   <a:srgbClr val="546E7A"/>
                 </a:solidFill>
                 <a:latin typeface="Meiryo"/>
               </a:rPr>
-              <a:t>　工事番号・機械・タスク名</a:t>
+              <a:t>　</a:t>
+            </a:r>
+            <a:r>
+              <a:rPr sz="1050" b="0" i="0" dirty="0" err="1">
+                <a:solidFill>
+                  <a:srgbClr val="546E7A"/>
+                </a:solidFill>
+                <a:latin typeface="Meiryo"/>
+              </a:rPr>
+              <a:t>工事番号・機械・タスク名</a:t>
             </a:r>
             <a:br>
-              <a:rPr lang="ja-JP" sz="1050"/>
+              <a:rPr lang="ja-JP" sz="1050" dirty="0"/>
             </a:br>
             <a:r>
-              <a:rPr sz="1050" b="0" i="0">
+              <a:rPr sz="1050" b="0" i="0" dirty="0">
                 <a:solidFill>
                   <a:srgbClr val="546E7A"/>
                 </a:solidFill>
                 <a:latin typeface="Meiryo"/>
               </a:rPr>
-              <a:t>　担当者・進捗 など</a:t>
-            </a:r>
+              <a:t>　</a:t>
+            </a:r>
+            <a:r>
+              <a:rPr sz="1050" b="0" i="0" dirty="0" err="1">
+                <a:solidFill>
+                  <a:srgbClr val="546E7A"/>
+                </a:solidFill>
+                <a:latin typeface="Meiryo"/>
+              </a:rPr>
+              <a:t>担当者・進捗</a:t>
+            </a:r>
+            <a:r>
+              <a:rPr sz="1050" b="0" i="0" dirty="0">
+                <a:solidFill>
+                  <a:srgbClr val="546E7A"/>
+                </a:solidFill>
+                <a:latin typeface="Meiryo"/>
+              </a:rPr>
+              <a:t> </a:t>
+            </a:r>
+            <a:r>
+              <a:rPr sz="1050" b="0" i="0" dirty="0" err="1">
+                <a:solidFill>
+                  <a:srgbClr val="546E7A"/>
+                </a:solidFill>
+                <a:latin typeface="Meiryo"/>
+              </a:rPr>
+              <a:t>など</a:t>
+            </a:r>
+            <a:endParaRPr sz="1050" b="0" i="0" dirty="0">
+              <a:solidFill>
+                <a:srgbClr val="546E7A"/>
+              </a:solidFill>
+              <a:latin typeface="Meiryo"/>
+            </a:endParaRPr>
           </a:p>
           <a:p>
             <a:pPr algn="l">
@@ -4135,7 +4195,7 @@
               </a:spcAft>
             </a:pPr>
             <a:r>
-              <a:rPr sz="1050" b="1" i="0">
+              <a:rPr sz="1050" b="1" i="0" dirty="0" err="1">
                 <a:solidFill>
                   <a:srgbClr val="263238"/>
                 </a:solidFill>
@@ -4144,17 +4204,32 @@
               <a:t>右側：タイムライン</a:t>
             </a:r>
             <a:br>
-              <a:rPr lang="ja-JP" sz="1050"/>
+              <a:rPr lang="ja-JP" sz="1050" dirty="0"/>
             </a:br>
             <a:r>
-              <a:rPr sz="1050" b="0" i="0">
+              <a:rPr sz="1050" b="0" i="0" dirty="0">
                 <a:solidFill>
                   <a:srgbClr val="546E7A"/>
                 </a:solidFill>
                 <a:latin typeface="Meiryo"/>
               </a:rPr>
-              <a:t>　バーをドラッグで日程変更可能</a:t>
-            </a:r>
+              <a:t>　</a:t>
+            </a:r>
+            <a:r>
+              <a:rPr sz="1050" b="0" i="0" dirty="0" err="1">
+                <a:solidFill>
+                  <a:srgbClr val="546E7A"/>
+                </a:solidFill>
+                <a:latin typeface="Meiryo"/>
+              </a:rPr>
+              <a:t>バーをドラッグで日程変更可能</a:t>
+            </a:r>
+            <a:endParaRPr sz="1050" b="0" i="0" dirty="0">
+              <a:solidFill>
+                <a:srgbClr val="546E7A"/>
+              </a:solidFill>
+              <a:latin typeface="Meiryo"/>
+            </a:endParaRPr>
           </a:p>
           <a:p>
             <a:pPr algn="l">
@@ -4163,26 +4238,50 @@
               </a:spcAft>
             </a:pPr>
             <a:r>
-              <a:rPr sz="1050" b="1" i="0">
+              <a:rPr sz="1050" b="1" i="0" dirty="0" err="1">
                 <a:solidFill>
                   <a:srgbClr val="E53935"/>
                 </a:solidFill>
                 <a:latin typeface="Meiryo"/>
               </a:rPr>
-              <a:t>赤い縦線（今日マーカー）</a:t>
+              <a:t>赤い縦線（今日マーカ</a:t>
+            </a:r>
+            <a:r>
+              <a:rPr sz="1050" b="1" i="0" dirty="0">
+                <a:solidFill>
+                  <a:srgbClr val="E53935"/>
+                </a:solidFill>
+                <a:latin typeface="Meiryo"/>
+              </a:rPr>
+              <a:t>ー）</a:t>
             </a:r>
             <a:br>
-              <a:rPr lang="ja-JP" sz="1050"/>
+              <a:rPr lang="ja-JP" sz="1050" dirty="0"/>
             </a:br>
             <a:r>
-              <a:rPr sz="1050" b="0" i="0">
+              <a:rPr sz="1050" b="0" i="0" dirty="0">
                 <a:solidFill>
                   <a:srgbClr val="546E7A"/>
                 </a:solidFill>
                 <a:latin typeface="Meiryo"/>
               </a:rPr>
-              <a:t>　本日の位置を示します</a:t>
-            </a:r>
+              <a:t>　</a:t>
+            </a:r>
+            <a:r>
+              <a:rPr sz="1050" b="0" i="0" dirty="0" err="1">
+                <a:solidFill>
+                  <a:srgbClr val="546E7A"/>
+                </a:solidFill>
+                <a:latin typeface="Meiryo"/>
+              </a:rPr>
+              <a:t>本日の位置を示します</a:t>
+            </a:r>
+            <a:endParaRPr sz="1050" b="0" i="0" dirty="0">
+              <a:solidFill>
+                <a:srgbClr val="546E7A"/>
+              </a:solidFill>
+              <a:latin typeface="Meiryo"/>
+            </a:endParaRPr>
           </a:p>
           <a:p>
             <a:pPr algn="l">
@@ -4191,7 +4290,7 @@
               </a:spcAft>
             </a:pPr>
             <a:r>
-              <a:rPr sz="1050" b="1" i="0">
+              <a:rPr sz="1050" b="1" i="0" dirty="0" err="1">
                 <a:solidFill>
                   <a:srgbClr val="263238"/>
                 </a:solidFill>
@@ -4200,17 +4299,32 @@
               <a:t>土日・祝日</a:t>
             </a:r>
             <a:br>
-              <a:rPr lang="ja-JP" sz="1050"/>
+              <a:rPr lang="ja-JP" sz="1050" dirty="0"/>
             </a:br>
             <a:r>
-              <a:rPr sz="1050" b="0" i="0">
+              <a:rPr sz="1050" b="0" i="0" dirty="0">
                 <a:solidFill>
                   <a:srgbClr val="546E7A"/>
                 </a:solidFill>
                 <a:latin typeface="Meiryo"/>
               </a:rPr>
-              <a:t>　グレー背景で識別できます</a:t>
-            </a:r>
+              <a:t>　</a:t>
+            </a:r>
+            <a:r>
+              <a:rPr sz="1050" b="0" i="0" dirty="0" err="1">
+                <a:solidFill>
+                  <a:srgbClr val="546E7A"/>
+                </a:solidFill>
+                <a:latin typeface="Meiryo"/>
+              </a:rPr>
+              <a:t>グレー背景で識別できます</a:t>
+            </a:r>
+            <a:endParaRPr sz="1050" b="0" i="0" dirty="0">
+              <a:solidFill>
+                <a:srgbClr val="546E7A"/>
+              </a:solidFill>
+              <a:latin typeface="Meiryo"/>
+            </a:endParaRPr>
           </a:p>
           <a:p>
             <a:pPr algn="l">
@@ -4219,38 +4333,176 @@
               </a:spcAft>
             </a:pPr>
             <a:r>
-              <a:rPr sz="1050" b="1" i="0">
-                <a:solidFill>
-                  <a:srgbClr val="263238"/>
-                </a:solidFill>
-                <a:latin typeface="Meiryo"/>
-              </a:rPr>
-              <a:t>▼マーク（出図希望日）</a:t>
+              <a:rPr sz="1050" b="1" i="0" dirty="0">
+                <a:solidFill>
+                  <a:srgbClr val="263238"/>
+                </a:solidFill>
+                <a:latin typeface="Meiryo"/>
+              </a:rPr>
+              <a:t>▼</a:t>
+            </a:r>
+            <a:r>
+              <a:rPr sz="1050" b="1" i="0" dirty="0" err="1">
+                <a:solidFill>
+                  <a:srgbClr val="263238"/>
+                </a:solidFill>
+                <a:latin typeface="Meiryo"/>
+              </a:rPr>
+              <a:t>マーク（出図希望日</a:t>
+            </a:r>
+            <a:r>
+              <a:rPr lang="ja-JP" altLang="en-US" sz="1050" b="1" i="0" dirty="0">
+                <a:solidFill>
+                  <a:srgbClr val="263238"/>
+                </a:solidFill>
+                <a:latin typeface="Meiryo"/>
+              </a:rPr>
+              <a:t>・</a:t>
+            </a:r>
+            <a:r>
+              <a:rPr lang="ja-JP" altLang="en-US" sz="1050" b="1" i="0" dirty="0">
+                <a:solidFill>
+                  <a:srgbClr val="263238"/>
+                </a:solidFill>
+                <a:latin typeface="メイリオ" panose="020B0604030504040204" pitchFamily="50" charset="-128"/>
+                <a:ea typeface="メイリオ" panose="020B0604030504040204" pitchFamily="50" charset="-128"/>
+              </a:rPr>
+              <a:t>手配期日</a:t>
+            </a:r>
+            <a:r>
+              <a:rPr sz="1050" b="1" i="0" dirty="0">
+                <a:solidFill>
+                  <a:srgbClr val="263238"/>
+                </a:solidFill>
+                <a:latin typeface="Meiryo"/>
+              </a:rPr>
+              <a:t>）</a:t>
             </a:r>
             <a:br>
-              <a:rPr lang="ja-JP" sz="1050"/>
+              <a:rPr lang="ja-JP" sz="1050" dirty="0"/>
             </a:br>
             <a:r>
-              <a:rPr sz="1050" b="0" i="0">
+              <a:rPr sz="1050" b="0" i="0" dirty="0">
                 <a:solidFill>
                   <a:srgbClr val="546E7A"/>
                 </a:solidFill>
                 <a:latin typeface="Meiryo"/>
               </a:rPr>
-              <a:t>　図面タスクバー上に表示</a:t>
+              <a:t>　</a:t>
+            </a:r>
+            <a:r>
+              <a:rPr sz="1050" b="0" i="0" dirty="0" err="1">
+                <a:solidFill>
+                  <a:srgbClr val="546E7A"/>
+                </a:solidFill>
+                <a:latin typeface="Meiryo"/>
+              </a:rPr>
+              <a:t>図面</a:t>
+            </a:r>
+            <a:r>
+              <a:rPr lang="ja-JP" altLang="en-US" sz="1050" b="0" i="0" dirty="0">
+                <a:solidFill>
+                  <a:srgbClr val="546E7A"/>
+                </a:solidFill>
+                <a:latin typeface="Meiryo"/>
+              </a:rPr>
+              <a:t>・</a:t>
+            </a:r>
+            <a:r>
+              <a:rPr lang="ja-JP" altLang="en-US" sz="1050" b="0" i="0" dirty="0">
+                <a:solidFill>
+                  <a:srgbClr val="546E7A"/>
+                </a:solidFill>
+                <a:latin typeface="メイリオ" panose="020B0604030504040204" pitchFamily="50" charset="-128"/>
+                <a:ea typeface="メイリオ" panose="020B0604030504040204" pitchFamily="50" charset="-128"/>
+              </a:rPr>
+              <a:t>長納期品</a:t>
+            </a:r>
+            <a:r>
+              <a:rPr sz="1050" b="0" i="0" dirty="0" err="1">
+                <a:solidFill>
+                  <a:srgbClr val="546E7A"/>
+                </a:solidFill>
+                <a:latin typeface="Meiryo"/>
+              </a:rPr>
+              <a:t>タスクバー上に表示</a:t>
             </a:r>
             <a:br>
-              <a:rPr lang="ja-JP" sz="1050"/>
+              <a:rPr lang="ja-JP" sz="1050" dirty="0"/>
             </a:br>
             <a:r>
-              <a:rPr sz="1050" b="0" i="0">
+              <a:rPr sz="1050" b="0" i="0" dirty="0">
                 <a:solidFill>
                   <a:srgbClr val="546E7A"/>
                 </a:solidFill>
                 <a:latin typeface="Meiryo"/>
               </a:rPr>
-              <a:t>　ドラッグで日程変更可能</a:t>
-            </a:r>
+              <a:t>　</a:t>
+            </a:r>
+            <a:r>
+              <a:rPr sz="1050" b="0" i="0" dirty="0" err="1">
+                <a:solidFill>
+                  <a:srgbClr val="546E7A"/>
+                </a:solidFill>
+                <a:latin typeface="Meiryo"/>
+              </a:rPr>
+              <a:t>ドラッグで日程変更可能</a:t>
+            </a:r>
+            <a:endParaRPr lang="en-US" sz="1050" b="0" i="0" dirty="0">
+              <a:solidFill>
+                <a:srgbClr val="546E7A"/>
+              </a:solidFill>
+              <a:latin typeface="Meiryo"/>
+            </a:endParaRPr>
+          </a:p>
+          <a:p>
+            <a:pPr algn="l">
+              <a:spcAft>
+                <a:spcPts val="200"/>
+              </a:spcAft>
+            </a:pPr>
+            <a:r>
+              <a:rPr lang="ja-JP" altLang="en-US" sz="1050" dirty="0">
+                <a:solidFill>
+                  <a:srgbClr val="546E7A"/>
+                </a:solidFill>
+                <a:latin typeface="Meiryo"/>
+              </a:rPr>
+              <a:t>　</a:t>
+            </a:r>
+            <a:r>
+              <a:rPr lang="en-US" altLang="ja-JP" sz="1050" dirty="0">
+                <a:solidFill>
+                  <a:schemeClr val="bg1">
+                    <a:lumMod val="65000"/>
+                  </a:schemeClr>
+                </a:solidFill>
+                <a:latin typeface="メイリオ" panose="020B0604030504040204" pitchFamily="50" charset="-128"/>
+                <a:ea typeface="メイリオ" panose="020B0604030504040204" pitchFamily="50" charset="-128"/>
+              </a:rPr>
+              <a:t>※</a:t>
+            </a:r>
+            <a:r>
+              <a:rPr lang="ja-JP" altLang="en-US" sz="1050" dirty="0">
+                <a:solidFill>
+                  <a:schemeClr val="bg1">
+                    <a:lumMod val="65000"/>
+                  </a:schemeClr>
+                </a:solidFill>
+                <a:latin typeface="メイリオ" panose="020B0604030504040204" pitchFamily="50" charset="-128"/>
+                <a:ea typeface="メイリオ" panose="020B0604030504040204" pitchFamily="50" charset="-128"/>
+              </a:rPr>
+              <a:t>製造管理部が変更</a:t>
+            </a:r>
+            <a:endParaRPr sz="1050" b="0" i="0" dirty="0">
+              <a:solidFill>
+                <a:schemeClr val="bg1">
+                  <a:lumMod val="65000"/>
+                </a:schemeClr>
+              </a:solidFill>
+              <a:latin typeface="メイリオ" panose="020B0604030504040204" pitchFamily="50" charset="-128"/>
+              <a:ea typeface="メイリオ" panose="020B0604030504040204" pitchFamily="50" charset="-128"/>
+            </a:endParaRPr>
           </a:p>
         </p:txBody>
       </p:sp>
@@ -4263,7 +4515,7 @@
 </file>
 
 <file path=ppt/slides/slide3.xml><?xml version="1.0" encoding="utf-8"?>
-<p:sld xmlns:a="http://schemas.openxmlformats.org/drawingml/2006/main" xmlns:p="http://schemas.openxmlformats.org/presentationml/2006/main" xmlns:r="http://schemas.openxmlformats.org/officeDocument/2006/relationships">
+<p:sld xmlns:a="http://schemas.openxmlformats.org/drawingml/2006/main" xmlns:r="http://schemas.openxmlformats.org/officeDocument/2006/relationships" xmlns:p="http://schemas.openxmlformats.org/presentationml/2006/main">
   <p:cSld>
     <p:bg>
       <p:bgPr>
@@ -4279,7 +4531,14 @@
         <p:cNvGrpSpPr/>
         <p:nvPr/>
       </p:nvGrpSpPr>
-      <p:grpSpPr/>
+      <p:grpSpPr>
+        <a:xfrm>
+          <a:off x="0" y="0"/>
+          <a:ext cx="0" cy="0"/>
+          <a:chOff x="0" y="0"/>
+          <a:chExt cx="0" cy="0"/>
+        </a:xfrm>
+      </p:grpSpPr>
       <p:sp>
         <p:nvSpPr>
           <p:cNvPr id="2" name="Rectangle 1"/>
@@ -4320,6 +4579,7 @@
           <a:lstStyle/>
           <a:p>
             <a:pPr algn="ctr"/>
+            <a:endParaRPr/>
           </a:p>
         </p:txBody>
       </p:sp>
@@ -4339,7 +4599,7 @@
           </a:prstGeom>
           <a:noFill/>
         </p:spPr>
-        <p:txBody insetl="0" insertr="0" insett="0" insetb="0">
+        <p:txBody>
           <a:bodyPr wrap="square" anchor="ctr">
             <a:spAutoFit/>
           </a:bodyPr>
@@ -4398,6 +4658,7 @@
           <a:lstStyle/>
           <a:p>
             <a:pPr algn="ctr"/>
+            <a:endParaRPr/>
           </a:p>
         </p:txBody>
       </p:sp>
@@ -4417,7 +4678,7 @@
           </a:prstGeom>
           <a:noFill/>
         </p:spPr>
-        <p:txBody insetl="0" insertr="0" insett="0" insetb="0">
+        <p:txBody>
           <a:bodyPr wrap="square" anchor="t">
             <a:spAutoFit/>
           </a:bodyPr>
@@ -4452,7 +4713,7 @@
           </a:prstGeom>
           <a:noFill/>
         </p:spPr>
-        <p:txBody insetl="0" insertr="0" insett="0" insetb="0">
+        <p:txBody>
           <a:bodyPr wrap="square" anchor="ctr">
             <a:spAutoFit/>
           </a:bodyPr>
@@ -4511,6 +4772,7 @@
           <a:lstStyle/>
           <a:p>
             <a:pPr algn="ctr"/>
+            <a:endParaRPr/>
           </a:p>
         </p:txBody>
       </p:sp>
@@ -4530,7 +4792,7 @@
           </a:prstGeom>
           <a:noFill/>
         </p:spPr>
-        <p:txBody insetl="0" insertr="0" insett="0" insetb="0">
+        <p:txBody>
           <a:bodyPr wrap="square" anchor="ctr">
             <a:spAutoFit/>
           </a:bodyPr>
@@ -4565,7 +4827,7 @@
           </a:prstGeom>
           <a:noFill/>
         </p:spPr>
-        <p:txBody insetl="0" insertr="0" insett="0" insetb="0">
+        <p:txBody>
           <a:bodyPr wrap="square" anchor="ctr">
             <a:spAutoFit/>
           </a:bodyPr>
@@ -4600,7 +4862,7 @@
           </a:prstGeom>
           <a:noFill/>
         </p:spPr>
-        <p:txBody insetl="0" insertr="0" insett="0" insetb="0">
+        <p:txBody>
           <a:bodyPr wrap="square" anchor="ctr">
             <a:spAutoFit/>
           </a:bodyPr>
@@ -4661,6 +4923,7 @@
           <a:lstStyle/>
           <a:p>
             <a:pPr algn="ctr"/>
+            <a:endParaRPr/>
           </a:p>
         </p:txBody>
       </p:sp>
@@ -4704,6 +4967,7 @@
           <a:lstStyle/>
           <a:p>
             <a:pPr algn="ctr"/>
+            <a:endParaRPr/>
           </a:p>
         </p:txBody>
       </p:sp>
@@ -4715,15 +4979,15 @@
         </p:nvSpPr>
         <p:spPr>
           <a:xfrm>
-            <a:off x="274320" y="1389888"/>
-            <a:ext cx="1234440" cy="658368"/>
+            <a:off x="274320" y="1592114"/>
+            <a:ext cx="1234440" cy="253916"/>
           </a:xfrm>
           <a:prstGeom prst="rect">
             <a:avLst/>
           </a:prstGeom>
           <a:noFill/>
         </p:spPr>
-        <p:txBody insetl="0" insertr="0" insett="0" insetb="0">
+        <p:txBody>
           <a:bodyPr wrap="square" anchor="ctr">
             <a:spAutoFit/>
           </a:bodyPr>
@@ -4731,7 +4995,7 @@
           <a:p>
             <a:pPr algn="ctr"/>
             <a:r>
-              <a:rPr sz="1050" b="1" i="0">
+              <a:rPr sz="1050" b="1" i="0" dirty="0" err="1">
                 <a:solidFill>
                   <a:srgbClr val="FFFFFF"/>
                 </a:solidFill>
@@ -4739,18 +5003,12 @@
               </a:rPr>
               <a:t>図面</a:t>
             </a:r>
-            <a:br>
-              <a:rPr lang="ja-JP" sz="1050"/>
-            </a:br>
-            <a:r>
-              <a:rPr sz="1050" b="1" i="0">
-                <a:solidFill>
-                  <a:srgbClr val="FFFFFF"/>
-                </a:solidFill>
-                <a:latin typeface="Meiryo"/>
-              </a:rPr>
-              <a:t>（デフォルト）</a:t>
-            </a:r>
+            <a:endParaRPr sz="1050" b="1" i="0" dirty="0">
+              <a:solidFill>
+                <a:srgbClr val="FFFFFF"/>
+              </a:solidFill>
+              <a:latin typeface="Meiryo"/>
+            </a:endParaRPr>
           </a:p>
         </p:txBody>
       </p:sp>
@@ -4770,7 +5028,7 @@
           </a:prstGeom>
           <a:noFill/>
         </p:spPr>
-        <p:txBody insetl="0" insertr="0" insett="0" insetb="0">
+        <p:txBody>
           <a:bodyPr wrap="square" anchor="ctr">
             <a:spAutoFit/>
           </a:bodyPr>
@@ -4778,7 +5036,7 @@
           <a:p>
             <a:pPr algn="l"/>
             <a:r>
-              <a:rPr sz="1050" b="0" i="0">
+              <a:rPr sz="1050" b="0" i="0" dirty="0" err="1">
                 <a:solidFill>
                   <a:srgbClr val="263238"/>
                 </a:solidFill>
@@ -4786,6 +5044,12 @@
               </a:rPr>
               <a:t>組立図面の設計進捗管理</a:t>
             </a:r>
+            <a:endParaRPr sz="1050" b="0" i="0" dirty="0">
+              <a:solidFill>
+                <a:srgbClr val="263238"/>
+              </a:solidFill>
+              <a:latin typeface="Meiryo"/>
+            </a:endParaRPr>
           </a:p>
         </p:txBody>
       </p:sp>
@@ -4805,7 +5069,7 @@
           </a:prstGeom>
           <a:noFill/>
         </p:spPr>
-        <p:txBody insetl="0" insertr="0" insett="0" insetb="0">
+        <p:txBody>
           <a:bodyPr wrap="square" anchor="ctr">
             <a:spAutoFit/>
           </a:bodyPr>
@@ -4813,7 +5077,7 @@
           <a:p>
             <a:pPr algn="l"/>
             <a:r>
-              <a:rPr sz="1000" b="0" i="0">
+              <a:rPr sz="1000" b="0" i="0" dirty="0" err="1">
                 <a:solidFill>
                   <a:srgbClr val="263238"/>
                 </a:solidFill>
@@ -4822,10 +5086,10 @@
               <a:t>工事番号・機械・ユニット・組立図面名</a:t>
             </a:r>
             <a:br>
-              <a:rPr lang="ja-JP" sz="1000"/>
+              <a:rPr lang="ja-JP" sz="1000" dirty="0"/>
             </a:br>
             <a:r>
-              <a:rPr sz="1000" b="0" i="0">
+              <a:rPr sz="1000" b="0" i="0" dirty="0" err="1">
                 <a:solidFill>
                   <a:srgbClr val="263238"/>
                 </a:solidFill>
@@ -4833,6 +5097,12 @@
               </a:rPr>
               <a:t>機種・総枚数・完了枚数・進捗・完了予定日</a:t>
             </a:r>
+            <a:endParaRPr sz="1000" b="0" i="0" dirty="0">
+              <a:solidFill>
+                <a:srgbClr val="263238"/>
+              </a:solidFill>
+              <a:latin typeface="Meiryo"/>
+            </a:endParaRPr>
           </a:p>
         </p:txBody>
       </p:sp>
@@ -4876,6 +5146,7 @@
           <a:lstStyle/>
           <a:p>
             <a:pPr algn="ctr"/>
+            <a:endParaRPr/>
           </a:p>
         </p:txBody>
       </p:sp>
@@ -4919,6 +5190,7 @@
           <a:lstStyle/>
           <a:p>
             <a:pPr algn="ctr"/>
+            <a:endParaRPr/>
           </a:p>
         </p:txBody>
       </p:sp>
@@ -4964,6 +5236,7 @@
           <a:lstStyle/>
           <a:p>
             <a:pPr algn="ctr"/>
+            <a:endParaRPr/>
           </a:p>
         </p:txBody>
       </p:sp>
@@ -5007,6 +5280,7 @@
           <a:lstStyle/>
           <a:p>
             <a:pPr algn="ctr"/>
+            <a:endParaRPr/>
           </a:p>
         </p:txBody>
       </p:sp>
@@ -5026,7 +5300,7 @@
           </a:prstGeom>
           <a:noFill/>
         </p:spPr>
-        <p:txBody insetl="0" insertr="0" insett="0" insetb="0">
+        <p:txBody>
           <a:bodyPr wrap="square" anchor="ctr">
             <a:spAutoFit/>
           </a:bodyPr>
@@ -5061,7 +5335,7 @@
           </a:prstGeom>
           <a:noFill/>
         </p:spPr>
-        <p:txBody insetl="0" insertr="0" insett="0" insetb="0">
+        <p:txBody>
           <a:bodyPr wrap="square" anchor="ctr">
             <a:spAutoFit/>
           </a:bodyPr>
@@ -5088,15 +5362,15 @@
         </p:nvSpPr>
         <p:spPr>
           <a:xfrm>
-            <a:off x="4462272" y="2084832"/>
-            <a:ext cx="4663440" cy="585216"/>
+            <a:off x="4480560" y="2200245"/>
+            <a:ext cx="4663440" cy="400110"/>
           </a:xfrm>
           <a:prstGeom prst="rect">
             <a:avLst/>
           </a:prstGeom>
           <a:noFill/>
         </p:spPr>
-        <p:txBody insetl="0" insertr="0" insett="0" insetb="0">
+        <p:txBody>
           <a:bodyPr wrap="square" anchor="ctr">
             <a:spAutoFit/>
           </a:bodyPr>
@@ -5104,19 +5378,56 @@
           <a:p>
             <a:pPr algn="l"/>
             <a:r>
-              <a:rPr sz="1000" b="0" i="0">
-                <a:solidFill>
-                  <a:srgbClr val="263238"/>
-                </a:solidFill>
-                <a:latin typeface="Meiryo"/>
-              </a:rPr>
-              <a:t>工事番号・客先・工事名・タスク</a:t>
+              <a:rPr sz="1000" b="0" i="0" dirty="0" err="1">
+                <a:solidFill>
+                  <a:srgbClr val="263238"/>
+                </a:solidFill>
+                <a:latin typeface="Meiryo"/>
+              </a:rPr>
+              <a:t>工事番号</a:t>
+            </a:r>
+            <a:r>
+              <a:rPr sz="1000" b="0" i="0" dirty="0">
+                <a:solidFill>
+                  <a:srgbClr val="263238"/>
+                </a:solidFill>
+                <a:latin typeface="Meiryo"/>
+              </a:rPr>
+              <a:t>・</a:t>
+            </a:r>
+            <a:r>
+              <a:rPr lang="ja-JP" altLang="en-US" sz="1000" b="0" i="0" dirty="0">
+                <a:solidFill>
+                  <a:srgbClr val="263238"/>
+                </a:solidFill>
+                <a:latin typeface="メイリオ" panose="020B0604030504040204" pitchFamily="50" charset="-128"/>
+                <a:ea typeface="メイリオ" panose="020B0604030504040204" pitchFamily="50" charset="-128"/>
+              </a:rPr>
+              <a:t>機械・ユニット</a:t>
+            </a:r>
+            <a:r>
+              <a:rPr sz="1000" b="0" i="0" dirty="0">
+                <a:solidFill>
+                  <a:srgbClr val="263238"/>
+                </a:solidFill>
+                <a:latin typeface="Meiryo"/>
+              </a:rPr>
+              <a:t>・</a:t>
+            </a:r>
+            <a:r>
+              <a:rPr sz="1000" b="0" i="0" dirty="0" err="1">
+                <a:solidFill>
+                  <a:srgbClr val="263238"/>
+                </a:solidFill>
+                <a:latin typeface="Meiryo"/>
+              </a:rPr>
+              <a:t>タスク</a:t>
             </a:r>
             <a:br>
-              <a:rPr lang="ja-JP" sz="1000"/>
+              <a:rPr lang="ja-JP" sz="1000" dirty="0"/>
             </a:br>
             <a:r>
-              <a:rPr sz="1000" b="0" i="0">
+              <a:rPr sz="1000" b="0" i="0" dirty="0" err="1">
                 <a:solidFill>
                   <a:srgbClr val="263238"/>
                 </a:solidFill>
@@ -5124,6 +5435,12 @@
               </a:rPr>
               <a:t>担当・開始日・終了日</a:t>
             </a:r>
+            <a:endParaRPr sz="1000" b="0" i="0" dirty="0">
+              <a:solidFill>
+                <a:srgbClr val="263238"/>
+              </a:solidFill>
+              <a:latin typeface="Meiryo"/>
+            </a:endParaRPr>
           </a:p>
         </p:txBody>
       </p:sp>
@@ -5167,6 +5484,7 @@
           <a:lstStyle/>
           <a:p>
             <a:pPr algn="ctr"/>
+            <a:endParaRPr/>
           </a:p>
         </p:txBody>
       </p:sp>
@@ -5210,6 +5528,7 @@
           <a:lstStyle/>
           <a:p>
             <a:pPr algn="ctr"/>
+            <a:endParaRPr/>
           </a:p>
         </p:txBody>
       </p:sp>
@@ -5255,6 +5574,7 @@
           <a:lstStyle/>
           <a:p>
             <a:pPr algn="ctr"/>
+            <a:endParaRPr/>
           </a:p>
         </p:txBody>
       </p:sp>
@@ -5298,6 +5618,7 @@
           <a:lstStyle/>
           <a:p>
             <a:pPr algn="ctr"/>
+            <a:endParaRPr/>
           </a:p>
         </p:txBody>
       </p:sp>
@@ -5317,7 +5638,7 @@
           </a:prstGeom>
           <a:noFill/>
         </p:spPr>
-        <p:txBody insetl="0" insertr="0" insett="0" insetb="0">
+        <p:txBody>
           <a:bodyPr wrap="square" anchor="ctr">
             <a:spAutoFit/>
           </a:bodyPr>
@@ -5352,7 +5673,7 @@
           </a:prstGeom>
           <a:noFill/>
         </p:spPr>
-        <p:txBody insetl="0" insertr="0" insett="0" insetb="0">
+        <p:txBody>
           <a:bodyPr wrap="square" anchor="ctr">
             <a:spAutoFit/>
           </a:bodyPr>
@@ -5379,15 +5700,15 @@
         </p:nvSpPr>
         <p:spPr>
           <a:xfrm>
-            <a:off x="4462272" y="2743200"/>
-            <a:ext cx="4663440" cy="585216"/>
+            <a:off x="4462272" y="2835753"/>
+            <a:ext cx="4663440" cy="400110"/>
           </a:xfrm>
           <a:prstGeom prst="rect">
             <a:avLst/>
           </a:prstGeom>
           <a:noFill/>
         </p:spPr>
-        <p:txBody insetl="0" insertr="0" insett="0" insetb="0">
+        <p:txBody>
           <a:bodyPr wrap="square" anchor="ctr">
             <a:spAutoFit/>
           </a:bodyPr>
@@ -5395,26 +5716,87 @@
           <a:p>
             <a:pPr algn="l"/>
             <a:r>
-              <a:rPr sz="1000" b="0" i="0">
-                <a:solidFill>
-                  <a:srgbClr val="263238"/>
-                </a:solidFill>
-                <a:latin typeface="Meiryo"/>
-              </a:rPr>
-              <a:t>工事番号・品名・型式図番・個数</a:t>
+              <a:rPr sz="1000" b="0" i="0" dirty="0" err="1">
+                <a:solidFill>
+                  <a:srgbClr val="263238"/>
+                </a:solidFill>
+                <a:latin typeface="Meiryo"/>
+              </a:rPr>
+              <a:t>工事番号</a:t>
+            </a:r>
+            <a:r>
+              <a:rPr sz="1000" b="0" i="0" dirty="0">
+                <a:solidFill>
+                  <a:srgbClr val="263238"/>
+                </a:solidFill>
+                <a:latin typeface="Meiryo"/>
+              </a:rPr>
+              <a:t>・</a:t>
+            </a:r>
+            <a:r>
+              <a:rPr lang="ja-JP" altLang="en-US" sz="1000" b="0" i="0" dirty="0">
+                <a:solidFill>
+                  <a:srgbClr val="263238"/>
+                </a:solidFill>
+                <a:latin typeface="メイリオ" panose="020B0604030504040204" pitchFamily="50" charset="-128"/>
+                <a:ea typeface="メイリオ" panose="020B0604030504040204" pitchFamily="50" charset="-128"/>
+              </a:rPr>
+              <a:t>機械・ユニット</a:t>
+            </a:r>
+            <a:r>
+              <a:rPr lang="ja-JP" altLang="en-US" sz="1000" b="0" i="0" dirty="0">
+                <a:solidFill>
+                  <a:srgbClr val="263238"/>
+                </a:solidFill>
+                <a:latin typeface="Meiryo"/>
+              </a:rPr>
+              <a:t>・</a:t>
+            </a:r>
+            <a:r>
+              <a:rPr sz="1000" b="0" i="0" dirty="0" err="1">
+                <a:solidFill>
+                  <a:srgbClr val="263238"/>
+                </a:solidFill>
+                <a:latin typeface="Meiryo"/>
+              </a:rPr>
+              <a:t>品名・型式図番・個数</a:t>
             </a:r>
             <a:br>
-              <a:rPr lang="ja-JP" sz="1000"/>
+              <a:rPr lang="ja-JP" sz="1000" dirty="0"/>
             </a:br>
             <a:r>
-              <a:rPr sz="1000" b="0" i="0">
-                <a:solidFill>
-                  <a:srgbClr val="263238"/>
-                </a:solidFill>
-                <a:latin typeface="Meiryo"/>
-              </a:rPr>
-              <a:t>メーカー・担当・手配予定日・状態</a:t>
-            </a:r>
+              <a:rPr sz="1000" b="0" i="0" dirty="0" err="1">
+                <a:solidFill>
+                  <a:srgbClr val="263238"/>
+                </a:solidFill>
+                <a:latin typeface="Meiryo"/>
+              </a:rPr>
+              <a:t>メーカ</a:t>
+            </a:r>
+            <a:r>
+              <a:rPr sz="1000" b="0" i="0" dirty="0">
+                <a:solidFill>
+                  <a:srgbClr val="263238"/>
+                </a:solidFill>
+                <a:latin typeface="Meiryo"/>
+              </a:rPr>
+              <a:t>ー・</a:t>
+            </a:r>
+            <a:r>
+              <a:rPr sz="1000" b="0" i="0" dirty="0" err="1">
+                <a:solidFill>
+                  <a:srgbClr val="263238"/>
+                </a:solidFill>
+                <a:latin typeface="Meiryo"/>
+              </a:rPr>
+              <a:t>担当・手配予定日・状態</a:t>
+            </a:r>
+            <a:endParaRPr sz="1000" b="0" i="0" dirty="0">
+              <a:solidFill>
+                <a:srgbClr val="263238"/>
+              </a:solidFill>
+              <a:latin typeface="Meiryo"/>
+            </a:endParaRPr>
           </a:p>
         </p:txBody>
       </p:sp>
@@ -5458,6 +5840,7 @@
           <a:lstStyle/>
           <a:p>
             <a:pPr algn="ctr"/>
+            <a:endParaRPr/>
           </a:p>
         </p:txBody>
       </p:sp>
@@ -5501,6 +5884,7 @@
           <a:lstStyle/>
           <a:p>
             <a:pPr algn="ctr"/>
+            <a:endParaRPr/>
           </a:p>
         </p:txBody>
       </p:sp>
@@ -5546,6 +5930,7 @@
           <a:lstStyle/>
           <a:p>
             <a:pPr algn="ctr"/>
+            <a:endParaRPr/>
           </a:p>
         </p:txBody>
       </p:sp>
@@ -5589,6 +5974,7 @@
           <a:lstStyle/>
           <a:p>
             <a:pPr algn="ctr"/>
+            <a:endParaRPr/>
           </a:p>
         </p:txBody>
       </p:sp>
@@ -5608,7 +5994,7 @@
           </a:prstGeom>
           <a:noFill/>
         </p:spPr>
-        <p:txBody insetl="0" insertr="0" insett="0" insetb="0">
+        <p:txBody>
           <a:bodyPr wrap="square" anchor="ctr">
             <a:spAutoFit/>
           </a:bodyPr>
@@ -5643,7 +6029,7 @@
           </a:prstGeom>
           <a:noFill/>
         </p:spPr>
-        <p:txBody insetl="0" insertr="0" insett="0" insetb="0">
+        <p:txBody>
           <a:bodyPr wrap="square" anchor="ctr">
             <a:spAutoFit/>
           </a:bodyPr>
@@ -5670,15 +6056,15 @@
         </p:nvSpPr>
         <p:spPr>
           <a:xfrm>
-            <a:off x="4462272" y="3401568"/>
-            <a:ext cx="4663440" cy="585216"/>
+            <a:off x="4462272" y="3494121"/>
+            <a:ext cx="4663440" cy="400110"/>
           </a:xfrm>
           <a:prstGeom prst="rect">
             <a:avLst/>
           </a:prstGeom>
           <a:noFill/>
         </p:spPr>
-        <p:txBody insetl="0" insertr="0" insett="0" insetb="0">
+        <p:txBody>
           <a:bodyPr wrap="square" anchor="ctr">
             <a:spAutoFit/>
           </a:bodyPr>
@@ -5686,19 +6072,56 @@
           <a:p>
             <a:pPr algn="l"/>
             <a:r>
-              <a:rPr sz="1000" b="0" i="0">
-                <a:solidFill>
-                  <a:srgbClr val="263238"/>
-                </a:solidFill>
-                <a:latin typeface="Meiryo"/>
-              </a:rPr>
-              <a:t>工事番号・機械・タスク</a:t>
+              <a:rPr sz="1000" b="0" i="0" dirty="0" err="1">
+                <a:solidFill>
+                  <a:srgbClr val="263238"/>
+                </a:solidFill>
+                <a:latin typeface="Meiryo"/>
+              </a:rPr>
+              <a:t>工事番号・機械</a:t>
+            </a:r>
+            <a:r>
+              <a:rPr sz="1000" b="0" i="0" dirty="0">
+                <a:solidFill>
+                  <a:srgbClr val="263238"/>
+                </a:solidFill>
+                <a:latin typeface="Meiryo"/>
+              </a:rPr>
+              <a:t>・</a:t>
+            </a:r>
+            <a:r>
+              <a:rPr lang="ja-JP" altLang="en-US" sz="1000" b="0" i="0" dirty="0">
+                <a:solidFill>
+                  <a:srgbClr val="263238"/>
+                </a:solidFill>
+                <a:latin typeface="メイリオ" panose="020B0604030504040204" pitchFamily="50" charset="-128"/>
+                <a:ea typeface="メイリオ" panose="020B0604030504040204" pitchFamily="50" charset="-128"/>
+              </a:rPr>
+              <a:t>ユニット</a:t>
+            </a:r>
+            <a:r>
+              <a:rPr lang="ja-JP" altLang="en-US" sz="1000" b="0" i="0" dirty="0">
+                <a:solidFill>
+                  <a:srgbClr val="263238"/>
+                </a:solidFill>
+                <a:latin typeface="Meiryo"/>
+              </a:rPr>
+              <a:t>・</a:t>
+            </a:r>
+            <a:r>
+              <a:rPr sz="1000" b="0" i="0" dirty="0" err="1">
+                <a:solidFill>
+                  <a:srgbClr val="263238"/>
+                </a:solidFill>
+                <a:latin typeface="Meiryo"/>
+              </a:rPr>
+              <a:t>タスク</a:t>
             </a:r>
             <a:br>
-              <a:rPr lang="ja-JP" sz="1000"/>
+              <a:rPr lang="ja-JP" sz="1000" dirty="0"/>
             </a:br>
             <a:r>
-              <a:rPr sz="1000" b="0" i="0">
+              <a:rPr sz="1000" b="0" i="0" dirty="0" err="1">
                 <a:solidFill>
                   <a:srgbClr val="263238"/>
                 </a:solidFill>
@@ -5706,6 +6129,12 @@
               </a:rPr>
               <a:t>担当・開始日・終了日</a:t>
             </a:r>
+            <a:endParaRPr sz="1000" b="0" i="0" dirty="0">
+              <a:solidFill>
+                <a:srgbClr val="263238"/>
+              </a:solidFill>
+              <a:latin typeface="Meiryo"/>
+            </a:endParaRPr>
           </a:p>
         </p:txBody>
       </p:sp>
@@ -5749,6 +6178,7 @@
           <a:lstStyle/>
           <a:p>
             <a:pPr algn="ctr"/>
+            <a:endParaRPr/>
           </a:p>
         </p:txBody>
       </p:sp>
@@ -5792,6 +6222,7 @@
           <a:lstStyle/>
           <a:p>
             <a:pPr algn="ctr"/>
+            <a:endParaRPr/>
           </a:p>
         </p:txBody>
       </p:sp>
@@ -5837,6 +6268,7 @@
           <a:lstStyle/>
           <a:p>
             <a:pPr algn="ctr"/>
+            <a:endParaRPr/>
           </a:p>
         </p:txBody>
       </p:sp>
@@ -5880,6 +6312,7 @@
           <a:lstStyle/>
           <a:p>
             <a:pPr algn="ctr"/>
+            <a:endParaRPr/>
           </a:p>
         </p:txBody>
       </p:sp>
@@ -5899,7 +6332,7 @@
           </a:prstGeom>
           <a:noFill/>
         </p:spPr>
-        <p:txBody insetl="0" insertr="0" insett="0" insetb="0">
+        <p:txBody>
           <a:bodyPr wrap="square" anchor="ctr">
             <a:spAutoFit/>
           </a:bodyPr>
@@ -5926,15 +6359,15 @@
         </p:nvSpPr>
         <p:spPr>
           <a:xfrm>
-            <a:off x="1536192" y="4059936"/>
-            <a:ext cx="2880360" cy="585216"/>
+            <a:off x="1536192" y="4225586"/>
+            <a:ext cx="2880360" cy="253916"/>
           </a:xfrm>
           <a:prstGeom prst="rect">
             <a:avLst/>
           </a:prstGeom>
           <a:noFill/>
         </p:spPr>
-        <p:txBody insetl="0" insertr="0" insett="0" insetb="0">
+        <p:txBody>
           <a:bodyPr wrap="square" anchor="ctr">
             <a:spAutoFit/>
           </a:bodyPr>
@@ -5942,7 +6375,7 @@
           <a:p>
             <a:pPr algn="l"/>
             <a:r>
-              <a:rPr sz="1050" b="0" i="0">
+              <a:rPr sz="1050" b="0" i="0" dirty="0" err="1">
                 <a:solidFill>
                   <a:srgbClr val="263238"/>
                 </a:solidFill>
@@ -5950,18 +6383,12 @@
               </a:rPr>
               <a:t>担当者別のリソース状況を全画面表示</a:t>
             </a:r>
-            <a:br>
-              <a:rPr lang="ja-JP" sz="1050"/>
-            </a:br>
-            <a:r>
-              <a:rPr sz="1050" b="0" i="0">
-                <a:solidFill>
-                  <a:srgbClr val="263238"/>
-                </a:solidFill>
-                <a:latin typeface="Meiryo"/>
-              </a:rPr>
-              <a:t>（詳細はスライド7参照）</a:t>
-            </a:r>
+            <a:endParaRPr sz="1050" b="0" i="0" dirty="0">
+              <a:solidFill>
+                <a:srgbClr val="263238"/>
+              </a:solidFill>
+              <a:latin typeface="Meiryo"/>
+            </a:endParaRPr>
           </a:p>
         </p:txBody>
       </p:sp>
@@ -5981,7 +6408,7 @@
           </a:prstGeom>
           <a:noFill/>
         </p:spPr>
-        <p:txBody insetl="0" insertr="0" insett="0" insetb="0">
+        <p:txBody>
           <a:bodyPr wrap="square" anchor="ctr">
             <a:spAutoFit/>
           </a:bodyPr>
@@ -5989,7 +6416,7 @@
           <a:p>
             <a:pPr algn="l"/>
             <a:r>
-              <a:rPr sz="1000" b="0" i="0">
+              <a:rPr sz="1000" b="0" i="0" dirty="0" err="1">
                 <a:solidFill>
                   <a:srgbClr val="263238"/>
                 </a:solidFill>
@@ -5997,6 +6424,12 @@
               </a:rPr>
               <a:t>各担当者のタスクをタイムラインで一覧表示</a:t>
             </a:r>
+            <a:endParaRPr sz="1000" b="0" i="0" dirty="0">
+              <a:solidFill>
+                <a:srgbClr val="263238"/>
+              </a:solidFill>
+              <a:latin typeface="Meiryo"/>
+            </a:endParaRPr>
           </a:p>
         </p:txBody>
       </p:sp>
@@ -6040,6 +6473,7 @@
           <a:lstStyle/>
           <a:p>
             <a:pPr algn="ctr"/>
+            <a:endParaRPr/>
           </a:p>
         </p:txBody>
       </p:sp>
@@ -6083,6 +6517,7 @@
           <a:lstStyle/>
           <a:p>
             <a:pPr algn="ctr"/>
+            <a:endParaRPr/>
           </a:p>
         </p:txBody>
       </p:sp>
@@ -6095,7 +6530,7 @@
 </file>
 
 <file path=ppt/slides/slide4.xml><?xml version="1.0" encoding="utf-8"?>
-<p:sld xmlns:a="http://schemas.openxmlformats.org/drawingml/2006/main" xmlns:p="http://schemas.openxmlformats.org/presentationml/2006/main" xmlns:r="http://schemas.openxmlformats.org/officeDocument/2006/relationships">
+<p:sld xmlns:a="http://schemas.openxmlformats.org/drawingml/2006/main" xmlns:r="http://schemas.openxmlformats.org/officeDocument/2006/relationships" xmlns:p="http://schemas.openxmlformats.org/presentationml/2006/main">
   <p:cSld>
     <p:bg>
       <p:bgPr>
@@ -6111,7 +6546,14 @@
         <p:cNvGrpSpPr/>
         <p:nvPr/>
       </p:nvGrpSpPr>
-      <p:grpSpPr/>
+      <p:grpSpPr>
+        <a:xfrm>
+          <a:off x="0" y="0"/>
+          <a:ext cx="0" cy="0"/>
+          <a:chOff x="0" y="0"/>
+          <a:chExt cx="0" cy="0"/>
+        </a:xfrm>
+      </p:grpSpPr>
       <p:sp>
         <p:nvSpPr>
           <p:cNvPr id="2" name="Rectangle 1"/>
@@ -6152,6 +6594,7 @@
           <a:lstStyle/>
           <a:p>
             <a:pPr algn="ctr"/>
+            <a:endParaRPr/>
           </a:p>
         </p:txBody>
       </p:sp>
@@ -6171,7 +6614,7 @@
           </a:prstGeom>
           <a:noFill/>
         </p:spPr>
-        <p:txBody insetl="0" insertr="0" insett="0" insetb="0">
+        <p:txBody>
           <a:bodyPr wrap="square" anchor="ctr">
             <a:spAutoFit/>
           </a:bodyPr>
@@ -6230,6 +6673,7 @@
           <a:lstStyle/>
           <a:p>
             <a:pPr algn="ctr"/>
+            <a:endParaRPr/>
           </a:p>
         </p:txBody>
       </p:sp>
@@ -6249,7 +6693,7 @@
           </a:prstGeom>
           <a:noFill/>
         </p:spPr>
-        <p:txBody insetl="0" insertr="0" insett="0" insetb="0">
+        <p:txBody>
           <a:bodyPr wrap="square" anchor="t">
             <a:spAutoFit/>
           </a:bodyPr>
@@ -6310,6 +6754,7 @@
           <a:lstStyle/>
           <a:p>
             <a:pPr algn="ctr"/>
+            <a:endParaRPr/>
           </a:p>
         </p:txBody>
       </p:sp>
@@ -6353,6 +6798,7 @@
           <a:lstStyle/>
           <a:p>
             <a:pPr algn="ctr"/>
+            <a:endParaRPr/>
           </a:p>
         </p:txBody>
       </p:sp>
@@ -6372,7 +6818,7 @@
           </a:prstGeom>
           <a:noFill/>
         </p:spPr>
-        <p:txBody insetl="0" insertr="0" insett="0" insetb="0">
+        <p:txBody>
           <a:bodyPr wrap="square" anchor="ctr">
             <a:spAutoFit/>
           </a:bodyPr>
@@ -6407,7 +6853,7 @@
           </a:prstGeom>
           <a:noFill/>
         </p:spPr>
-        <p:txBody insetl="0" insertr="0" insett="0" insetb="0">
+        <p:txBody>
           <a:bodyPr wrap="square" anchor="t">
             <a:spAutoFit/>
           </a:bodyPr>
@@ -6531,6 +6977,7 @@
           <a:lstStyle/>
           <a:p>
             <a:pPr algn="ctr"/>
+            <a:endParaRPr/>
           </a:p>
         </p:txBody>
       </p:sp>
@@ -6574,6 +7021,7 @@
           <a:lstStyle/>
           <a:p>
             <a:pPr algn="ctr"/>
+            <a:endParaRPr/>
           </a:p>
         </p:txBody>
       </p:sp>
@@ -6593,7 +7041,7 @@
           </a:prstGeom>
           <a:noFill/>
         </p:spPr>
-        <p:txBody insetl="0" insertr="0" insett="0" insetb="0">
+        <p:txBody>
           <a:bodyPr wrap="square" anchor="ctr">
             <a:spAutoFit/>
           </a:bodyPr>
@@ -6628,7 +7076,7 @@
           </a:prstGeom>
           <a:noFill/>
         </p:spPr>
-        <p:txBody insetl="0" insertr="0" insett="0" insetb="0">
+        <p:txBody>
           <a:bodyPr wrap="square" anchor="t">
             <a:spAutoFit/>
           </a:bodyPr>
@@ -6743,6 +7191,7 @@
           <a:lstStyle/>
           <a:p>
             <a:pPr algn="ctr"/>
+            <a:endParaRPr/>
           </a:p>
         </p:txBody>
       </p:sp>
@@ -6786,6 +7235,7 @@
           <a:lstStyle/>
           <a:p>
             <a:pPr algn="ctr"/>
+            <a:endParaRPr/>
           </a:p>
         </p:txBody>
       </p:sp>
@@ -6805,7 +7255,7 @@
           </a:prstGeom>
           <a:noFill/>
         </p:spPr>
-        <p:txBody insetl="0" insertr="0" insett="0" insetb="0">
+        <p:txBody>
           <a:bodyPr wrap="square" anchor="ctr">
             <a:spAutoFit/>
           </a:bodyPr>
@@ -6840,7 +7290,7 @@
           </a:prstGeom>
           <a:noFill/>
         </p:spPr>
-        <p:txBody insetl="0" insertr="0" insett="0" insetb="0">
+        <p:txBody>
           <a:bodyPr wrap="square" anchor="t">
             <a:spAutoFit/>
           </a:bodyPr>
@@ -6930,6 +7380,7 @@
           <a:lstStyle/>
           <a:p>
             <a:pPr algn="ctr"/>
+            <a:endParaRPr/>
           </a:p>
         </p:txBody>
       </p:sp>
@@ -6973,6 +7424,7 @@
           <a:lstStyle/>
           <a:p>
             <a:pPr algn="ctr"/>
+            <a:endParaRPr/>
           </a:p>
         </p:txBody>
       </p:sp>
@@ -6992,7 +7444,7 @@
           </a:prstGeom>
           <a:noFill/>
         </p:spPr>
-        <p:txBody insetl="0" insertr="0" insett="0" insetb="0">
+        <p:txBody>
           <a:bodyPr wrap="square" anchor="ctr">
             <a:spAutoFit/>
           </a:bodyPr>
@@ -7020,14 +7472,14 @@
         <p:spPr>
           <a:xfrm>
             <a:off x="4864608" y="1097280"/>
-            <a:ext cx="3941063" cy="640080"/>
+            <a:ext cx="3941063" cy="602729"/>
           </a:xfrm>
           <a:prstGeom prst="rect">
             <a:avLst/>
           </a:prstGeom>
           <a:noFill/>
         </p:spPr>
-        <p:txBody insetl="0" insertr="0" insett="0" insetb="0">
+        <p:txBody>
           <a:bodyPr wrap="square" anchor="t">
             <a:spAutoFit/>
           </a:bodyPr>
@@ -7039,13 +7491,22 @@
               </a:spcAft>
             </a:pPr>
             <a:r>
-              <a:rPr sz="1050" b="0" i="0">
-                <a:solidFill>
-                  <a:srgbClr val="263238"/>
-                </a:solidFill>
-                <a:latin typeface="Meiryo"/>
-              </a:rPr>
-              <a:t>タスク行をクリックして選択（青くハイライト）</a:t>
+              <a:rPr sz="1050" b="0" i="0" dirty="0" err="1">
+                <a:solidFill>
+                  <a:srgbClr val="263238"/>
+                </a:solidFill>
+                <a:latin typeface="Meiryo"/>
+              </a:rPr>
+              <a:t>タスク行をクリックして選択（青くハイライト</a:t>
+            </a:r>
+            <a:r>
+              <a:rPr sz="1050" b="0" i="0" dirty="0">
+                <a:solidFill>
+                  <a:srgbClr val="263238"/>
+                </a:solidFill>
+                <a:latin typeface="Meiryo"/>
+              </a:rPr>
+              <a:t>）</a:t>
             </a:r>
           </a:p>
           <a:p>
@@ -7055,16 +7516,45 @@
               </a:spcAft>
             </a:pPr>
             <a:r>
-              <a:rPr sz="1050" b="1" i="0">
-                <a:solidFill>
-                  <a:srgbClr val="263238"/>
-                </a:solidFill>
-                <a:latin typeface="Meiryo"/>
-              </a:rPr>
-              <a:t>「選択削除（N件）」</a:t>
-            </a:r>
-            <a:r>
-              <a:rPr sz="1050" b="0" i="0">
+              <a:rPr lang="ja-JP" altLang="en-US" sz="1050" i="0" dirty="0">
+                <a:solidFill>
+                  <a:srgbClr val="263238"/>
+                </a:solidFill>
+                <a:latin typeface="メイリオ" panose="020B0604030504040204" pitchFamily="50" charset="-128"/>
+                <a:ea typeface="メイリオ" panose="020B0604030504040204" pitchFamily="50" charset="-128"/>
+              </a:rPr>
+              <a:t>右クリック</a:t>
+            </a:r>
+            <a:r>
+              <a:rPr sz="1050" b="1" i="0" dirty="0">
+                <a:solidFill>
+                  <a:srgbClr val="263238"/>
+                </a:solidFill>
+                <a:latin typeface="Meiryo"/>
+              </a:rPr>
+              <a:t>「</a:t>
+            </a:r>
+            <a:r>
+              <a:rPr lang="ja-JP" altLang="en-US" sz="1050" b="1" dirty="0">
+                <a:solidFill>
+                  <a:srgbClr val="263238"/>
+                </a:solidFill>
+                <a:latin typeface="メイリオ" panose="020B0604030504040204" pitchFamily="50" charset="-128"/>
+                <a:ea typeface="メイリオ" panose="020B0604030504040204" pitchFamily="50" charset="-128"/>
+              </a:rPr>
+              <a:t>このタスクを削除</a:t>
+            </a:r>
+            <a:r>
+              <a:rPr sz="1050" b="1" i="0" dirty="0">
+                <a:solidFill>
+                  <a:srgbClr val="263238"/>
+                </a:solidFill>
+                <a:latin typeface="Meiryo"/>
+              </a:rPr>
+              <a:t>」</a:t>
+            </a:r>
+            <a:r>
+              <a:rPr sz="1050" b="0" i="0" dirty="0" err="1">
                 <a:solidFill>
                   <a:srgbClr val="263238"/>
                 </a:solidFill>
@@ -7072,6 +7562,12 @@
               </a:rPr>
               <a:t>ボタンをクリックして削除</a:t>
             </a:r>
+            <a:endParaRPr sz="1050" b="0" i="0" dirty="0">
+              <a:solidFill>
+                <a:srgbClr val="263238"/>
+              </a:solidFill>
+              <a:latin typeface="Meiryo"/>
+            </a:endParaRPr>
           </a:p>
           <a:p>
             <a:pPr algn="l">
@@ -7080,23 +7576,56 @@
               </a:spcAft>
             </a:pPr>
             <a:r>
-              <a:rPr sz="1050" b="1" i="0">
-                <a:solidFill>
-                  <a:srgbClr val="263238"/>
-                </a:solidFill>
-                <a:latin typeface="Meiryo"/>
-              </a:rPr>
-              <a:t>Ctrl + クリック</a:t>
-            </a:r>
-            <a:r>
-              <a:rPr sz="1050" b="0" i="0">
-                <a:solidFill>
-                  <a:srgbClr val="263238"/>
-                </a:solidFill>
-                <a:latin typeface="Meiryo"/>
-              </a:rPr>
-              <a:t>で複数行選択 → まとめて削除可能</a:t>
-            </a:r>
+              <a:rPr sz="1050" b="1" i="0" dirty="0">
+                <a:solidFill>
+                  <a:srgbClr val="263238"/>
+                </a:solidFill>
+                <a:latin typeface="Meiryo"/>
+              </a:rPr>
+              <a:t>Ctrl + </a:t>
+            </a:r>
+            <a:r>
+              <a:rPr sz="1050" b="1" i="0" dirty="0" err="1">
+                <a:solidFill>
+                  <a:srgbClr val="263238"/>
+                </a:solidFill>
+                <a:latin typeface="Meiryo"/>
+              </a:rPr>
+              <a:t>クリック</a:t>
+            </a:r>
+            <a:r>
+              <a:rPr sz="1050" b="0" i="0" dirty="0" err="1">
+                <a:solidFill>
+                  <a:srgbClr val="263238"/>
+                </a:solidFill>
+                <a:latin typeface="Meiryo"/>
+              </a:rPr>
+              <a:t>で複数行選択</a:t>
+            </a:r>
+            <a:r>
+              <a:rPr sz="1050" b="0" i="0" dirty="0">
+                <a:solidFill>
+                  <a:srgbClr val="263238"/>
+                </a:solidFill>
+                <a:latin typeface="Meiryo"/>
+              </a:rPr>
+              <a:t> → </a:t>
+            </a:r>
+            <a:r>
+              <a:rPr sz="1050" b="0" i="0" dirty="0" err="1">
+                <a:solidFill>
+                  <a:srgbClr val="263238"/>
+                </a:solidFill>
+                <a:latin typeface="Meiryo"/>
+              </a:rPr>
+              <a:t>まとめて削除可能</a:t>
+            </a:r>
+            <a:endParaRPr sz="1050" b="0" i="0" dirty="0">
+              <a:solidFill>
+                <a:srgbClr val="263238"/>
+              </a:solidFill>
+              <a:latin typeface="Meiryo"/>
+            </a:endParaRPr>
           </a:p>
         </p:txBody>
       </p:sp>
@@ -7142,6 +7671,7 @@
           <a:lstStyle/>
           <a:p>
             <a:pPr algn="ctr"/>
+            <a:endParaRPr/>
           </a:p>
         </p:txBody>
       </p:sp>
@@ -7185,6 +7715,7 @@
           <a:lstStyle/>
           <a:p>
             <a:pPr algn="ctr"/>
+            <a:endParaRPr/>
           </a:p>
         </p:txBody>
       </p:sp>
@@ -7204,7 +7735,7 @@
           </a:prstGeom>
           <a:noFill/>
         </p:spPr>
-        <p:txBody insetl="0" insertr="0" insett="0" insetb="0">
+        <p:txBody>
           <a:bodyPr wrap="square" anchor="ctr">
             <a:spAutoFit/>
           </a:bodyPr>
@@ -7232,14 +7763,14 @@
         <p:spPr>
           <a:xfrm>
             <a:off x="4864608" y="2194560"/>
-            <a:ext cx="3941063" cy="1737359"/>
+            <a:ext cx="3941063" cy="1433726"/>
           </a:xfrm>
           <a:prstGeom prst="rect">
             <a:avLst/>
           </a:prstGeom>
           <a:noFill/>
         </p:spPr>
-        <p:txBody insetl="0" insertr="0" insett="0" insetb="0">
+        <p:txBody>
           <a:bodyPr wrap="square" anchor="t">
             <a:spAutoFit/>
           </a:bodyPr>
@@ -7251,17 +7782,36 @@
               </a:spcAft>
             </a:pPr>
             <a:r>
-              <a:rPr sz="1050" b="1" i="0">
-                <a:solidFill>
-                  <a:srgbClr val="263238"/>
-                </a:solidFill>
-                <a:latin typeface="Meiryo"/>
-              </a:rPr>
-              <a:t>タスク行を右クリック → メニューが表示されます</a:t>
+              <a:rPr sz="1050" b="1" i="0" dirty="0" err="1">
+                <a:solidFill>
+                  <a:srgbClr val="263238"/>
+                </a:solidFill>
+                <a:latin typeface="Meiryo"/>
+              </a:rPr>
+              <a:t>タスク行を右クリック</a:t>
+            </a:r>
+            <a:r>
+              <a:rPr sz="1050" b="1" i="0" dirty="0">
+                <a:solidFill>
+                  <a:srgbClr val="263238"/>
+                </a:solidFill>
+                <a:latin typeface="Meiryo"/>
+              </a:rPr>
+              <a:t> → </a:t>
+            </a:r>
+            <a:r>
+              <a:rPr sz="1050" b="1" i="0" dirty="0" err="1">
+                <a:solidFill>
+                  <a:srgbClr val="263238"/>
+                </a:solidFill>
+                <a:latin typeface="Meiryo"/>
+              </a:rPr>
+              <a:t>メニューが表示されます</a:t>
             </a:r>
             <a:br>
-              <a:rPr lang="ja-JP" sz="1050"/>
+              <a:rPr lang="ja-JP" sz="1050" dirty="0"/>
             </a:br>
+            <a:endParaRPr lang="ja-JP" sz="1050" dirty="0"/>
           </a:p>
           <a:p>
             <a:pPr algn="l">
@@ -7270,16 +7820,25 @@
               </a:spcAft>
             </a:pPr>
             <a:r>
-              <a:rPr sz="1050" b="1" i="0">
+              <a:rPr sz="1050" b="1" i="0" dirty="0" err="1">
                 <a:solidFill>
                   <a:srgbClr val="1565C0"/>
                 </a:solidFill>
                 <a:latin typeface="Meiryo"/>
               </a:rPr>
-              <a:t>コピー</a:t>
-            </a:r>
-            <a:r>
-              <a:rPr sz="1050" b="0" i="0">
+              <a:t>コピ</a:t>
+            </a:r>
+            <a:r>
+              <a:rPr sz="1050" b="1" i="0" dirty="0">
+                <a:solidFill>
+                  <a:srgbClr val="1565C0"/>
+                </a:solidFill>
+                <a:latin typeface="Meiryo"/>
+              </a:rPr>
+              <a:t>ー</a:t>
+            </a:r>
+            <a:r>
+              <a:rPr sz="1050" b="0" i="0" dirty="0">
                 <a:solidFill>
                   <a:srgbClr val="263238"/>
                 </a:solidFill>
@@ -7295,22 +7854,49 @@
               </a:spcAft>
             </a:pPr>
             <a:r>
-              <a:rPr sz="1050" b="1" i="0">
+              <a:rPr sz="1050" b="1" i="0" dirty="0" err="1">
                 <a:solidFill>
                   <a:srgbClr val="1565C0"/>
                 </a:solidFill>
                 <a:latin typeface="Meiryo"/>
               </a:rPr>
-              <a:t>複数コピー</a:t>
-            </a:r>
-            <a:r>
-              <a:rPr sz="1050" b="0" i="0">
-                <a:solidFill>
-                  <a:srgbClr val="263238"/>
-                </a:solidFill>
-                <a:latin typeface="Meiryo"/>
-              </a:rPr>
-              <a:t>　：選択複数行をまとめてコピー</a:t>
+              <a:t>複数コピ</a:t>
+            </a:r>
+            <a:r>
+              <a:rPr sz="1050" b="1" i="0" dirty="0">
+                <a:solidFill>
+                  <a:srgbClr val="1565C0"/>
+                </a:solidFill>
+                <a:latin typeface="Meiryo"/>
+              </a:rPr>
+              <a:t>ー</a:t>
+            </a:r>
+            <a:r>
+              <a:rPr sz="1050" b="0" i="0" dirty="0">
+                <a:solidFill>
+                  <a:srgbClr val="263238"/>
+                </a:solidFill>
+                <a:latin typeface="Meiryo"/>
+              </a:rPr>
+              <a:t>　：</a:t>
+            </a:r>
+            <a:r>
+              <a:rPr sz="1050" b="0" i="0" dirty="0" err="1">
+                <a:solidFill>
+                  <a:srgbClr val="263238"/>
+                </a:solidFill>
+                <a:latin typeface="Meiryo"/>
+              </a:rPr>
+              <a:t>選択複数行をまとめてコピ</a:t>
+            </a:r>
+            <a:r>
+              <a:rPr sz="1050" b="0" i="0" dirty="0">
+                <a:solidFill>
+                  <a:srgbClr val="263238"/>
+                </a:solidFill>
+                <a:latin typeface="Meiryo"/>
+              </a:rPr>
+              <a:t>ー</a:t>
             </a:r>
           </a:p>
           <a:p>
@@ -7320,7 +7906,7 @@
               </a:spcAft>
             </a:pPr>
             <a:r>
-              <a:rPr sz="1050" b="1" i="0">
+              <a:rPr sz="1050" b="1" i="0" dirty="0" err="1">
                 <a:solidFill>
                   <a:srgbClr val="2E7D32"/>
                 </a:solidFill>
@@ -7329,14 +7915,29 @@
               <a:t>貼り付け</a:t>
             </a:r>
             <a:r>
-              <a:rPr sz="1050" b="0" i="0">
-                <a:solidFill>
-                  <a:srgbClr val="263238"/>
-                </a:solidFill>
-                <a:latin typeface="Meiryo"/>
-              </a:rPr>
-              <a:t>　：コピーしたタスクを貼り付け</a:t>
-            </a:r>
+              <a:rPr sz="1050" b="0" i="0" dirty="0">
+                <a:solidFill>
+                  <a:srgbClr val="263238"/>
+                </a:solidFill>
+                <a:latin typeface="Meiryo"/>
+              </a:rPr>
+              <a:t>　：</a:t>
+            </a:r>
+            <a:r>
+              <a:rPr sz="1050" b="0" i="0" dirty="0" err="1">
+                <a:solidFill>
+                  <a:srgbClr val="263238"/>
+                </a:solidFill>
+                <a:latin typeface="Meiryo"/>
+              </a:rPr>
+              <a:t>コピーしたタスクを貼り付け</a:t>
+            </a:r>
+            <a:endParaRPr sz="1050" b="0" i="0" dirty="0">
+              <a:solidFill>
+                <a:srgbClr val="263238"/>
+              </a:solidFill>
+              <a:latin typeface="Meiryo"/>
+            </a:endParaRPr>
           </a:p>
           <a:p>
             <a:pPr algn="l">
@@ -7345,7 +7946,7 @@
               </a:spcAft>
             </a:pPr>
             <a:r>
-              <a:rPr sz="1050" b="1" i="0">
+              <a:rPr sz="1050" b="1" i="0" dirty="0" err="1">
                 <a:solidFill>
                   <a:srgbClr val="C62828"/>
                 </a:solidFill>
@@ -7354,14 +7955,29 @@
               <a:t>削除</a:t>
             </a:r>
             <a:r>
-              <a:rPr sz="1050" b="0" i="0">
-                <a:solidFill>
-                  <a:srgbClr val="263238"/>
-                </a:solidFill>
-                <a:latin typeface="Meiryo"/>
-              </a:rPr>
-              <a:t>　　：選択行を削除</a:t>
-            </a:r>
+              <a:rPr sz="1050" b="0" i="0" dirty="0">
+                <a:solidFill>
+                  <a:srgbClr val="263238"/>
+                </a:solidFill>
+                <a:latin typeface="Meiryo"/>
+              </a:rPr>
+              <a:t>　　：</a:t>
+            </a:r>
+            <a:r>
+              <a:rPr sz="1050" b="0" i="0" dirty="0" err="1">
+                <a:solidFill>
+                  <a:srgbClr val="263238"/>
+                </a:solidFill>
+                <a:latin typeface="Meiryo"/>
+              </a:rPr>
+              <a:t>選択行を削除</a:t>
+            </a:r>
+            <a:endParaRPr sz="1050" b="0" i="0" dirty="0">
+              <a:solidFill>
+                <a:srgbClr val="263238"/>
+              </a:solidFill>
+              <a:latin typeface="Meiryo"/>
+            </a:endParaRPr>
           </a:p>
           <a:p>
             <a:pPr algn="l">
@@ -7370,17 +7986,38 @@
               </a:spcAft>
             </a:pPr>
             <a:br>
-              <a:rPr lang="ja-JP" sz="1000"/>
+              <a:rPr lang="ja-JP" sz="1000" dirty="0"/>
             </a:br>
             <a:r>
-              <a:rPr sz="1000" b="0" i="1">
-                <a:solidFill>
-                  <a:srgbClr val="90A4AE"/>
-                </a:solidFill>
-                <a:latin typeface="Meiryo"/>
-              </a:rPr>
-              <a:t>※ コピー時は「コピーする項目選択」ダイアログが表示されます</a:t>
-            </a:r>
+              <a:rPr sz="1000" b="0" i="1" dirty="0">
+                <a:solidFill>
+                  <a:schemeClr val="bg1">
+                    <a:lumMod val="65000"/>
+                  </a:schemeClr>
+                </a:solidFill>
+                <a:latin typeface="Meiryo"/>
+              </a:rPr>
+              <a:t>※ </a:t>
+            </a:r>
+            <a:r>
+              <a:rPr sz="1000" b="0" i="1" dirty="0" err="1">
+                <a:solidFill>
+                  <a:schemeClr val="bg1">
+                    <a:lumMod val="65000"/>
+                  </a:schemeClr>
+                </a:solidFill>
+                <a:latin typeface="Meiryo"/>
+              </a:rPr>
+              <a:t>コピー時は「コピーする項目選択」ダイアログが表示されます</a:t>
+            </a:r>
+            <a:endParaRPr sz="1000" b="0" i="1" dirty="0">
+              <a:solidFill>
+                <a:schemeClr val="bg1">
+                  <a:lumMod val="65000"/>
+                </a:schemeClr>
+              </a:solidFill>
+              <a:latin typeface="Meiryo"/>
+            </a:endParaRPr>
           </a:p>
         </p:txBody>
       </p:sp>
@@ -7393,7 +8030,7 @@
 </file>
 
 <file path=ppt/slides/slide5.xml><?xml version="1.0" encoding="utf-8"?>
-<p:sld xmlns:a="http://schemas.openxmlformats.org/drawingml/2006/main" xmlns:p="http://schemas.openxmlformats.org/presentationml/2006/main" xmlns:r="http://schemas.openxmlformats.org/officeDocument/2006/relationships">
+<p:sld xmlns:a="http://schemas.openxmlformats.org/drawingml/2006/main" xmlns:r="http://schemas.openxmlformats.org/officeDocument/2006/relationships" xmlns:p="http://schemas.openxmlformats.org/presentationml/2006/main">
   <p:cSld>
     <p:bg>
       <p:bgPr>
@@ -7409,7 +8046,14 @@
         <p:cNvGrpSpPr/>
         <p:nvPr/>
       </p:nvGrpSpPr>
-      <p:grpSpPr/>
+      <p:grpSpPr>
+        <a:xfrm>
+          <a:off x="0" y="0"/>
+          <a:ext cx="0" cy="0"/>
+          <a:chOff x="0" y="0"/>
+          <a:chExt cx="0" cy="0"/>
+        </a:xfrm>
+      </p:grpSpPr>
       <p:sp>
         <p:nvSpPr>
           <p:cNvPr id="2" name="Rectangle 1"/>
@@ -7450,6 +8094,7 @@
           <a:lstStyle/>
           <a:p>
             <a:pPr algn="ctr"/>
+            <a:endParaRPr/>
           </a:p>
         </p:txBody>
       </p:sp>
@@ -7469,7 +8114,7 @@
           </a:prstGeom>
           <a:noFill/>
         </p:spPr>
-        <p:txBody insetl="0" insertr="0" insett="0" insetb="0">
+        <p:txBody>
           <a:bodyPr wrap="square" anchor="ctr">
             <a:spAutoFit/>
           </a:bodyPr>
@@ -7528,6 +8173,7 @@
           <a:lstStyle/>
           <a:p>
             <a:pPr algn="ctr"/>
+            <a:endParaRPr/>
           </a:p>
         </p:txBody>
       </p:sp>
@@ -7547,7 +8193,7 @@
           </a:prstGeom>
           <a:noFill/>
         </p:spPr>
-        <p:txBody insetl="0" insertr="0" insett="0" insetb="0">
+        <p:txBody>
           <a:bodyPr wrap="square" anchor="t">
             <a:spAutoFit/>
           </a:bodyPr>
@@ -7608,6 +8254,7 @@
           <a:lstStyle/>
           <a:p>
             <a:pPr algn="ctr"/>
+            <a:endParaRPr/>
           </a:p>
         </p:txBody>
       </p:sp>
@@ -7651,6 +8298,7 @@
           <a:lstStyle/>
           <a:p>
             <a:pPr algn="ctr"/>
+            <a:endParaRPr/>
           </a:p>
         </p:txBody>
       </p:sp>
@@ -7670,7 +8318,7 @@
           </a:prstGeom>
           <a:noFill/>
         </p:spPr>
-        <p:txBody insetl="0" insertr="0" insett="0" insetb="0">
+        <p:txBody>
           <a:bodyPr wrap="square" anchor="ctr">
             <a:spAutoFit/>
           </a:bodyPr>
@@ -7705,7 +8353,7 @@
           </a:prstGeom>
           <a:noFill/>
         </p:spPr>
-        <p:txBody insetl="0" insertr="0" insett="0" insetb="0">
+        <p:txBody>
           <a:bodyPr wrap="square" anchor="ctr">
             <a:spAutoFit/>
           </a:bodyPr>
@@ -7819,6 +8467,7 @@
           <a:lstStyle/>
           <a:p>
             <a:pPr algn="ctr"/>
+            <a:endParaRPr/>
           </a:p>
         </p:txBody>
       </p:sp>
@@ -7862,6 +8511,7 @@
           <a:lstStyle/>
           <a:p>
             <a:pPr algn="ctr"/>
+            <a:endParaRPr/>
           </a:p>
         </p:txBody>
       </p:sp>
@@ -7881,7 +8531,7 @@
           </a:prstGeom>
           <a:noFill/>
         </p:spPr>
-        <p:txBody insetl="0" insertr="0" insett="0" insetb="0">
+        <p:txBody>
           <a:bodyPr wrap="square" anchor="ctr">
             <a:spAutoFit/>
           </a:bodyPr>
@@ -7916,7 +8566,7 @@
           </a:prstGeom>
           <a:noFill/>
         </p:spPr>
-        <p:txBody insetl="0" insertr="0" insett="0" insetb="0">
+        <p:txBody>
           <a:bodyPr wrap="square" anchor="ctr">
             <a:spAutoFit/>
           </a:bodyPr>
@@ -8030,6 +8680,7 @@
           <a:lstStyle/>
           <a:p>
             <a:pPr algn="ctr"/>
+            <a:endParaRPr/>
           </a:p>
         </p:txBody>
       </p:sp>
@@ -8073,6 +8724,7 @@
           <a:lstStyle/>
           <a:p>
             <a:pPr algn="ctr"/>
+            <a:endParaRPr/>
           </a:p>
         </p:txBody>
       </p:sp>
@@ -8092,7 +8744,7 @@
           </a:prstGeom>
           <a:noFill/>
         </p:spPr>
-        <p:txBody insetl="0" insertr="0" insett="0" insetb="0">
+        <p:txBody>
           <a:bodyPr wrap="square" anchor="ctr">
             <a:spAutoFit/>
           </a:bodyPr>
@@ -8119,15 +8771,15 @@
         </p:nvSpPr>
         <p:spPr>
           <a:xfrm>
-            <a:off x="338328" y="3063239"/>
-            <a:ext cx="3941063" cy="1444751"/>
+            <a:off x="338328" y="3362421"/>
+            <a:ext cx="3941063" cy="846386"/>
           </a:xfrm>
           <a:prstGeom prst="rect">
             <a:avLst/>
           </a:prstGeom>
           <a:noFill/>
         </p:spPr>
-        <p:txBody insetl="0" insertr="0" insett="0" insetb="0">
+        <p:txBody>
           <a:bodyPr wrap="square" anchor="ctr">
             <a:spAutoFit/>
           </a:bodyPr>
@@ -8139,7 +8791,7 @@
               </a:spcAft>
             </a:pPr>
             <a:r>
-              <a:rPr sz="1100" b="0" i="0">
+              <a:rPr sz="1100" b="0" i="0" dirty="0" err="1">
                 <a:solidFill>
                   <a:srgbClr val="263238"/>
                 </a:solidFill>
@@ -8148,16 +8800,34 @@
               <a:t>図面タスクのバー上に</a:t>
             </a:r>
             <a:r>
-              <a:rPr sz="1100" b="1" i="0">
-                <a:solidFill>
-                  <a:srgbClr val="263238"/>
-                </a:solidFill>
-                <a:latin typeface="Meiryo"/>
-              </a:rPr>
-              <a:t>黒い「▼」マーク</a:t>
-            </a:r>
-            <a:r>
-              <a:rPr sz="1100" b="0" i="0">
+              <a:rPr sz="1100" b="1" i="0" dirty="0" err="1">
+                <a:solidFill>
+                  <a:srgbClr val="263238"/>
+                </a:solidFill>
+                <a:latin typeface="Meiryo"/>
+              </a:rPr>
+              <a:t>黒い</a:t>
+            </a:r>
+            <a:r>
+              <a:rPr sz="1100" b="1" i="0" dirty="0">
+                <a:solidFill>
+                  <a:srgbClr val="263238"/>
+                </a:solidFill>
+                <a:latin typeface="Meiryo"/>
+              </a:rPr>
+              <a:t>「▼」</a:t>
+            </a:r>
+            <a:r>
+              <a:rPr sz="1100" b="1" i="0" dirty="0" err="1">
+                <a:solidFill>
+                  <a:srgbClr val="263238"/>
+                </a:solidFill>
+                <a:latin typeface="Meiryo"/>
+              </a:rPr>
+              <a:t>マーク</a:t>
+            </a:r>
+            <a:r>
+              <a:rPr sz="1100" b="0" i="0" dirty="0" err="1">
                 <a:solidFill>
                   <a:srgbClr val="263238"/>
                 </a:solidFill>
@@ -8165,6 +8835,12 @@
               </a:rPr>
               <a:t>が表示されます</a:t>
             </a:r>
+            <a:endParaRPr sz="1100" b="0" i="0" dirty="0">
+              <a:solidFill>
+                <a:srgbClr val="263238"/>
+              </a:solidFill>
+              <a:latin typeface="Meiryo"/>
+            </a:endParaRPr>
           </a:p>
           <a:p>
             <a:pPr algn="l">
@@ -8173,14 +8849,29 @@
               </a:spcAft>
             </a:pPr>
             <a:r>
-              <a:rPr sz="1100" b="0" i="0">
-                <a:solidFill>
-                  <a:srgbClr val="263238"/>
-                </a:solidFill>
-                <a:latin typeface="Meiryo"/>
-              </a:rPr>
-              <a:t>▼マークもドラッグして出図希望日を変更できます</a:t>
-            </a:r>
+              <a:rPr sz="1100" b="0" i="0" dirty="0">
+                <a:solidFill>
+                  <a:srgbClr val="263238"/>
+                </a:solidFill>
+                <a:latin typeface="Meiryo"/>
+              </a:rPr>
+              <a:t>▼</a:t>
+            </a:r>
+            <a:r>
+              <a:rPr sz="1100" b="0" i="0" dirty="0" err="1">
+                <a:solidFill>
+                  <a:srgbClr val="263238"/>
+                </a:solidFill>
+                <a:latin typeface="Meiryo"/>
+              </a:rPr>
+              <a:t>マークもドラッグして出図希望日を変更できます</a:t>
+            </a:r>
+            <a:endParaRPr sz="1100" b="0" i="0" dirty="0">
+              <a:solidFill>
+                <a:srgbClr val="263238"/>
+              </a:solidFill>
+              <a:latin typeface="Meiryo"/>
+            </a:endParaRPr>
           </a:p>
           <a:p>
             <a:pPr algn="l">
@@ -8189,34 +8880,52 @@
               </a:spcAft>
             </a:pPr>
             <a:r>
-              <a:rPr sz="1100" b="1" i="0">
-                <a:solidFill>
-                  <a:srgbClr val="263238"/>
-                </a:solidFill>
-                <a:latin typeface="Meiryo"/>
-              </a:rPr>
-              <a:t>▼の色：</a:t>
-            </a:r>
-            <a:r>
-              <a:rPr sz="1100" b="1" i="0">
-                <a:solidFill>
-                  <a:srgbClr val="263238"/>
-                </a:solidFill>
-                <a:latin typeface="Meiryo"/>
-              </a:rPr>
-              <a:t>黒</a:t>
-            </a:r>
-            <a:r>
-              <a:rPr sz="1100" b="0" i="0">
-                <a:solidFill>
-                  <a:srgbClr val="263238"/>
-                </a:solidFill>
-                <a:latin typeface="Meiryo"/>
-              </a:rPr>
-              <a:t> ＝ 余裕あり　</a:t>
-            </a:r>
-            <a:r>
-              <a:rPr sz="1100" b="1" i="0">
+              <a:rPr sz="1100" b="1" i="0" dirty="0">
+                <a:solidFill>
+                  <a:srgbClr val="263238"/>
+                </a:solidFill>
+                <a:latin typeface="Meiryo"/>
+              </a:rPr>
+              <a:t>▼</a:t>
+            </a:r>
+            <a:r>
+              <a:rPr sz="1100" b="1" i="0" dirty="0" err="1">
+                <a:solidFill>
+                  <a:srgbClr val="263238"/>
+                </a:solidFill>
+                <a:latin typeface="Meiryo"/>
+              </a:rPr>
+              <a:t>の色：黒</a:t>
+            </a:r>
+            <a:r>
+              <a:rPr sz="1100" b="0" i="0" dirty="0">
+                <a:solidFill>
+                  <a:srgbClr val="263238"/>
+                </a:solidFill>
+                <a:latin typeface="Meiryo"/>
+              </a:rPr>
+              <a:t> ＝ </a:t>
+            </a:r>
+            <a:r>
+              <a:rPr sz="1100" b="0" i="0" dirty="0" err="1">
+                <a:solidFill>
+                  <a:srgbClr val="263238"/>
+                </a:solidFill>
+                <a:latin typeface="Meiryo"/>
+              </a:rPr>
+              <a:t>余裕あり</a:t>
+            </a:r>
+            <a:r>
+              <a:rPr sz="1100" b="0" i="0" dirty="0">
+                <a:solidFill>
+                  <a:srgbClr val="263238"/>
+                </a:solidFill>
+                <a:latin typeface="Meiryo"/>
+              </a:rPr>
+              <a:t>　</a:t>
+            </a:r>
+            <a:r>
+              <a:rPr sz="1100" b="1" i="0" dirty="0">
                 <a:solidFill>
                   <a:srgbClr val="E53935"/>
                 </a:solidFill>
@@ -8225,14 +8934,78 @@
               <a:t>赤</a:t>
             </a:r>
             <a:r>
-              <a:rPr sz="1100" b="0" i="0">
-                <a:solidFill>
-                  <a:srgbClr val="263238"/>
-                </a:solidFill>
-                <a:latin typeface="Meiryo"/>
-              </a:rPr>
-              <a:t> ＝ 出図希望日超過（遅延）</a:t>
-            </a:r>
+              <a:rPr sz="1100" b="0" i="0" dirty="0">
+                <a:solidFill>
+                  <a:srgbClr val="263238"/>
+                </a:solidFill>
+                <a:latin typeface="Meiryo"/>
+              </a:rPr>
+              <a:t> ＝ </a:t>
+            </a:r>
+            <a:r>
+              <a:rPr sz="1100" b="0" i="0" dirty="0" err="1">
+                <a:solidFill>
+                  <a:srgbClr val="263238"/>
+                </a:solidFill>
+                <a:latin typeface="Meiryo"/>
+              </a:rPr>
+              <a:t>出図希望日超過（遅延</a:t>
+            </a:r>
+            <a:r>
+              <a:rPr sz="1100" b="0" i="0" dirty="0">
+                <a:solidFill>
+                  <a:srgbClr val="263238"/>
+                </a:solidFill>
+                <a:latin typeface="Meiryo"/>
+              </a:rPr>
+              <a:t>）</a:t>
+            </a:r>
+            <a:endParaRPr lang="en-US" sz="1100" b="0" i="0" dirty="0">
+              <a:solidFill>
+                <a:srgbClr val="263238"/>
+              </a:solidFill>
+              <a:latin typeface="Meiryo"/>
+            </a:endParaRPr>
+          </a:p>
+          <a:p>
+            <a:pPr algn="l">
+              <a:spcAft>
+                <a:spcPts val="200"/>
+              </a:spcAft>
+            </a:pPr>
+            <a:r>
+              <a:rPr lang="en-US" altLang="ja-JP" sz="1100" b="0" i="0" dirty="0">
+                <a:solidFill>
+                  <a:schemeClr val="bg1">
+                    <a:lumMod val="65000"/>
+                  </a:schemeClr>
+                </a:solidFill>
+                <a:latin typeface="メイリオ" panose="020B0604030504040204" pitchFamily="50" charset="-128"/>
+                <a:ea typeface="メイリオ" panose="020B0604030504040204" pitchFamily="50" charset="-128"/>
+              </a:rPr>
+              <a:t>※</a:t>
+            </a:r>
+            <a:r>
+              <a:rPr lang="ja-JP" altLang="en-US" sz="1100" b="0" i="0" dirty="0">
+                <a:solidFill>
+                  <a:schemeClr val="bg1">
+                    <a:lumMod val="65000"/>
+                  </a:schemeClr>
+                </a:solidFill>
+                <a:latin typeface="メイリオ" panose="020B0604030504040204" pitchFamily="50" charset="-128"/>
+                <a:ea typeface="メイリオ" panose="020B0604030504040204" pitchFamily="50" charset="-128"/>
+              </a:rPr>
+              <a:t>製造管理部が変更</a:t>
+            </a:r>
+            <a:endParaRPr sz="1100" b="0" i="0" dirty="0">
+              <a:solidFill>
+                <a:schemeClr val="bg1">
+                  <a:lumMod val="65000"/>
+                </a:schemeClr>
+              </a:solidFill>
+              <a:latin typeface="メイリオ" panose="020B0604030504040204" pitchFamily="50" charset="-128"/>
+              <a:ea typeface="メイリオ" panose="020B0604030504040204" pitchFamily="50" charset="-128"/>
+            </a:endParaRPr>
           </a:p>
         </p:txBody>
       </p:sp>
@@ -8278,6 +9051,7 @@
           <a:lstStyle/>
           <a:p>
             <a:pPr algn="ctr"/>
+            <a:endParaRPr/>
           </a:p>
         </p:txBody>
       </p:sp>
@@ -8321,6 +9095,7 @@
           <a:lstStyle/>
           <a:p>
             <a:pPr algn="ctr"/>
+            <a:endParaRPr/>
           </a:p>
         </p:txBody>
       </p:sp>
@@ -8340,7 +9115,7 @@
           </a:prstGeom>
           <a:noFill/>
         </p:spPr>
-        <p:txBody insetl="0" insertr="0" insett="0" insetb="0">
+        <p:txBody>
           <a:bodyPr wrap="square" anchor="ctr">
             <a:spAutoFit/>
           </a:bodyPr>
@@ -8367,15 +9142,15 @@
         </p:nvSpPr>
         <p:spPr>
           <a:xfrm>
-            <a:off x="4864608" y="3063239"/>
-            <a:ext cx="3941063" cy="1444751"/>
+            <a:off x="4864608" y="3193145"/>
+            <a:ext cx="3941063" cy="1184940"/>
           </a:xfrm>
           <a:prstGeom prst="rect">
             <a:avLst/>
           </a:prstGeom>
           <a:noFill/>
         </p:spPr>
-        <p:txBody insetl="0" insertr="0" insett="0" insetb="0">
+        <p:txBody>
           <a:bodyPr wrap="square" anchor="ctr">
             <a:spAutoFit/>
           </a:bodyPr>
@@ -8387,28 +9162,57 @@
               </a:spcAft>
             </a:pPr>
             <a:r>
-              <a:rPr sz="1100" b="1" i="0">
-                <a:solidFill>
-                  <a:srgbClr val="FFFFFF"/>
-                </a:solidFill>
-                <a:latin typeface="Meiryo"/>
-              </a:rPr>
-              <a:t>「日単位」</a:t>
-            </a:r>
-            <a:r>
-              <a:rPr sz="1100" b="0" i="0">
-                <a:solidFill>
-                  <a:srgbClr val="263238"/>
-                </a:solidFill>
-                <a:latin typeface="Meiryo"/>
-              </a:rPr>
-              <a:t>（デフォルト）</a:t>
+              <a:rPr lang="ja-JP" altLang="en-US" sz="1100" b="0" dirty="0">
+                <a:solidFill>
+                  <a:srgbClr val="263238"/>
+                </a:solidFill>
+                <a:latin typeface="メイリオ" panose="020B0604030504040204" pitchFamily="50" charset="-128"/>
+                <a:ea typeface="メイリオ" panose="020B0604030504040204" pitchFamily="50" charset="-128"/>
+              </a:rPr>
+              <a:t>　</a:t>
+            </a:r>
+            <a:r>
+              <a:rPr lang="ja-JP" altLang="en-US" sz="1100" b="1" dirty="0">
+                <a:solidFill>
+                  <a:srgbClr val="263238"/>
+                </a:solidFill>
+                <a:latin typeface="メイリオ" panose="020B0604030504040204" pitchFamily="50" charset="-128"/>
+                <a:ea typeface="メイリオ" panose="020B0604030504040204" pitchFamily="50" charset="-128"/>
+              </a:rPr>
+              <a:t>日単位</a:t>
+            </a:r>
+            <a:r>
+              <a:rPr sz="1100" b="0" i="0" dirty="0">
+                <a:solidFill>
+                  <a:srgbClr val="263238"/>
+                </a:solidFill>
+                <a:latin typeface="Meiryo"/>
+              </a:rPr>
+              <a:t>（</a:t>
+            </a:r>
+            <a:r>
+              <a:rPr sz="1100" b="0" i="0" dirty="0" err="1">
+                <a:solidFill>
+                  <a:srgbClr val="263238"/>
+                </a:solidFill>
+                <a:latin typeface="Meiryo"/>
+              </a:rPr>
+              <a:t>デフォルト</a:t>
+            </a:r>
+            <a:r>
+              <a:rPr sz="1100" b="0" i="0" dirty="0">
+                <a:solidFill>
+                  <a:srgbClr val="263238"/>
+                </a:solidFill>
+                <a:latin typeface="Meiryo"/>
+              </a:rPr>
+              <a:t>）</a:t>
             </a:r>
             <a:br>
-              <a:rPr lang="ja-JP" sz="1100"/>
+              <a:rPr lang="ja-JP" sz="1100" dirty="0"/>
             </a:br>
             <a:r>
-              <a:rPr sz="1100" b="0" i="0">
+              <a:rPr sz="1100" b="0" i="0" dirty="0">
                 <a:solidFill>
                   <a:srgbClr val="263238"/>
                 </a:solidFill>
@@ -8416,6 +9220,12 @@
               </a:rPr>
               <a:t>　日付を1日単位で細かく表示</a:t>
             </a:r>
+            <a:endParaRPr lang="en-US" sz="1100" b="0" i="0" dirty="0">
+              <a:solidFill>
+                <a:srgbClr val="263238"/>
+              </a:solidFill>
+              <a:latin typeface="Meiryo"/>
+            </a:endParaRPr>
           </a:p>
           <a:p>
             <a:pPr algn="l">
@@ -8423,39 +9233,91 @@
                 <a:spcPts val="300"/>
               </a:spcAft>
             </a:pPr>
-            <a:r>
-              <a:rPr sz="1100" b="1" i="0">
+            <a:endParaRPr sz="1100" b="0" i="0" dirty="0">
+              <a:solidFill>
+                <a:srgbClr val="263238"/>
+              </a:solidFill>
+              <a:latin typeface="Meiryo"/>
+            </a:endParaRPr>
+          </a:p>
+          <a:p>
+            <a:pPr algn="l">
+              <a:spcAft>
+                <a:spcPts val="300"/>
+              </a:spcAft>
+            </a:pPr>
+            <a:r>
+              <a:rPr sz="1100" b="1" i="0" dirty="0">
                 <a:solidFill>
                   <a:srgbClr val="FFFFFF"/>
                 </a:solidFill>
                 <a:latin typeface="Meiryo"/>
               </a:rPr>
-              <a:t>「週単位」</a:t>
+              <a:t>「</a:t>
+            </a:r>
+            <a:r>
+              <a:rPr sz="1100" b="1" i="0" dirty="0" err="1">
+                <a:latin typeface="Meiryo"/>
+              </a:rPr>
+              <a:t>週単位</a:t>
+            </a:r>
+            <a:r>
+              <a:rPr sz="1100" b="1" i="0" dirty="0">
+                <a:solidFill>
+                  <a:srgbClr val="FFFFFF"/>
+                </a:solidFill>
+                <a:latin typeface="Meiryo"/>
+              </a:rPr>
+              <a:t>」</a:t>
             </a:r>
             <a:br>
-              <a:rPr lang="ja-JP" sz="1100"/>
+              <a:rPr lang="ja-JP" sz="1100" dirty="0"/>
             </a:br>
             <a:r>
-              <a:rPr sz="1100" b="0" i="0">
-                <a:solidFill>
-                  <a:srgbClr val="263238"/>
-                </a:solidFill>
-                <a:latin typeface="Meiryo"/>
-              </a:rPr>
-              <a:t>　週単位でまとめて表示</a:t>
+              <a:rPr sz="1100" b="0" i="0" dirty="0">
+                <a:solidFill>
+                  <a:srgbClr val="263238"/>
+                </a:solidFill>
+                <a:latin typeface="Meiryo"/>
+              </a:rPr>
+              <a:t>　</a:t>
+            </a:r>
+            <a:r>
+              <a:rPr sz="1100" b="0" i="0" dirty="0" err="1">
+                <a:solidFill>
+                  <a:srgbClr val="263238"/>
+                </a:solidFill>
+                <a:latin typeface="Meiryo"/>
+              </a:rPr>
+              <a:t>週単位でまとめて表示</a:t>
             </a:r>
             <a:br>
-              <a:rPr lang="ja-JP" sz="1100"/>
+              <a:rPr lang="ja-JP" sz="1100" dirty="0"/>
             </a:br>
             <a:r>
-              <a:rPr sz="1100" b="0" i="0">
-                <a:solidFill>
-                  <a:srgbClr val="263238"/>
-                </a:solidFill>
-                <a:latin typeface="Meiryo"/>
-              </a:rPr>
-              <a:t>　全体スケジュールの把握に便利</a:t>
-            </a:r>
+              <a:rPr sz="1100" b="0" i="0" dirty="0">
+                <a:solidFill>
+                  <a:srgbClr val="263238"/>
+                </a:solidFill>
+                <a:latin typeface="Meiryo"/>
+              </a:rPr>
+              <a:t>　</a:t>
+            </a:r>
+            <a:r>
+              <a:rPr sz="1100" b="0" i="0" dirty="0" err="1">
+                <a:solidFill>
+                  <a:srgbClr val="263238"/>
+                </a:solidFill>
+                <a:latin typeface="Meiryo"/>
+              </a:rPr>
+              <a:t>全体スケジュールの把握に便利</a:t>
+            </a:r>
+            <a:endParaRPr sz="1100" b="0" i="0" dirty="0">
+              <a:solidFill>
+                <a:srgbClr val="263238"/>
+              </a:solidFill>
+              <a:latin typeface="Meiryo"/>
+            </a:endParaRPr>
           </a:p>
         </p:txBody>
       </p:sp>
@@ -8468,7 +9330,7 @@
 </file>
 
 <file path=ppt/slides/slide6.xml><?xml version="1.0" encoding="utf-8"?>
-<p:sld xmlns:a="http://schemas.openxmlformats.org/drawingml/2006/main" xmlns:p="http://schemas.openxmlformats.org/presentationml/2006/main" xmlns:r="http://schemas.openxmlformats.org/officeDocument/2006/relationships">
+<p:sld xmlns:a="http://schemas.openxmlformats.org/drawingml/2006/main" xmlns:r="http://schemas.openxmlformats.org/officeDocument/2006/relationships" xmlns:p="http://schemas.openxmlformats.org/presentationml/2006/main">
   <p:cSld>
     <p:bg>
       <p:bgPr>
@@ -8484,7 +9346,14 @@
         <p:cNvGrpSpPr/>
         <p:nvPr/>
       </p:nvGrpSpPr>
-      <p:grpSpPr/>
+      <p:grpSpPr>
+        <a:xfrm>
+          <a:off x="0" y="0"/>
+          <a:ext cx="0" cy="0"/>
+          <a:chOff x="0" y="0"/>
+          <a:chExt cx="0" cy="0"/>
+        </a:xfrm>
+      </p:grpSpPr>
       <p:sp>
         <p:nvSpPr>
           <p:cNvPr id="2" name="Rectangle 1"/>
@@ -8525,6 +9394,7 @@
           <a:lstStyle/>
           <a:p>
             <a:pPr algn="ctr"/>
+            <a:endParaRPr/>
           </a:p>
         </p:txBody>
       </p:sp>
@@ -8544,7 +9414,7 @@
           </a:prstGeom>
           <a:noFill/>
         </p:spPr>
-        <p:txBody insetl="0" insertr="0" insett="0" insetb="0">
+        <p:txBody>
           <a:bodyPr wrap="square" anchor="ctr">
             <a:spAutoFit/>
           </a:bodyPr>
@@ -8603,6 +9473,7 @@
           <a:lstStyle/>
           <a:p>
             <a:pPr algn="ctr"/>
+            <a:endParaRPr/>
           </a:p>
         </p:txBody>
       </p:sp>
@@ -8622,7 +9493,7 @@
           </a:prstGeom>
           <a:noFill/>
         </p:spPr>
-        <p:txBody insetl="0" insertr="0" insett="0" insetb="0">
+        <p:txBody>
           <a:bodyPr wrap="square" anchor="t">
             <a:spAutoFit/>
           </a:bodyPr>
@@ -8683,6 +9554,7 @@
           <a:lstStyle/>
           <a:p>
             <a:pPr algn="ctr"/>
+            <a:endParaRPr/>
           </a:p>
         </p:txBody>
       </p:sp>
@@ -8726,6 +9598,7 @@
           <a:lstStyle/>
           <a:p>
             <a:pPr algn="ctr"/>
+            <a:endParaRPr/>
           </a:p>
         </p:txBody>
       </p:sp>
@@ -8745,7 +9618,7 @@
           </a:prstGeom>
           <a:noFill/>
         </p:spPr>
-        <p:txBody insetl="0" insertr="0" insett="0" insetb="0">
+        <p:txBody>
           <a:bodyPr wrap="square" anchor="ctr">
             <a:spAutoFit/>
           </a:bodyPr>
@@ -8780,7 +9653,7 @@
           </a:prstGeom>
           <a:noFill/>
         </p:spPr>
-        <p:txBody insetl="0" insertr="0" insett="0" insetb="0">
+        <p:txBody>
           <a:bodyPr wrap="square" anchor="ctr">
             <a:spAutoFit/>
           </a:bodyPr>
@@ -8836,8 +9709,8 @@
         </p:nvSpPr>
         <p:spPr>
           <a:xfrm>
-            <a:off x="228600" y="2157984"/>
-            <a:ext cx="8686800" cy="1280160"/>
+            <a:off x="228600" y="2210120"/>
+            <a:ext cx="8686800" cy="853921"/>
           </a:xfrm>
           <a:prstGeom prst="rect">
             <a:avLst/>
@@ -8870,6 +9743,7 @@
           <a:lstStyle/>
           <a:p>
             <a:pPr algn="ctr"/>
+            <a:endParaRPr/>
           </a:p>
         </p:txBody>
       </p:sp>
@@ -8913,6 +9787,7 @@
           <a:lstStyle/>
           <a:p>
             <a:pPr algn="ctr"/>
+            <a:endParaRPr/>
           </a:p>
         </p:txBody>
       </p:sp>
@@ -8932,7 +9807,7 @@
           </a:prstGeom>
           <a:noFill/>
         </p:spPr>
-        <p:txBody insetl="0" insertr="0" insett="0" insetb="0">
+        <p:txBody>
           <a:bodyPr wrap="square" anchor="ctr">
             <a:spAutoFit/>
           </a:bodyPr>
@@ -8959,15 +9834,15 @@
         </p:nvSpPr>
         <p:spPr>
           <a:xfrm>
-            <a:off x="338328" y="2505456"/>
-            <a:ext cx="8467344" cy="914399"/>
+            <a:off x="320040" y="2637080"/>
+            <a:ext cx="8467344" cy="269304"/>
           </a:xfrm>
           <a:prstGeom prst="rect">
             <a:avLst/>
           </a:prstGeom>
           <a:noFill/>
         </p:spPr>
-        <p:txBody insetl="0" insertr="0" insett="0" insetb="0">
+        <p:txBody>
           <a:bodyPr wrap="square" anchor="ctr">
             <a:spAutoFit/>
           </a:bodyPr>
@@ -8979,36 +9854,22 @@
               </a:spcAft>
             </a:pPr>
             <a:r>
-              <a:rPr sz="1150" b="0" i="0">
-                <a:solidFill>
-                  <a:srgbClr val="263238"/>
-                </a:solidFill>
-                <a:latin typeface="Meiryo"/>
-              </a:rPr>
-              <a:t>「リソース表示」ボタンクリック後に画面上部に担当者フィルターが表示されます</a:t>
-            </a:r>
-          </a:p>
-          <a:p>
-            <a:pPr algn="l">
-              <a:spcAft>
-                <a:spcPts val="200"/>
-              </a:spcAft>
-            </a:pPr>
-            <a:r>
-              <a:rPr sz="1150" b="1" i="0">
-                <a:solidFill>
-                  <a:srgbClr val="263238"/>
-                </a:solidFill>
-                <a:latin typeface="Meiryo"/>
+              <a:rPr lang="ja-JP" altLang="en-US" sz="1150" b="1" i="0" dirty="0">
+                <a:solidFill>
+                  <a:srgbClr val="263238"/>
+                </a:solidFill>
+                <a:latin typeface="メイリオ" panose="020B0604030504040204" pitchFamily="50" charset="-128"/>
+                <a:ea typeface="メイリオ" panose="020B0604030504040204" pitchFamily="50" charset="-128"/>
               </a:rPr>
               <a:t>特定の担当者のタスクだけを絞り込めます</a:t>
             </a:r>
             <a:r>
-              <a:rPr sz="1150" b="0" i="0">
-                <a:solidFill>
-                  <a:srgbClr val="263238"/>
-                </a:solidFill>
-                <a:latin typeface="Meiryo"/>
+              <a:rPr lang="ja-JP" altLang="en-US" sz="1150" b="0" i="0" dirty="0">
+                <a:solidFill>
+                  <a:srgbClr val="263238"/>
+                </a:solidFill>
+                <a:latin typeface="メイリオ" panose="020B0604030504040204" pitchFamily="50" charset="-128"/>
+                <a:ea typeface="メイリオ" panose="020B0604030504040204" pitchFamily="50" charset="-128"/>
               </a:rPr>
               <a:t>（複数選択可）</a:t>
             </a:r>
@@ -9023,7 +9884,7 @@
         </p:nvSpPr>
         <p:spPr>
           <a:xfrm>
-            <a:off x="228600" y="3566160"/>
+            <a:off x="228600" y="3204972"/>
             <a:ext cx="8686800" cy="1554480"/>
           </a:xfrm>
           <a:prstGeom prst="rect">
@@ -9057,6 +9918,7 @@
           <a:lstStyle/>
           <a:p>
             <a:pPr algn="ctr"/>
+            <a:endParaRPr/>
           </a:p>
         </p:txBody>
       </p:sp>
@@ -9068,7 +9930,7 @@
         </p:nvSpPr>
         <p:spPr>
           <a:xfrm>
-            <a:off x="228600" y="3566160"/>
+            <a:off x="228600" y="3214116"/>
             <a:ext cx="8686800" cy="292608"/>
           </a:xfrm>
           <a:prstGeom prst="rect">
@@ -9100,6 +9962,7 @@
           <a:lstStyle/>
           <a:p>
             <a:pPr algn="ctr"/>
+            <a:endParaRPr/>
           </a:p>
         </p:txBody>
       </p:sp>
@@ -9111,15 +9974,15 @@
         </p:nvSpPr>
         <p:spPr>
           <a:xfrm>
-            <a:off x="338328" y="3566160"/>
-            <a:ext cx="8467344" cy="292608"/>
+            <a:off x="228600" y="3239117"/>
+            <a:ext cx="8467344" cy="261610"/>
           </a:xfrm>
           <a:prstGeom prst="rect">
             <a:avLst/>
           </a:prstGeom>
           <a:noFill/>
         </p:spPr>
-        <p:txBody insetl="0" insertr="0" insett="0" insetb="0">
+        <p:txBody>
           <a:bodyPr wrap="square" anchor="ctr">
             <a:spAutoFit/>
           </a:bodyPr>
@@ -9127,13 +9990,22 @@
           <a:p>
             <a:pPr algn="l"/>
             <a:r>
-              <a:rPr sz="1100" b="1" i="0">
+              <a:rPr sz="1100" b="1" i="0" dirty="0" err="1">
                 <a:solidFill>
                   <a:srgbClr val="FFFFFF"/>
                 </a:solidFill>
                 <a:latin typeface="Meiryo"/>
               </a:rPr>
-              <a:t>進捗の視覚的確認（進捗列）</a:t>
+              <a:t>進捗の視覚的確認（進捗列</a:t>
+            </a:r>
+            <a:r>
+              <a:rPr sz="1100" b="1" i="0" dirty="0">
+                <a:solidFill>
+                  <a:srgbClr val="FFFFFF"/>
+                </a:solidFill>
+                <a:latin typeface="Meiryo"/>
+              </a:rPr>
+              <a:t>）</a:t>
             </a:r>
           </a:p>
         </p:txBody>
@@ -9146,7 +10018,7 @@
         </p:nvSpPr>
         <p:spPr>
           <a:xfrm>
-            <a:off x="338328" y="3913631"/>
+            <a:off x="320040" y="3537044"/>
             <a:ext cx="8467344" cy="1188719"/>
           </a:xfrm>
           <a:prstGeom prst="rect">
@@ -9154,7 +10026,7 @@
           </a:prstGeom>
           <a:noFill/>
         </p:spPr>
-        <p:txBody insetl="0" insertr="0" insett="0" insetb="0">
+        <p:txBody>
           <a:bodyPr wrap="square" anchor="ctr">
             <a:spAutoFit/>
           </a:bodyPr>
@@ -9166,14 +10038,74 @@
               </a:spcAft>
             </a:pPr>
             <a:r>
-              <a:rPr sz="1150" b="0" i="0">
-                <a:solidFill>
-                  <a:srgbClr val="263238"/>
-                </a:solidFill>
-                <a:latin typeface="Meiryo"/>
-              </a:rPr>
-              <a:t>進捗率 ＝ 完了枚数 ÷ 総枚数（%）で自動計算・表示されます</a:t>
-            </a:r>
+              <a:rPr sz="1150" b="0" i="0" dirty="0" err="1">
+                <a:solidFill>
+                  <a:srgbClr val="263238"/>
+                </a:solidFill>
+                <a:latin typeface="Meiryo"/>
+              </a:rPr>
+              <a:t>進捗率</a:t>
+            </a:r>
+            <a:r>
+              <a:rPr sz="1150" b="0" i="0" dirty="0">
+                <a:solidFill>
+                  <a:srgbClr val="263238"/>
+                </a:solidFill>
+                <a:latin typeface="Meiryo"/>
+              </a:rPr>
+              <a:t> ＝ </a:t>
+            </a:r>
+            <a:r>
+              <a:rPr sz="1150" b="0" i="0" dirty="0" err="1">
+                <a:solidFill>
+                  <a:srgbClr val="263238"/>
+                </a:solidFill>
+                <a:latin typeface="Meiryo"/>
+              </a:rPr>
+              <a:t>完了枚数</a:t>
+            </a:r>
+            <a:r>
+              <a:rPr sz="1150" b="0" i="0" dirty="0">
+                <a:solidFill>
+                  <a:srgbClr val="263238"/>
+                </a:solidFill>
+                <a:latin typeface="Meiryo"/>
+              </a:rPr>
+              <a:t> ÷ </a:t>
+            </a:r>
+            <a:r>
+              <a:rPr sz="1150" b="0" i="0" dirty="0" err="1">
+                <a:solidFill>
+                  <a:srgbClr val="263238"/>
+                </a:solidFill>
+                <a:latin typeface="Meiryo"/>
+              </a:rPr>
+              <a:t>総枚数</a:t>
+            </a:r>
+            <a:r>
+              <a:rPr sz="1150" b="0" i="0" dirty="0">
+                <a:solidFill>
+                  <a:srgbClr val="263238"/>
+                </a:solidFill>
+                <a:latin typeface="Meiryo"/>
+              </a:rPr>
+              <a:t>（%）</a:t>
+            </a:r>
+            <a:r>
+              <a:rPr sz="1150" b="0" i="0" dirty="0" err="1">
+                <a:solidFill>
+                  <a:srgbClr val="263238"/>
+                </a:solidFill>
+                <a:latin typeface="Meiryo"/>
+              </a:rPr>
+              <a:t>で自動計算・表示されます</a:t>
+            </a:r>
+            <a:endParaRPr sz="1150" b="0" i="0" dirty="0">
+              <a:solidFill>
+                <a:srgbClr val="263238"/>
+              </a:solidFill>
+              <a:latin typeface="Meiryo"/>
+            </a:endParaRPr>
           </a:p>
           <a:p>
             <a:pPr algn="l">
@@ -9182,23 +10114,47 @@
               </a:spcAft>
             </a:pPr>
             <a:r>
-              <a:rPr sz="1150" b="1" i="0">
+              <a:rPr sz="1150" b="1" i="0" dirty="0" err="1">
                 <a:solidFill>
                   <a:srgbClr val="F57F17"/>
                 </a:solidFill>
                 <a:latin typeface="Meiryo"/>
               </a:rPr>
-              <a:t>黄色のバー</a:t>
-            </a:r>
-            <a:r>
-              <a:rPr sz="1150" b="0" i="0">
-                <a:solidFill>
-                  <a:srgbClr val="263238"/>
-                </a:solidFill>
-                <a:latin typeface="Meiryo"/>
-              </a:rPr>
-              <a:t>　：通常の進捗状況</a:t>
-            </a:r>
+              <a:t>黄色のバ</a:t>
+            </a:r>
+            <a:r>
+              <a:rPr sz="1150" b="1" i="0" dirty="0">
+                <a:solidFill>
+                  <a:srgbClr val="F57F17"/>
+                </a:solidFill>
+                <a:latin typeface="Meiryo"/>
+              </a:rPr>
+              <a:t>ー</a:t>
+            </a:r>
+            <a:r>
+              <a:rPr sz="1150" b="0" i="0" dirty="0">
+                <a:solidFill>
+                  <a:srgbClr val="263238"/>
+                </a:solidFill>
+                <a:latin typeface="Meiryo"/>
+              </a:rPr>
+              <a:t>　：</a:t>
+            </a:r>
+            <a:r>
+              <a:rPr sz="1150" b="0" i="0" dirty="0" err="1">
+                <a:solidFill>
+                  <a:srgbClr val="263238"/>
+                </a:solidFill>
+                <a:latin typeface="Meiryo"/>
+              </a:rPr>
+              <a:t>通常の進捗状況</a:t>
+            </a:r>
+            <a:endParaRPr sz="1150" b="0" i="0" dirty="0">
+              <a:solidFill>
+                <a:srgbClr val="263238"/>
+              </a:solidFill>
+              <a:latin typeface="Meiryo"/>
+            </a:endParaRPr>
           </a:p>
           <a:p>
             <a:pPr algn="l">
@@ -9207,16 +10163,43 @@
               </a:spcAft>
             </a:pPr>
             <a:r>
-              <a:rPr sz="1150" b="1" i="0">
+              <a:rPr sz="1150" b="1" i="0" dirty="0" err="1">
                 <a:solidFill>
                   <a:srgbClr val="E53935"/>
                 </a:solidFill>
                 <a:latin typeface="Meiryo"/>
               </a:rPr>
-              <a:t>赤いバー（遅延アラート）</a:t>
-            </a:r>
-            <a:r>
-              <a:rPr sz="1150" b="0" i="0">
+              <a:t>赤いバ</a:t>
+            </a:r>
+            <a:r>
+              <a:rPr sz="1150" b="1" i="0" dirty="0">
+                <a:solidFill>
+                  <a:srgbClr val="E53935"/>
+                </a:solidFill>
+                <a:latin typeface="Meiryo"/>
+              </a:rPr>
+              <a:t>ー（</a:t>
+            </a:r>
+            <a:r>
+              <a:rPr sz="1150" b="1" i="0" dirty="0" err="1">
+                <a:solidFill>
+                  <a:srgbClr val="E53935"/>
+                </a:solidFill>
+                <a:latin typeface="Meiryo"/>
+              </a:rPr>
+              <a:t>遅延アラート</a:t>
+            </a:r>
+            <a:r>
+              <a:rPr sz="1150" b="1" i="0" dirty="0">
+                <a:solidFill>
+                  <a:srgbClr val="E53935"/>
+                </a:solidFill>
+                <a:latin typeface="Meiryo"/>
+              </a:rPr>
+              <a:t>）</a:t>
+            </a:r>
+            <a:r>
+              <a:rPr sz="1150" b="0" i="0" dirty="0">
                 <a:solidFill>
                   <a:srgbClr val="263238"/>
                 </a:solidFill>
@@ -9236,7 +10219,7 @@
 </file>
 
 <file path=ppt/slides/slide7.xml><?xml version="1.0" encoding="utf-8"?>
-<p:sld xmlns:a="http://schemas.openxmlformats.org/drawingml/2006/main" xmlns:p="http://schemas.openxmlformats.org/presentationml/2006/main" xmlns:r="http://schemas.openxmlformats.org/officeDocument/2006/relationships">
+<p:sld xmlns:a="http://schemas.openxmlformats.org/drawingml/2006/main" xmlns:r="http://schemas.openxmlformats.org/officeDocument/2006/relationships" xmlns:p="http://schemas.openxmlformats.org/presentationml/2006/main">
   <p:cSld>
     <p:bg>
       <p:bgPr>
@@ -9252,7 +10235,14 @@
         <p:cNvGrpSpPr/>
         <p:nvPr/>
       </p:nvGrpSpPr>
-      <p:grpSpPr/>
+      <p:grpSpPr>
+        <a:xfrm>
+          <a:off x="0" y="0"/>
+          <a:ext cx="0" cy="0"/>
+          <a:chOff x="0" y="0"/>
+          <a:chExt cx="0" cy="0"/>
+        </a:xfrm>
+      </p:grpSpPr>
       <p:sp>
         <p:nvSpPr>
           <p:cNvPr id="2" name="Rectangle 1"/>
@@ -9293,6 +10283,7 @@
           <a:lstStyle/>
           <a:p>
             <a:pPr algn="ctr"/>
+            <a:endParaRPr/>
           </a:p>
         </p:txBody>
       </p:sp>
@@ -9312,7 +10303,7 @@
           </a:prstGeom>
           <a:noFill/>
         </p:spPr>
-        <p:txBody insetl="0" insertr="0" insett="0" insetb="0">
+        <p:txBody>
           <a:bodyPr wrap="square" anchor="ctr">
             <a:spAutoFit/>
           </a:bodyPr>
@@ -9371,6 +10362,7 @@
           <a:lstStyle/>
           <a:p>
             <a:pPr algn="ctr"/>
+            <a:endParaRPr/>
           </a:p>
         </p:txBody>
       </p:sp>
@@ -9390,7 +10382,7 @@
           </a:prstGeom>
           <a:noFill/>
         </p:spPr>
-        <p:txBody insetl="0" insertr="0" insett="0" insetb="0">
+        <p:txBody>
           <a:bodyPr wrap="square" anchor="t">
             <a:spAutoFit/>
           </a:bodyPr>
@@ -9451,6 +10443,7 @@
           <a:lstStyle/>
           <a:p>
             <a:pPr algn="ctr"/>
+            <a:endParaRPr/>
           </a:p>
         </p:txBody>
       </p:sp>
@@ -9494,6 +10487,7 @@
           <a:lstStyle/>
           <a:p>
             <a:pPr algn="ctr"/>
+            <a:endParaRPr/>
           </a:p>
         </p:txBody>
       </p:sp>
@@ -9513,7 +10507,7 @@
           </a:prstGeom>
           <a:noFill/>
         </p:spPr>
-        <p:txBody insetl="0" insertr="0" insett="0" insetb="0">
+        <p:txBody>
           <a:bodyPr wrap="square" anchor="ctr">
             <a:spAutoFit/>
           </a:bodyPr>
@@ -9548,7 +10542,7 @@
           </a:prstGeom>
           <a:noFill/>
         </p:spPr>
-        <p:txBody insetl="0" insertr="0" insett="0" insetb="0">
+        <p:txBody>
           <a:bodyPr wrap="square" anchor="ctr">
             <a:spAutoFit/>
           </a:bodyPr>
@@ -9659,6 +10653,7 @@
           <a:lstStyle/>
           <a:p>
             <a:pPr algn="ctr"/>
+            <a:endParaRPr/>
           </a:p>
         </p:txBody>
       </p:sp>
@@ -9702,6 +10697,7 @@
           <a:lstStyle/>
           <a:p>
             <a:pPr algn="ctr"/>
+            <a:endParaRPr/>
           </a:p>
         </p:txBody>
       </p:sp>
@@ -9721,7 +10717,7 @@
           </a:prstGeom>
           <a:noFill/>
         </p:spPr>
-        <p:txBody insetl="0" insertr="0" insett="0" insetb="0">
+        <p:txBody>
           <a:bodyPr wrap="square" anchor="ctr">
             <a:spAutoFit/>
           </a:bodyPr>
@@ -9748,15 +10744,15 @@
         </p:nvSpPr>
         <p:spPr>
           <a:xfrm>
-            <a:off x="338328" y="2606040"/>
-            <a:ext cx="3941063" cy="2121408"/>
+            <a:off x="320040" y="2794522"/>
+            <a:ext cx="3941063" cy="1569660"/>
           </a:xfrm>
           <a:prstGeom prst="rect">
             <a:avLst/>
           </a:prstGeom>
           <a:noFill/>
         </p:spPr>
-        <p:txBody insetl="0" insertr="0" insett="0" insetb="0">
+        <p:txBody>
           <a:bodyPr wrap="square" anchor="t">
             <a:spAutoFit/>
           </a:bodyPr>
@@ -9768,7 +10764,7 @@
               </a:spcAft>
             </a:pPr>
             <a:r>
-              <a:rPr sz="1100" b="0" i="0">
+              <a:rPr sz="1100" b="0" i="0" dirty="0" err="1">
                 <a:solidFill>
                   <a:srgbClr val="263238"/>
                 </a:solidFill>
@@ -9776,6 +10772,12 @@
               </a:rPr>
               <a:t>各担当者の行にタスクのバーが時系列で表示されます</a:t>
             </a:r>
+            <a:endParaRPr lang="en-US" sz="1100" b="0" i="0" dirty="0">
+              <a:solidFill>
+                <a:srgbClr val="263238"/>
+              </a:solidFill>
+              <a:latin typeface="Meiryo"/>
+            </a:endParaRPr>
           </a:p>
           <a:p>
             <a:pPr algn="l">
@@ -9783,87 +10785,12 @@
                 <a:spcPts val="200"/>
               </a:spcAft>
             </a:pPr>
-            <a:r>
-              <a:rPr sz="1100" b="0" i="0">
-                <a:solidFill>
-                  <a:srgbClr val="263238"/>
-                </a:solidFill>
-                <a:latin typeface="Meiryo"/>
-              </a:rPr>
-              <a:t>バーの色は担当者ごとに固定されています：</a:t>
-            </a:r>
-            <a:r>
-              <a:rPr sz="1100" b="1" i="0">
-                <a:solidFill>
-                  <a:srgbClr val="E74C3C"/>
-                </a:solidFill>
-                <a:latin typeface="Meiryo"/>
-              </a:rPr>
-              <a:t>  藤山</a:t>
-            </a:r>
-            <a:r>
-              <a:rPr sz="1100" b="0" i="0">
-                <a:solidFill>
-                  <a:srgbClr val="263238"/>
-                </a:solidFill>
-                <a:latin typeface="Meiryo"/>
-              </a:rPr>
-              <a:t>（赤）  </a:t>
-            </a:r>
-            <a:r>
-              <a:rPr sz="1100" b="1" i="0">
-                <a:solidFill>
-                  <a:srgbClr val="3498DB"/>
-                </a:solidFill>
-                <a:latin typeface="Meiryo"/>
-              </a:rPr>
-              <a:t>田中(善)</a:t>
-            </a:r>
-            <a:r>
-              <a:rPr sz="1100" b="0" i="0">
-                <a:solidFill>
-                  <a:srgbClr val="263238"/>
-                </a:solidFill>
-                <a:latin typeface="Meiryo"/>
-              </a:rPr>
-              <a:t>（青）  </a:t>
-            </a:r>
-            <a:r>
-              <a:rPr sz="1100" b="1" i="0">
-                <a:solidFill>
-                  <a:srgbClr val="2ECC71"/>
-                </a:solidFill>
-                <a:latin typeface="Meiryo"/>
-              </a:rPr>
-              <a:t>安岡</a:t>
-            </a:r>
-            <a:r>
-              <a:rPr sz="1100" b="0" i="0">
-                <a:solidFill>
-                  <a:srgbClr val="263238"/>
-                </a:solidFill>
-                <a:latin typeface="Meiryo"/>
-              </a:rPr>
-              <a:t>（緑）  </a:t>
-            </a:r>
-            <a:r>
-              <a:rPr sz="1100" b="1" i="0">
-                <a:solidFill>
-                  <a:srgbClr val="F39C12"/>
-                </a:solidFill>
-                <a:latin typeface="Meiryo"/>
-              </a:rPr>
-              <a:t>川邊</a:t>
-            </a:r>
-            <a:r>
-              <a:rPr sz="1100" b="0" i="0">
-                <a:solidFill>
-                  <a:srgbClr val="263238"/>
-                </a:solidFill>
-                <a:latin typeface="Meiryo"/>
-              </a:rPr>
-              <a:t>（橙）  等</a:t>
-            </a:r>
+            <a:endParaRPr sz="1100" b="0" i="0" dirty="0">
+              <a:solidFill>
+                <a:srgbClr val="263238"/>
+              </a:solidFill>
+              <a:latin typeface="Meiryo"/>
+            </a:endParaRPr>
           </a:p>
           <a:p>
             <a:pPr algn="l">
@@ -9872,7 +10799,163 @@
               </a:spcAft>
             </a:pPr>
             <a:r>
-              <a:rPr sz="1100" b="1" i="0">
+              <a:rPr sz="1100" b="0" i="0" dirty="0" err="1">
+                <a:solidFill>
+                  <a:srgbClr val="263238"/>
+                </a:solidFill>
+                <a:latin typeface="Meiryo"/>
+              </a:rPr>
+              <a:t>バーの色は担当者ごとに固定されています</a:t>
+            </a:r>
+            <a:endParaRPr lang="en-US" sz="1100" b="1" i="0" dirty="0">
+              <a:solidFill>
+                <a:srgbClr val="E74C3C"/>
+              </a:solidFill>
+              <a:latin typeface="Meiryo"/>
+            </a:endParaRPr>
+          </a:p>
+          <a:p>
+            <a:pPr algn="l">
+              <a:spcAft>
+                <a:spcPts val="200"/>
+              </a:spcAft>
+            </a:pPr>
+            <a:r>
+              <a:rPr sz="1100" b="1" i="0" dirty="0" err="1">
+                <a:solidFill>
+                  <a:srgbClr val="E74C3C"/>
+                </a:solidFill>
+                <a:latin typeface="Meiryo"/>
+              </a:rPr>
+              <a:t>藤山</a:t>
+            </a:r>
+            <a:r>
+              <a:rPr sz="1100" b="0" i="0" dirty="0" err="1">
+                <a:solidFill>
+                  <a:srgbClr val="263238"/>
+                </a:solidFill>
+                <a:latin typeface="Meiryo"/>
+              </a:rPr>
+              <a:t>（赤</a:t>
+            </a:r>
+            <a:r>
+              <a:rPr sz="1100" b="0" i="0" dirty="0">
+                <a:solidFill>
+                  <a:srgbClr val="263238"/>
+                </a:solidFill>
+                <a:latin typeface="Meiryo"/>
+              </a:rPr>
+              <a:t>）  </a:t>
+            </a:r>
+            <a:r>
+              <a:rPr sz="1100" b="1" i="0" dirty="0" err="1">
+                <a:solidFill>
+                  <a:srgbClr val="3498DB"/>
+                </a:solidFill>
+                <a:latin typeface="Meiryo"/>
+              </a:rPr>
+              <a:t>田中</a:t>
+            </a:r>
+            <a:r>
+              <a:rPr sz="1100" b="1" i="0" dirty="0">
+                <a:solidFill>
+                  <a:srgbClr val="3498DB"/>
+                </a:solidFill>
+                <a:latin typeface="Meiryo"/>
+              </a:rPr>
+              <a:t>(善)</a:t>
+            </a:r>
+            <a:r>
+              <a:rPr sz="1100" b="0" i="0" dirty="0">
+                <a:solidFill>
+                  <a:srgbClr val="263238"/>
+                </a:solidFill>
+                <a:latin typeface="Meiryo"/>
+              </a:rPr>
+              <a:t>（青）  </a:t>
+            </a:r>
+            <a:r>
+              <a:rPr sz="1100" b="1" i="0" dirty="0" err="1">
+                <a:solidFill>
+                  <a:srgbClr val="2ECC71"/>
+                </a:solidFill>
+                <a:latin typeface="Meiryo"/>
+              </a:rPr>
+              <a:t>安岡</a:t>
+            </a:r>
+            <a:r>
+              <a:rPr sz="1100" b="0" i="0" dirty="0" err="1">
+                <a:solidFill>
+                  <a:srgbClr val="263238"/>
+                </a:solidFill>
+                <a:latin typeface="Meiryo"/>
+              </a:rPr>
+              <a:t>（緑</a:t>
+            </a:r>
+            <a:r>
+              <a:rPr sz="1100" b="0" i="0" dirty="0">
+                <a:solidFill>
+                  <a:srgbClr val="263238"/>
+                </a:solidFill>
+                <a:latin typeface="Meiryo"/>
+              </a:rPr>
+              <a:t>）  </a:t>
+            </a:r>
+            <a:r>
+              <a:rPr sz="1100" b="1" i="0" dirty="0" err="1">
+                <a:solidFill>
+                  <a:srgbClr val="F39C12"/>
+                </a:solidFill>
+                <a:latin typeface="Meiryo"/>
+              </a:rPr>
+              <a:t>川邊</a:t>
+            </a:r>
+            <a:r>
+              <a:rPr sz="1100" b="0" i="0" dirty="0" err="1">
+                <a:solidFill>
+                  <a:srgbClr val="263238"/>
+                </a:solidFill>
+                <a:latin typeface="Meiryo"/>
+              </a:rPr>
+              <a:t>（橙</a:t>
+            </a:r>
+            <a:r>
+              <a:rPr sz="1100" b="0" i="0" dirty="0">
+                <a:solidFill>
+                  <a:srgbClr val="263238"/>
+                </a:solidFill>
+                <a:latin typeface="Meiryo"/>
+              </a:rPr>
+              <a:t>）  等</a:t>
+            </a:r>
+            <a:endParaRPr lang="en-US" sz="1100" b="0" i="0" dirty="0">
+              <a:solidFill>
+                <a:srgbClr val="263238"/>
+              </a:solidFill>
+              <a:latin typeface="Meiryo"/>
+            </a:endParaRPr>
+          </a:p>
+          <a:p>
+            <a:pPr algn="l">
+              <a:spcAft>
+                <a:spcPts val="200"/>
+              </a:spcAft>
+            </a:pPr>
+            <a:endParaRPr sz="1100" b="0" i="0" dirty="0">
+              <a:solidFill>
+                <a:srgbClr val="263238"/>
+              </a:solidFill>
+              <a:latin typeface="Meiryo"/>
+            </a:endParaRPr>
+          </a:p>
+          <a:p>
+            <a:pPr algn="l">
+              <a:spcAft>
+                <a:spcPts val="200"/>
+              </a:spcAft>
+            </a:pPr>
+            <a:r>
+              <a:rPr sz="1100" b="1" i="0" dirty="0" err="1">
                 <a:solidFill>
                   <a:srgbClr val="263238"/>
                 </a:solidFill>
@@ -9881,14 +10964,29 @@
               <a:t>担当者名をクリック</a:t>
             </a:r>
             <a:r>
-              <a:rPr sz="1100" b="0" i="0">
-                <a:solidFill>
-                  <a:srgbClr val="263238"/>
-                </a:solidFill>
-                <a:latin typeface="Meiryo"/>
-              </a:rPr>
-              <a:t> → その担当者の詳細ビューに切替</a:t>
-            </a:r>
+              <a:rPr sz="1100" b="0" i="0" dirty="0">
+                <a:solidFill>
+                  <a:srgbClr val="263238"/>
+                </a:solidFill>
+                <a:latin typeface="Meiryo"/>
+              </a:rPr>
+              <a:t> → </a:t>
+            </a:r>
+            <a:r>
+              <a:rPr sz="1100" b="0" i="0" dirty="0" err="1">
+                <a:solidFill>
+                  <a:srgbClr val="263238"/>
+                </a:solidFill>
+                <a:latin typeface="Meiryo"/>
+              </a:rPr>
+              <a:t>その担当者の詳細ビューに切替</a:t>
+            </a:r>
+            <a:endParaRPr sz="1100" b="0" i="0" dirty="0">
+              <a:solidFill>
+                <a:srgbClr val="263238"/>
+              </a:solidFill>
+              <a:latin typeface="Meiryo"/>
+            </a:endParaRPr>
           </a:p>
           <a:p>
             <a:pPr algn="l">
@@ -9897,10 +10995,10 @@
               </a:spcAft>
             </a:pPr>
             <a:br>
-              <a:rPr lang="ja-JP" sz="1000"/>
+              <a:rPr lang="ja-JP" sz="1000" dirty="0"/>
             </a:br>
             <a:r>
-              <a:rPr sz="1000" b="0" i="1">
+              <a:rPr sz="1000" b="0" i="1" dirty="0" err="1">
                 <a:solidFill>
                   <a:srgbClr val="90A4AE"/>
                 </a:solidFill>
@@ -9908,6 +11006,12 @@
               </a:rPr>
               <a:t>スクロールはガントチャートとリソースパネルが連動します</a:t>
             </a:r>
+            <a:endParaRPr sz="1000" b="0" i="1" dirty="0">
+              <a:solidFill>
+                <a:srgbClr val="90A4AE"/>
+              </a:solidFill>
+              <a:latin typeface="Meiryo"/>
+            </a:endParaRPr>
           </a:p>
         </p:txBody>
       </p:sp>
@@ -9953,6 +11057,7 @@
           <a:lstStyle/>
           <a:p>
             <a:pPr algn="ctr"/>
+            <a:endParaRPr/>
           </a:p>
         </p:txBody>
       </p:sp>
@@ -9996,6 +11101,7 @@
           <a:lstStyle/>
           <a:p>
             <a:pPr algn="ctr"/>
+            <a:endParaRPr/>
           </a:p>
         </p:txBody>
       </p:sp>
@@ -10015,7 +11121,7 @@
           </a:prstGeom>
           <a:noFill/>
         </p:spPr>
-        <p:txBody insetl="0" insertr="0" insett="0" insetb="0">
+        <p:txBody>
           <a:bodyPr wrap="square" anchor="ctr">
             <a:spAutoFit/>
           </a:bodyPr>
@@ -10050,7 +11156,7 @@
           </a:prstGeom>
           <a:noFill/>
         </p:spPr>
-        <p:txBody insetl="0" insertr="0" insett="0" insetb="0">
+        <p:txBody>
           <a:bodyPr wrap="square" anchor="ctr">
             <a:spAutoFit/>
           </a:bodyPr>
@@ -10155,6 +11261,7 @@
           <a:lstStyle/>
           <a:p>
             <a:pPr algn="ctr"/>
+            <a:endParaRPr/>
           </a:p>
         </p:txBody>
       </p:sp>
@@ -10198,6 +11305,7 @@
           <a:lstStyle/>
           <a:p>
             <a:pPr algn="ctr"/>
+            <a:endParaRPr/>
           </a:p>
         </p:txBody>
       </p:sp>
@@ -10217,7 +11325,7 @@
           </a:prstGeom>
           <a:noFill/>
         </p:spPr>
-        <p:txBody insetl="0" insertr="0" insett="0" insetb="0">
+        <p:txBody>
           <a:bodyPr wrap="square" anchor="ctr">
             <a:spAutoFit/>
           </a:bodyPr>
@@ -10245,14 +11353,14 @@
         <p:spPr>
           <a:xfrm>
             <a:off x="4864608" y="2606040"/>
-            <a:ext cx="3941063" cy="1207007"/>
+            <a:ext cx="3941063" cy="1097736"/>
           </a:xfrm>
           <a:prstGeom prst="rect">
             <a:avLst/>
           </a:prstGeom>
           <a:noFill/>
         </p:spPr>
-        <p:txBody insetl="0" insertr="0" insett="0" insetb="0">
+        <p:txBody>
           <a:bodyPr wrap="square" anchor="t">
             <a:spAutoFit/>
           </a:bodyPr>
@@ -10264,14 +11372,38 @@
               </a:spcAft>
             </a:pPr>
             <a:r>
-              <a:rPr sz="1050" b="1" i="0">
+              <a:rPr sz="1050" b="1" i="0" dirty="0">
                 <a:solidFill>
                   <a:srgbClr val="80CBC4"/>
                 </a:solidFill>
                 <a:latin typeface="Meiryo"/>
               </a:rPr>
-              <a:t>【並列パネルを閉じる場合】</a:t>
-            </a:r>
+              <a:t>【</a:t>
+            </a:r>
+            <a:r>
+              <a:rPr sz="1050" b="1" i="0" dirty="0" err="1">
+                <a:solidFill>
+                  <a:srgbClr val="80CBC4"/>
+                </a:solidFill>
+                <a:latin typeface="Meiryo"/>
+              </a:rPr>
+              <a:t>並列パネルを閉じる場合</a:t>
+            </a:r>
+            <a:r>
+              <a:rPr sz="1050" b="1" i="0" dirty="0">
+                <a:solidFill>
+                  <a:srgbClr val="80CBC4"/>
+                </a:solidFill>
+                <a:latin typeface="Meiryo"/>
+              </a:rPr>
+              <a:t>】</a:t>
+            </a:r>
+            <a:endParaRPr sz="1050" b="0" i="0" dirty="0">
+              <a:solidFill>
+                <a:srgbClr val="263238"/>
+              </a:solidFill>
+              <a:latin typeface="Meiryo"/>
+            </a:endParaRPr>
           </a:p>
           <a:p>
             <a:pPr algn="l">
@@ -10280,23 +11412,78 @@
               </a:spcAft>
             </a:pPr>
             <a:r>
-              <a:rPr sz="1050" b="1" i="0">
+              <a:rPr sz="1050" b="1" i="0" dirty="0">
                 <a:solidFill>
                   <a:srgbClr val="546E7A"/>
                 </a:solidFill>
-                <a:latin typeface="Meiryo"/>
-              </a:rPr>
-              <a:t>「×」ボタン</a:t>
-            </a:r>
-            <a:r>
-              <a:rPr sz="1050" b="0" i="0">
-                <a:solidFill>
-                  <a:srgbClr val="263238"/>
-                </a:solidFill>
-                <a:latin typeface="Meiryo"/>
-              </a:rPr>
-              <a:t>　：リソースパネルを閉じる</a:t>
-            </a:r>
+                <a:latin typeface="メイリオ" panose="020B0604030504040204" pitchFamily="50" charset="-128"/>
+                <a:ea typeface="メイリオ" panose="020B0604030504040204" pitchFamily="50" charset="-128"/>
+              </a:rPr>
+              <a:t>「</a:t>
+            </a:r>
+            <a:r>
+              <a:rPr lang="ja-JP" altLang="en-US" sz="1050" b="1" dirty="0">
+                <a:solidFill>
+                  <a:srgbClr val="546E7A"/>
+                </a:solidFill>
+                <a:latin typeface="メイリオ" panose="020B0604030504040204" pitchFamily="50" charset="-128"/>
+                <a:ea typeface="メイリオ" panose="020B0604030504040204" pitchFamily="50" charset="-128"/>
+              </a:rPr>
+              <a:t>リソース表示中</a:t>
+            </a:r>
+            <a:r>
+              <a:rPr lang="en-US" altLang="ja-JP" sz="1050" b="1" dirty="0">
+                <a:solidFill>
+                  <a:srgbClr val="546E7A"/>
+                </a:solidFill>
+                <a:latin typeface="メイリオ" panose="020B0604030504040204" pitchFamily="50" charset="-128"/>
+                <a:ea typeface="メイリオ" panose="020B0604030504040204" pitchFamily="50" charset="-128"/>
+              </a:rPr>
+              <a:t>×</a:t>
+            </a:r>
+            <a:r>
+              <a:rPr sz="1050" b="1" i="0" dirty="0">
+                <a:solidFill>
+                  <a:srgbClr val="546E7A"/>
+                </a:solidFill>
+                <a:latin typeface="メイリオ" panose="020B0604030504040204" pitchFamily="50" charset="-128"/>
+                <a:ea typeface="メイリオ" panose="020B0604030504040204" pitchFamily="50" charset="-128"/>
+              </a:rPr>
+              <a:t>」</a:t>
+            </a:r>
+            <a:r>
+              <a:rPr sz="1050" b="1" i="0" dirty="0" err="1">
+                <a:solidFill>
+                  <a:srgbClr val="546E7A"/>
+                </a:solidFill>
+                <a:latin typeface="Meiryo"/>
+              </a:rPr>
+              <a:t>ボタン</a:t>
+            </a:r>
+            <a:r>
+              <a:rPr sz="1050" b="0" i="0" dirty="0">
+                <a:solidFill>
+                  <a:srgbClr val="263238"/>
+                </a:solidFill>
+                <a:latin typeface="Meiryo"/>
+              </a:rPr>
+              <a:t>　：</a:t>
+            </a:r>
+            <a:r>
+              <a:rPr sz="1050" b="0" i="0" dirty="0" err="1">
+                <a:solidFill>
+                  <a:srgbClr val="263238"/>
+                </a:solidFill>
+                <a:latin typeface="Meiryo"/>
+              </a:rPr>
+              <a:t>クリックして閉じる</a:t>
+            </a:r>
+            <a:endParaRPr lang="en-US" sz="1050" b="0" i="0" dirty="0">
+              <a:solidFill>
+                <a:srgbClr val="263238"/>
+              </a:solidFill>
+              <a:latin typeface="Meiryo"/>
+            </a:endParaRPr>
           </a:p>
           <a:p>
             <a:pPr algn="l">
@@ -10305,22 +11492,31 @@
               </a:spcAft>
             </a:pPr>
             <a:r>
-              <a:rPr sz="1050" b="1" i="0">
-                <a:solidFill>
-                  <a:srgbClr val="546E7A"/>
-                </a:solidFill>
-                <a:latin typeface="Meiryo"/>
-              </a:rPr>
-              <a:t>「メイン表示に戻す」ボタン</a:t>
-            </a:r>
-            <a:r>
-              <a:rPr sz="1050" b="0" i="0">
-                <a:solidFill>
-                  <a:srgbClr val="263238"/>
-                </a:solidFill>
-                <a:latin typeface="Meiryo"/>
-              </a:rPr>
-              <a:t>　：同ボタンを再クリックして閉じる</a:t>
+              <a:rPr sz="1050" b="1" i="0" dirty="0">
+                <a:solidFill>
+                  <a:srgbClr val="80CBC4"/>
+                </a:solidFill>
+                <a:latin typeface="Meiryo"/>
+              </a:rPr>
+              <a:t>【</a:t>
+            </a:r>
+            <a:r>
+              <a:rPr sz="1050" b="1" i="0" dirty="0" err="1">
+                <a:solidFill>
+                  <a:srgbClr val="80CBC4"/>
+                </a:solidFill>
+                <a:latin typeface="Meiryo"/>
+              </a:rPr>
+              <a:t>全画面リソースモードを終了する場合</a:t>
+            </a:r>
+            <a:r>
+              <a:rPr sz="1050" b="1" i="0" dirty="0">
+                <a:solidFill>
+                  <a:srgbClr val="80CBC4"/>
+                </a:solidFill>
+                <a:latin typeface="Meiryo"/>
+              </a:rPr>
+              <a:t>】</a:t>
             </a:r>
           </a:p>
           <a:p>
@@ -10330,14 +11526,115 @@
               </a:spcAft>
             </a:pPr>
             <a:r>
-              <a:rPr sz="1050" b="1" i="0">
-                <a:solidFill>
-                  <a:srgbClr val="80CBC4"/>
-                </a:solidFill>
-                <a:latin typeface="Meiryo"/>
-              </a:rPr>
-              <a:t>【全画面リソースモードを終了する場合】</a:t>
-            </a:r>
+              <a:rPr sz="1050" b="1" i="0" dirty="0" err="1">
+                <a:solidFill>
+                  <a:srgbClr val="546E7A"/>
+                </a:solidFill>
+                <a:latin typeface="Meiryo"/>
+              </a:rPr>
+              <a:t>図面</a:t>
+            </a:r>
+            <a:r>
+              <a:rPr sz="1050" b="1" i="0" dirty="0">
+                <a:solidFill>
+                  <a:srgbClr val="546E7A"/>
+                </a:solidFill>
+                <a:latin typeface="Meiryo"/>
+              </a:rPr>
+              <a:t>/</a:t>
+            </a:r>
+            <a:r>
+              <a:rPr sz="1050" b="1" i="0" dirty="0" err="1">
+                <a:solidFill>
+                  <a:srgbClr val="546E7A"/>
+                </a:solidFill>
+                <a:latin typeface="Meiryo"/>
+              </a:rPr>
+              <a:t>計画</a:t>
+            </a:r>
+            <a:r>
+              <a:rPr sz="1050" b="1" i="0" dirty="0">
+                <a:solidFill>
+                  <a:srgbClr val="546E7A"/>
+                </a:solidFill>
+                <a:latin typeface="Meiryo"/>
+              </a:rPr>
+              <a:t>/</a:t>
+            </a:r>
+            <a:r>
+              <a:rPr sz="1050" b="1" i="0" dirty="0" err="1">
+                <a:solidFill>
+                  <a:srgbClr val="546E7A"/>
+                </a:solidFill>
+                <a:latin typeface="Meiryo"/>
+              </a:rPr>
+              <a:t>長納期品</a:t>
+            </a:r>
+            <a:r>
+              <a:rPr sz="1050" b="1" i="0" dirty="0">
+                <a:solidFill>
+                  <a:srgbClr val="546E7A"/>
+                </a:solidFill>
+                <a:latin typeface="Meiryo"/>
+              </a:rPr>
+              <a:t>/</a:t>
+            </a:r>
+            <a:r>
+              <a:rPr sz="1050" b="1" i="0" dirty="0" err="1">
+                <a:solidFill>
+                  <a:srgbClr val="546E7A"/>
+                </a:solidFill>
+                <a:latin typeface="Meiryo"/>
+              </a:rPr>
+              <a:t>出張</a:t>
+            </a:r>
+            <a:r>
+              <a:rPr lang="ja-JP" altLang="en-US" sz="1050" b="1" dirty="0">
+                <a:solidFill>
+                  <a:srgbClr val="546E7A"/>
+                </a:solidFill>
+                <a:latin typeface="メイリオ" panose="020B0604030504040204" pitchFamily="50" charset="-128"/>
+                <a:ea typeface="メイリオ" panose="020B0604030504040204" pitchFamily="50" charset="-128"/>
+              </a:rPr>
+              <a:t>ボタン</a:t>
+            </a:r>
+            <a:r>
+              <a:rPr sz="1050" b="0" i="0" dirty="0">
+                <a:solidFill>
+                  <a:srgbClr val="263238"/>
+                </a:solidFill>
+                <a:latin typeface="メイリオ" panose="020B0604030504040204" pitchFamily="50" charset="-128"/>
+                <a:ea typeface="メイリオ" panose="020B0604030504040204" pitchFamily="50" charset="-128"/>
+              </a:rPr>
+              <a:t>：</a:t>
+            </a:r>
+            <a:r>
+              <a:rPr sz="1050" b="0" i="0" dirty="0" err="1">
+                <a:solidFill>
+                  <a:srgbClr val="263238"/>
+                </a:solidFill>
+                <a:latin typeface="メイリオ" panose="020B0604030504040204" pitchFamily="50" charset="-128"/>
+                <a:ea typeface="メイリオ" panose="020B0604030504040204" pitchFamily="50" charset="-128"/>
+              </a:rPr>
+              <a:t>クリックでガントビューに切替</a:t>
+            </a:r>
+            <a:r>
+              <a:rPr sz="950" b="0" i="1" dirty="0">
+                <a:solidFill>
+                  <a:srgbClr val="90A4AE"/>
+                </a:solidFill>
+                <a:latin typeface="メイリオ" panose="020B0604030504040204" pitchFamily="50" charset="-128"/>
+                <a:ea typeface="メイリオ" panose="020B0604030504040204" pitchFamily="50" charset="-128"/>
+              </a:rPr>
+              <a:t>　</a:t>
+            </a:r>
+            <a:endParaRPr lang="en-US" sz="950" b="0" i="1" dirty="0">
+              <a:solidFill>
+                <a:srgbClr val="90A4AE"/>
+              </a:solidFill>
+              <a:latin typeface="メイリオ" panose="020B0604030504040204" pitchFamily="50" charset="-128"/>
+              <a:ea typeface="メイリオ" panose="020B0604030504040204" pitchFamily="50" charset="-128"/>
+            </a:endParaRPr>
           </a:p>
           <a:p>
             <a:pPr algn="l">
@@ -10346,32 +11643,29 @@
               </a:spcAft>
             </a:pPr>
             <a:r>
-              <a:rPr sz="1050" b="1" i="0">
-                <a:solidFill>
-                  <a:srgbClr val="546E7A"/>
-                </a:solidFill>
-                <a:latin typeface="Meiryo"/>
-              </a:rPr>
-              <a:t>フィルタ（図面/計画/長納期品/出張）</a:t>
-            </a:r>
-            <a:r>
-              <a:rPr sz="1050" b="0" i="0">
-                <a:solidFill>
-                  <a:srgbClr val="263238"/>
-                </a:solidFill>
-                <a:latin typeface="Meiryo"/>
-              </a:rPr>
-              <a:t>　：クリックでガントビューに切替</a:t>
-            </a:r>
-            <a:r>
-              <a:rPr sz="950" b="0" i="1">
+              <a:rPr sz="950" b="0" i="1" dirty="0">
                 <a:solidFill>
                   <a:srgbClr val="90A4AE"/>
                 </a:solidFill>
                 <a:latin typeface="Meiryo"/>
               </a:rPr>
-              <a:t>　※「担当別」再クリックでは閉じられません</a:t>
-            </a:r>
+              <a:t>※「</a:t>
+            </a:r>
+            <a:r>
+              <a:rPr sz="950" b="0" i="1" dirty="0" err="1">
+                <a:solidFill>
+                  <a:srgbClr val="90A4AE"/>
+                </a:solidFill>
+                <a:latin typeface="Meiryo"/>
+              </a:rPr>
+              <a:t>担当別」再クリックでは閉じられません</a:t>
+            </a:r>
+            <a:endParaRPr sz="950" b="0" i="1" dirty="0">
+              <a:solidFill>
+                <a:srgbClr val="90A4AE"/>
+              </a:solidFill>
+              <a:latin typeface="Meiryo"/>
+            </a:endParaRPr>
           </a:p>
         </p:txBody>
       </p:sp>
@@ -10417,6 +11711,7 @@
           <a:lstStyle/>
           <a:p>
             <a:pPr algn="ctr"/>
+            <a:endParaRPr/>
           </a:p>
         </p:txBody>
       </p:sp>
@@ -10436,7 +11731,7 @@
           </a:prstGeom>
           <a:noFill/>
         </p:spPr>
-        <p:txBody insetl="0" insertr="0" insett="0" insetb="0">
+        <p:txBody>
           <a:bodyPr wrap="square" anchor="ctr">
             <a:spAutoFit/>
           </a:bodyPr>
@@ -10444,25 +11739,58 @@
           <a:p>
             <a:pPr algn="l"/>
             <a:r>
-              <a:rPr sz="1050" b="1" i="0">
+              <a:rPr sz="1050" b="1" i="0" dirty="0">
                 <a:solidFill>
                   <a:srgbClr val="F57F17"/>
                 </a:solidFill>
                 <a:latin typeface="Meiryo"/>
               </a:rPr>
-              <a:t>ℹ ヒント</a:t>
-            </a:r>
+              <a:t>ℹ </a:t>
+            </a:r>
+            <a:r>
+              <a:rPr sz="1050" b="1" i="0" dirty="0" err="1">
+                <a:solidFill>
+                  <a:srgbClr val="F57F17"/>
+                </a:solidFill>
+                <a:latin typeface="Meiryo"/>
+              </a:rPr>
+              <a:t>ヒント</a:t>
+            </a:r>
+            <a:endParaRPr sz="1050" b="1" i="0" dirty="0">
+              <a:solidFill>
+                <a:srgbClr val="F57F17"/>
+              </a:solidFill>
+              <a:latin typeface="Meiryo"/>
+            </a:endParaRPr>
           </a:p>
           <a:p>
             <a:pPr algn="l"/>
             <a:r>
-              <a:rPr sz="1050" b="0" i="0">
+              <a:rPr sz="1050" b="0" i="0" dirty="0">
                 <a:solidFill>
                   <a:srgbClr val="5D4037"/>
                 </a:solidFill>
                 <a:latin typeface="Meiryo"/>
               </a:rPr>
-              <a:t>「リソース表示」ボタンで開いた場合、ガントチャートと並列表示されます。両者のスクロール位置は連動します。</a:t>
+              <a:t>「</a:t>
+            </a:r>
+            <a:r>
+              <a:rPr sz="1050" b="0" i="0" dirty="0" err="1">
+                <a:solidFill>
+                  <a:srgbClr val="5D4037"/>
+                </a:solidFill>
+                <a:latin typeface="Meiryo"/>
+              </a:rPr>
+              <a:t>リソース表示」ボタンで開いた場合、ガントチャートと並列表示されます。両者のスクロール位置は連動します</a:t>
+            </a:r>
+            <a:r>
+              <a:rPr sz="1050" b="0" i="0" dirty="0">
+                <a:solidFill>
+                  <a:srgbClr val="5D4037"/>
+                </a:solidFill>
+                <a:latin typeface="Meiryo"/>
+              </a:rPr>
+              <a:t>。</a:t>
             </a:r>
           </a:p>
         </p:txBody>
@@ -10476,7 +11804,7 @@
 </file>
 
 <file path=ppt/slides/slide8.xml><?xml version="1.0" encoding="utf-8"?>
-<p:sld xmlns:a="http://schemas.openxmlformats.org/drawingml/2006/main" xmlns:p="http://schemas.openxmlformats.org/presentationml/2006/main" xmlns:r="http://schemas.openxmlformats.org/officeDocument/2006/relationships">
+<p:sld xmlns:a="http://schemas.openxmlformats.org/drawingml/2006/main" xmlns:r="http://schemas.openxmlformats.org/officeDocument/2006/relationships" xmlns:p="http://schemas.openxmlformats.org/presentationml/2006/main">
   <p:cSld>
     <p:bg>
       <p:bgPr>
@@ -10492,7 +11820,14 @@
         <p:cNvGrpSpPr/>
         <p:nvPr/>
       </p:nvGrpSpPr>
-      <p:grpSpPr/>
+      <p:grpSpPr>
+        <a:xfrm>
+          <a:off x="0" y="0"/>
+          <a:ext cx="0" cy="0"/>
+          <a:chOff x="0" y="0"/>
+          <a:chExt cx="0" cy="0"/>
+        </a:xfrm>
+      </p:grpSpPr>
       <p:sp>
         <p:nvSpPr>
           <p:cNvPr id="2" name="Rectangle 1"/>
@@ -10533,6 +11868,7 @@
           <a:lstStyle/>
           <a:p>
             <a:pPr algn="ctr"/>
+            <a:endParaRPr/>
           </a:p>
         </p:txBody>
       </p:sp>
@@ -10552,7 +11888,7 @@
           </a:prstGeom>
           <a:noFill/>
         </p:spPr>
-        <p:txBody insetl="0" insertr="0" insett="0" insetb="0">
+        <p:txBody>
           <a:bodyPr wrap="square" anchor="ctr">
             <a:spAutoFit/>
           </a:bodyPr>
@@ -10611,6 +11947,7 @@
           <a:lstStyle/>
           <a:p>
             <a:pPr algn="ctr"/>
+            <a:endParaRPr/>
           </a:p>
         </p:txBody>
       </p:sp>
@@ -10630,7 +11967,7 @@
           </a:prstGeom>
           <a:noFill/>
         </p:spPr>
-        <p:txBody insetl="0" insertr="0" insett="0" insetb="0">
+        <p:txBody>
           <a:bodyPr wrap="square" anchor="t">
             <a:spAutoFit/>
           </a:bodyPr>
@@ -10691,6 +12028,7 @@
           <a:lstStyle/>
           <a:p>
             <a:pPr algn="ctr"/>
+            <a:endParaRPr/>
           </a:p>
         </p:txBody>
       </p:sp>
@@ -10734,6 +12072,7 @@
           <a:lstStyle/>
           <a:p>
             <a:pPr algn="ctr"/>
+            <a:endParaRPr/>
           </a:p>
         </p:txBody>
       </p:sp>
@@ -10753,7 +12092,7 @@
           </a:prstGeom>
           <a:noFill/>
         </p:spPr>
-        <p:txBody insetl="0" insertr="0" insett="0" insetb="0">
+        <p:txBody>
           <a:bodyPr wrap="square" anchor="ctr">
             <a:spAutoFit/>
           </a:bodyPr>
@@ -10788,7 +12127,7 @@
           </a:prstGeom>
           <a:noFill/>
         </p:spPr>
-        <p:txBody insetl="0" insertr="0" insett="0" insetb="0">
+        <p:txBody>
           <a:bodyPr wrap="square" anchor="ctr">
             <a:spAutoFit/>
           </a:bodyPr>
@@ -10885,6 +12224,7 @@
           <a:lstStyle/>
           <a:p>
             <a:pPr algn="ctr"/>
+            <a:endParaRPr/>
           </a:p>
         </p:txBody>
       </p:sp>
@@ -10928,6 +12268,7 @@
           <a:lstStyle/>
           <a:p>
             <a:pPr algn="ctr"/>
+            <a:endParaRPr/>
           </a:p>
         </p:txBody>
       </p:sp>
@@ -10947,7 +12288,7 @@
           </a:prstGeom>
           <a:noFill/>
         </p:spPr>
-        <p:txBody insetl="0" insertr="0" insett="0" insetb="0">
+        <p:txBody>
           <a:bodyPr wrap="square" anchor="ctr">
             <a:spAutoFit/>
           </a:bodyPr>
@@ -10974,15 +12315,15 @@
         </p:nvSpPr>
         <p:spPr>
           <a:xfrm>
-            <a:off x="338328" y="2148840"/>
-            <a:ext cx="3941063" cy="1005839"/>
+            <a:off x="320040" y="2228120"/>
+            <a:ext cx="3941063" cy="469359"/>
           </a:xfrm>
           <a:prstGeom prst="rect">
             <a:avLst/>
           </a:prstGeom>
           <a:noFill/>
         </p:spPr>
-        <p:txBody insetl="0" insertr="0" insett="0" insetb="0">
+        <p:txBody>
           <a:bodyPr wrap="square" anchor="ctr">
             <a:spAutoFit/>
           </a:bodyPr>
@@ -10994,14 +12335,47 @@
               </a:spcAft>
             </a:pPr>
             <a:r>
-              <a:rPr sz="1100" b="1" i="0">
-                <a:solidFill>
-                  <a:srgbClr val="263238"/>
-                </a:solidFill>
-                <a:latin typeface="Meiryo"/>
-              </a:rPr>
-              <a:t>「アーカイブ ▼」→「アーカイブ管理」を選択</a:t>
-            </a:r>
+              <a:rPr sz="1100" b="1" i="0" dirty="0">
+                <a:solidFill>
+                  <a:srgbClr val="263238"/>
+                </a:solidFill>
+                <a:latin typeface="Meiryo"/>
+              </a:rPr>
+              <a:t>「</a:t>
+            </a:r>
+            <a:r>
+              <a:rPr sz="1100" b="1" i="0" dirty="0" err="1">
+                <a:solidFill>
+                  <a:srgbClr val="263238"/>
+                </a:solidFill>
+                <a:latin typeface="Meiryo"/>
+              </a:rPr>
+              <a:t>アーカイブ</a:t>
+            </a:r>
+            <a:r>
+              <a:rPr sz="1100" b="1" i="0" dirty="0">
+                <a:solidFill>
+                  <a:srgbClr val="263238"/>
+                </a:solidFill>
+                <a:latin typeface="Meiryo"/>
+              </a:rPr>
+              <a:t> ▼」→「</a:t>
+            </a:r>
+            <a:r>
+              <a:rPr sz="1100" b="1" i="0" dirty="0" err="1">
+                <a:solidFill>
+                  <a:srgbClr val="263238"/>
+                </a:solidFill>
+                <a:latin typeface="Meiryo"/>
+              </a:rPr>
+              <a:t>アーカイブ管理」を選択</a:t>
+            </a:r>
+            <a:endParaRPr sz="1100" b="1" i="0" dirty="0">
+              <a:solidFill>
+                <a:srgbClr val="263238"/>
+              </a:solidFill>
+              <a:latin typeface="Meiryo"/>
+            </a:endParaRPr>
           </a:p>
           <a:p>
             <a:pPr algn="l">
@@ -11010,14 +12384,86 @@
               </a:spcAft>
             </a:pPr>
             <a:r>
-              <a:rPr sz="1100" b="0" i="0">
-                <a:solidFill>
-                  <a:srgbClr val="263238"/>
-                </a:solidFill>
-                <a:latin typeface="Meiryo"/>
-              </a:rPr>
-              <a:t>アーカイブしたいタスクにチェックを入れて「アーカイブ実行」を押します</a:t>
-            </a:r>
+              <a:rPr sz="1100" b="0" i="0" dirty="0" err="1">
+                <a:solidFill>
+                  <a:srgbClr val="263238"/>
+                </a:solidFill>
+                <a:latin typeface="Meiryo"/>
+              </a:rPr>
+              <a:t>アーカイブしたい</a:t>
+            </a:r>
+            <a:r>
+              <a:rPr lang="ja-JP" altLang="en-US" sz="1100" b="0" i="0" dirty="0">
+                <a:solidFill>
+                  <a:srgbClr val="263238"/>
+                </a:solidFill>
+                <a:latin typeface="メイリオ" panose="020B0604030504040204" pitchFamily="50" charset="-128"/>
+                <a:ea typeface="メイリオ" panose="020B0604030504040204" pitchFamily="50" charset="-128"/>
+              </a:rPr>
+              <a:t>工事番号</a:t>
+            </a:r>
+            <a:r>
+              <a:rPr lang="ja-JP" altLang="en-US" sz="1100" dirty="0">
+                <a:solidFill>
+                  <a:srgbClr val="263238"/>
+                </a:solidFill>
+                <a:latin typeface="Meiryo"/>
+                <a:ea typeface="メイリオ" panose="020B0604030504040204" pitchFamily="50" charset="-128"/>
+              </a:rPr>
+              <a:t>の</a:t>
+            </a:r>
+            <a:r>
+              <a:rPr sz="1100" b="0" i="0" dirty="0">
+                <a:solidFill>
+                  <a:srgbClr val="263238"/>
+                </a:solidFill>
+                <a:latin typeface="Meiryo"/>
+              </a:rPr>
+              <a:t>「</a:t>
+            </a:r>
+            <a:r>
+              <a:rPr sz="1100" b="0" i="0" dirty="0" err="1">
+                <a:solidFill>
+                  <a:srgbClr val="263238"/>
+                </a:solidFill>
+                <a:latin typeface="Meiryo"/>
+              </a:rPr>
+              <a:t>アーカイブ</a:t>
+            </a:r>
+            <a:r>
+              <a:rPr lang="ja-JP" altLang="en-US" sz="1100" b="0" i="0" dirty="0">
+                <a:solidFill>
+                  <a:srgbClr val="263238"/>
+                </a:solidFill>
+                <a:latin typeface="メイリオ" panose="020B0604030504040204" pitchFamily="50" charset="-128"/>
+                <a:ea typeface="メイリオ" panose="020B0604030504040204" pitchFamily="50" charset="-128"/>
+              </a:rPr>
+              <a:t>へ</a:t>
+            </a:r>
+            <a:r>
+              <a:rPr sz="1100" b="0" i="0" dirty="0">
+                <a:solidFill>
+                  <a:srgbClr val="263238"/>
+                </a:solidFill>
+                <a:latin typeface="Meiryo"/>
+              </a:rPr>
+              <a:t>」</a:t>
+            </a:r>
+            <a:r>
+              <a:rPr sz="1100" b="0" i="0" dirty="0" err="1">
+                <a:solidFill>
+                  <a:srgbClr val="263238"/>
+                </a:solidFill>
+                <a:latin typeface="Meiryo"/>
+              </a:rPr>
+              <a:t>を押します</a:t>
+            </a:r>
+            <a:endParaRPr sz="1100" b="0" i="0" dirty="0">
+              <a:solidFill>
+                <a:srgbClr val="263238"/>
+              </a:solidFill>
+              <a:latin typeface="Meiryo"/>
+            </a:endParaRPr>
           </a:p>
         </p:txBody>
       </p:sp>
@@ -11063,6 +12509,7 @@
           <a:lstStyle/>
           <a:p>
             <a:pPr algn="ctr"/>
+            <a:endParaRPr/>
           </a:p>
         </p:txBody>
       </p:sp>
@@ -11106,6 +12553,7 @@
           <a:lstStyle/>
           <a:p>
             <a:pPr algn="ctr"/>
+            <a:endParaRPr/>
           </a:p>
         </p:txBody>
       </p:sp>
@@ -11125,7 +12573,7 @@
           </a:prstGeom>
           <a:noFill/>
         </p:spPr>
-        <p:txBody insetl="0" insertr="0" insett="0" insetb="0">
+        <p:txBody>
           <a:bodyPr wrap="square" anchor="ctr">
             <a:spAutoFit/>
           </a:bodyPr>
@@ -11160,7 +12608,7 @@
           </a:prstGeom>
           <a:noFill/>
         </p:spPr>
-        <p:txBody insetl="0" insertr="0" insett="0" insetb="0">
+        <p:txBody>
           <a:bodyPr wrap="square" anchor="t">
             <a:spAutoFit/>
           </a:bodyPr>
@@ -11172,14 +12620,29 @@
               </a:spcAft>
             </a:pPr>
             <a:r>
-              <a:rPr sz="1050" b="1" i="0">
+              <a:rPr sz="1050" b="1" i="0" dirty="0">
                 <a:solidFill>
                   <a:srgbClr val="1B5E20"/>
                 </a:solidFill>
                 <a:latin typeface="Meiryo"/>
               </a:rPr>
-              <a:t>「戻す」ボタンで現役に戻せます</a:t>
-            </a:r>
+              <a:t>「</a:t>
+            </a:r>
+            <a:r>
+              <a:rPr sz="1050" b="1" i="0" dirty="0" err="1">
+                <a:solidFill>
+                  <a:srgbClr val="1B5E20"/>
+                </a:solidFill>
+                <a:latin typeface="Meiryo"/>
+              </a:rPr>
+              <a:t>戻す」ボタンで現役に戻せます</a:t>
+            </a:r>
+            <a:endParaRPr sz="1050" b="1" i="0" dirty="0">
+              <a:solidFill>
+                <a:srgbClr val="1B5E20"/>
+              </a:solidFill>
+              <a:latin typeface="Meiryo"/>
+            </a:endParaRPr>
           </a:p>
           <a:p>
             <a:pPr algn="l">
@@ -11188,25 +12651,43 @@
               </a:spcAft>
             </a:pPr>
             <a:r>
-              <a:rPr sz="1050" b="0" i="0">
-                <a:solidFill>
-                  <a:srgbClr val="263238"/>
-                </a:solidFill>
-                <a:latin typeface="Meiryo"/>
-              </a:rPr>
-              <a:t>アーカイブ一覧の「戻す」ボタンを押すと、</a:t>
+              <a:rPr sz="1050" b="0" i="0" dirty="0" err="1">
+                <a:solidFill>
+                  <a:srgbClr val="263238"/>
+                </a:solidFill>
+                <a:latin typeface="Meiryo"/>
+              </a:rPr>
+              <a:t>アーカイブ一覧の「戻す」ボタンを押すと</a:t>
+            </a:r>
+            <a:r>
+              <a:rPr sz="1050" b="0" i="0" dirty="0">
+                <a:solidFill>
+                  <a:srgbClr val="263238"/>
+                </a:solidFill>
+                <a:latin typeface="Meiryo"/>
+              </a:rPr>
+              <a:t>、</a:t>
             </a:r>
             <a:br>
-              <a:rPr lang="ja-JP" sz="1050"/>
+              <a:rPr lang="ja-JP" sz="1050" dirty="0"/>
             </a:br>
             <a:r>
-              <a:rPr sz="1050" b="0" i="0">
-                <a:solidFill>
-                  <a:srgbClr val="263238"/>
-                </a:solidFill>
-                <a:latin typeface="Meiryo"/>
-              </a:rPr>
-              <a:t>その工事のすべてのタスクがメイン画面に復元されます。</a:t>
+              <a:rPr sz="1050" b="0" i="0" dirty="0" err="1">
+                <a:solidFill>
+                  <a:srgbClr val="263238"/>
+                </a:solidFill>
+                <a:latin typeface="Meiryo"/>
+              </a:rPr>
+              <a:t>その工事のすべてのタスクがメイン画面に復元されます</a:t>
+            </a:r>
+            <a:r>
+              <a:rPr sz="1050" b="0" i="0" dirty="0">
+                <a:solidFill>
+                  <a:srgbClr val="263238"/>
+                </a:solidFill>
+                <a:latin typeface="Meiryo"/>
+              </a:rPr>
+              <a:t>。</a:t>
             </a:r>
           </a:p>
         </p:txBody>
@@ -11253,6 +12734,7 @@
           <a:lstStyle/>
           <a:p>
             <a:pPr algn="ctr"/>
+            <a:endParaRPr/>
           </a:p>
         </p:txBody>
       </p:sp>
@@ -11296,6 +12778,7 @@
           <a:lstStyle/>
           <a:p>
             <a:pPr algn="ctr"/>
+            <a:endParaRPr/>
           </a:p>
         </p:txBody>
       </p:sp>
@@ -11315,7 +12798,7 @@
           </a:prstGeom>
           <a:noFill/>
         </p:spPr>
-        <p:txBody insetl="0" insertr="0" insett="0" insetb="0">
+        <p:txBody>
           <a:bodyPr wrap="square" anchor="ctr">
             <a:spAutoFit/>
           </a:bodyPr>
@@ -11350,7 +12833,7 @@
           </a:prstGeom>
           <a:noFill/>
         </p:spPr>
-        <p:txBody insetl="0" insertr="0" insett="0" insetb="0">
+        <p:txBody>
           <a:bodyPr wrap="square" anchor="t">
             <a:spAutoFit/>
           </a:bodyPr>
@@ -11393,6 +12876,12 @@
                 <a:spcPts val="100"/>
               </a:spcAft>
             </a:pPr>
+            <a:endParaRPr sz="1050" b="0" i="0">
+              <a:solidFill>
+                <a:srgbClr val="263238"/>
+              </a:solidFill>
+              <a:latin typeface="Meiryo"/>
+            </a:endParaRPr>
           </a:p>
           <a:p>
             <a:pPr algn="l">
@@ -11448,6 +12937,12 @@
                 <a:spcPts val="100"/>
               </a:spcAft>
             </a:pPr>
+            <a:endParaRPr sz="1050" b="0" i="0">
+              <a:solidFill>
+                <a:srgbClr val="263238"/>
+              </a:solidFill>
+              <a:latin typeface="Meiryo"/>
+            </a:endParaRPr>
           </a:p>
           <a:p>
             <a:pPr algn="l">
@@ -11572,7 +13067,7 @@
 </file>
 
 <file path=ppt/slides/slide9.xml><?xml version="1.0" encoding="utf-8"?>
-<p:sld xmlns:a="http://schemas.openxmlformats.org/drawingml/2006/main" xmlns:p="http://schemas.openxmlformats.org/presentationml/2006/main" xmlns:r="http://schemas.openxmlformats.org/officeDocument/2006/relationships">
+<p:sld xmlns:a="http://schemas.openxmlformats.org/drawingml/2006/main" xmlns:r="http://schemas.openxmlformats.org/officeDocument/2006/relationships" xmlns:p="http://schemas.openxmlformats.org/presentationml/2006/main">
   <p:cSld>
     <p:bg>
       <p:bgPr>
@@ -11588,7 +13083,14 @@
         <p:cNvGrpSpPr/>
         <p:nvPr/>
       </p:nvGrpSpPr>
-      <p:grpSpPr/>
+      <p:grpSpPr>
+        <a:xfrm>
+          <a:off x="0" y="0"/>
+          <a:ext cx="0" cy="0"/>
+          <a:chOff x="0" y="0"/>
+          <a:chExt cx="0" cy="0"/>
+        </a:xfrm>
+      </p:grpSpPr>
       <p:sp>
         <p:nvSpPr>
           <p:cNvPr id="2" name="Rectangle 1"/>
@@ -11629,6 +13131,7 @@
           <a:lstStyle/>
           <a:p>
             <a:pPr algn="ctr"/>
+            <a:endParaRPr/>
           </a:p>
         </p:txBody>
       </p:sp>
@@ -11648,7 +13151,7 @@
           </a:prstGeom>
           <a:noFill/>
         </p:spPr>
-        <p:txBody insetl="0" insertr="0" insett="0" insetb="0">
+        <p:txBody>
           <a:bodyPr wrap="square" anchor="ctr">
             <a:spAutoFit/>
           </a:bodyPr>
@@ -11707,6 +13210,7 @@
           <a:lstStyle/>
           <a:p>
             <a:pPr algn="ctr"/>
+            <a:endParaRPr/>
           </a:p>
         </p:txBody>
       </p:sp>
@@ -11726,7 +13230,7 @@
           </a:prstGeom>
           <a:noFill/>
         </p:spPr>
-        <p:txBody insetl="0" insertr="0" insett="0" insetb="0">
+        <p:txBody>
           <a:bodyPr wrap="square" anchor="t">
             <a:spAutoFit/>
           </a:bodyPr>
@@ -11785,6 +13289,7 @@
           <a:lstStyle/>
           <a:p>
             <a:pPr algn="ctr"/>
+            <a:endParaRPr/>
           </a:p>
         </p:txBody>
       </p:sp>
@@ -11804,7 +13309,7 @@
           </a:prstGeom>
           <a:noFill/>
         </p:spPr>
-        <p:txBody insetl="0" insertr="0" insett="0" insetb="0">
+        <p:txBody>
           <a:bodyPr wrap="square" anchor="t">
             <a:spAutoFit/>
           </a:bodyPr>
@@ -11839,7 +13344,7 @@
           </a:prstGeom>
           <a:noFill/>
         </p:spPr>
-        <p:txBody insetl="0" insertr="0" insett="0" insetb="0">
+        <p:txBody>
           <a:bodyPr wrap="square" anchor="t">
             <a:spAutoFit/>
           </a:bodyPr>
@@ -11898,6 +13403,7 @@
           <a:lstStyle/>
           <a:p>
             <a:pPr algn="ctr"/>
+            <a:endParaRPr/>
           </a:p>
         </p:txBody>
       </p:sp>
@@ -11917,7 +13423,7 @@
           </a:prstGeom>
           <a:noFill/>
         </p:spPr>
-        <p:txBody insetl="0" insertr="0" insett="0" insetb="0">
+        <p:txBody>
           <a:bodyPr wrap="square" anchor="t">
             <a:spAutoFit/>
           </a:bodyPr>
@@ -11952,7 +13458,7 @@
           </a:prstGeom>
           <a:noFill/>
         </p:spPr>
-        <p:txBody insetl="0" insertr="0" insett="0" insetb="0">
+        <p:txBody>
           <a:bodyPr wrap="square" anchor="t">
             <a:spAutoFit/>
           </a:bodyPr>
@@ -12011,6 +13517,7 @@
           <a:lstStyle/>
           <a:p>
             <a:pPr algn="ctr"/>
+            <a:endParaRPr/>
           </a:p>
         </p:txBody>
       </p:sp>
@@ -12030,7 +13537,7 @@
           </a:prstGeom>
           <a:noFill/>
         </p:spPr>
-        <p:txBody insetl="0" insertr="0" insett="0" insetb="0">
+        <p:txBody>
           <a:bodyPr wrap="square" anchor="t">
             <a:spAutoFit/>
           </a:bodyPr>
@@ -12065,7 +13572,7 @@
           </a:prstGeom>
           <a:noFill/>
         </p:spPr>
-        <p:txBody insetl="0" insertr="0" insett="0" insetb="0">
+        <p:txBody>
           <a:bodyPr wrap="square" anchor="t">
             <a:spAutoFit/>
           </a:bodyPr>
@@ -12124,6 +13631,7 @@
           <a:lstStyle/>
           <a:p>
             <a:pPr algn="ctr"/>
+            <a:endParaRPr/>
           </a:p>
         </p:txBody>
       </p:sp>
@@ -12143,7 +13651,7 @@
           </a:prstGeom>
           <a:noFill/>
         </p:spPr>
-        <p:txBody insetl="0" insertr="0" insett="0" insetb="0">
+        <p:txBody>
           <a:bodyPr wrap="square" anchor="t">
             <a:spAutoFit/>
           </a:bodyPr>
@@ -12178,7 +13686,7 @@
           </a:prstGeom>
           <a:noFill/>
         </p:spPr>
-        <p:txBody insetl="0" insertr="0" insett="0" insetb="0">
+        <p:txBody>
           <a:bodyPr wrap="square" anchor="t">
             <a:spAutoFit/>
           </a:bodyPr>
@@ -12237,6 +13745,7 @@
           <a:lstStyle/>
           <a:p>
             <a:pPr algn="ctr"/>
+            <a:endParaRPr/>
           </a:p>
         </p:txBody>
       </p:sp>
@@ -12256,7 +13765,7 @@
           </a:prstGeom>
           <a:noFill/>
         </p:spPr>
-        <p:txBody insetl="0" insertr="0" insett="0" insetb="0">
+        <p:txBody>
           <a:bodyPr wrap="square" anchor="t">
             <a:spAutoFit/>
           </a:bodyPr>
@@ -12291,7 +13800,7 @@
           </a:prstGeom>
           <a:noFill/>
         </p:spPr>
-        <p:txBody insetl="0" insertr="0" insett="0" insetb="0">
+        <p:txBody>
           <a:bodyPr wrap="square" anchor="t">
             <a:spAutoFit/>
           </a:bodyPr>
@@ -12350,6 +13859,7 @@
           <a:lstStyle/>
           <a:p>
             <a:pPr algn="ctr"/>
+            <a:endParaRPr/>
           </a:p>
         </p:txBody>
       </p:sp>
@@ -12369,7 +13879,7 @@
           </a:prstGeom>
           <a:noFill/>
         </p:spPr>
-        <p:txBody insetl="0" insertr="0" insett="0" insetb="0">
+        <p:txBody>
           <a:bodyPr wrap="square" anchor="t">
             <a:spAutoFit/>
           </a:bodyPr>
@@ -12404,7 +13914,7 @@
           </a:prstGeom>
           <a:noFill/>
         </p:spPr>
-        <p:txBody insetl="0" insertr="0" insett="0" insetb="0">
+        <p:txBody>
           <a:bodyPr wrap="square" anchor="t">
             <a:spAutoFit/>
           </a:bodyPr>
